--- a/output_all_layouts_test.pptx
+++ b/output_all_layouts_test.pptx
@@ -1,6 +1,6 @@
 
 <file path=ppt/presentation.xml><?xml version="1.0" encoding="utf-8"?>
-<p:presentation xmlns:a="http://schemas.openxmlformats.org/drawingml/2006/main" xmlns:r="http://schemas.openxmlformats.org/officeDocument/2006/relationships" xmlns:p="http://schemas.openxmlformats.org/presentationml/2006/main" xmlns:mc="http://schemas.openxmlformats.org/markup-compatibility/2006" xmlns:c="http://schemas.openxmlformats.org/drawingml/2006/chart" xmlns:cdr="http://schemas.openxmlformats.org/drawingml/2006/chartDrawing" xmlns:c14="http://schemas.microsoft.com/office/drawing/2007/8/2/chart" xmlns:dgm="http://schemas.openxmlformats.org/drawingml/2006/diagram" xmlns:pic="http://schemas.openxmlformats.org/drawingml/2006/picture" xmlns:wp="http://schemas.openxmlformats.org/drawingml/2006/wordprocessingDrawing" xmlns:wp14="http://schemas.microsoft.com/office/word/2010/wordprocessingDrawing" xmlns:xdr="http://schemas.openxmlformats.org/drawingml/2006/spreadsheetDrawing" xmlns:dsp="http://schemas.microsoft.com/office/drawing/2008/diagram" xmlns:p14="http://schemas.microsoft.com/office/powerpoint/2010/main" xmlns:a14="http://schemas.microsoft.com/office/drawing/2010/main" xmlns:p15="http://schemas.microsoft.com/office/powerpoint/2012/main" xmlns:p166="http://schemas.microsoft.com/office/powerpoint/2016/6/main" xmlns:a13cmd="http://schemas.microsoft.com/office/drawing/2013/main/command" xmlns:p13cmd="http://schemas.microsoft.com/office/powerpoint/2013/main/command" xmlns:p1510="http://schemas.microsoft.com/office/powerpoint/2015/10/main" xmlns:psez="http://schemas.microsoft.com/office/powerpoint/2016/sectionzoom" xmlns:pslz="http://schemas.microsoft.com/office/powerpoint/2016/slidezoom" xmlns:psuz="http://schemas.microsoft.com/office/powerpoint/2016/summaryzoom" xmlns:p173="http://schemas.microsoft.com/office/powerpoint/2017/3/main" xmlns:b="http://schemas.openxmlformats.org/officeDocument/2006/bibliography" xmlns:msink="http://schemas.microsoft.com/ink/2010/main" xmlns:cdr14="http://schemas.microsoft.com/office/drawing/2010/chartDrawing" xmlns:c15="http://schemas.microsoft.com/office/drawing/2012/chart" xmlns:cs="http://schemas.microsoft.com/office/drawing/2012/chartStyle" xmlns:ns30="http://www.w3.org/1998/Math/MathML" xmlns:ns31="http://www.w3.org/2003/InkML" xmlns:cx="http://schemas.microsoft.com/office/drawing/2014/chartex" xmlns:c16="http://schemas.microsoft.com/office/drawing/2014/chart" xmlns:dgm1611="http://schemas.microsoft.com/office/drawing/2016/11/diagram" xmlns:c173="http://schemas.microsoft.com/office/drawing/2017/03/chart" xmlns:am3d="http://schemas.microsoft.com/office/drawing/2017/model3d" xmlns:an18="http://schemas.microsoft.com/office/drawing/2018/animation" xmlns:anam3d="http://schemas.microsoft.com/office/drawing/2018/animation/model3d" xmlns:iact="http://schemas.microsoft.com/office/powerpoint/2014/inkAction" xmlns:thm15="http://schemas.microsoft.com/office/thememl/2012/main" xmlns:wetp="http://schemas.microsoft.com/office/webextensions/taskpanes/2010/11" xmlns:we="http://schemas.microsoft.com/office/webextensions/webextension/2010/11" xmlns:comp="http://schemas.openxmlformats.org/drawingml/2006/compatibility" xmlns:lc="http://schemas.openxmlformats.org/drawingml/2006/lockedCanvas" xmlns:p159="http://schemas.microsoft.com/office/powerpoint/2015/09/main" xmlns:p16="http://schemas.microsoft.com/office/powerpoint/2015/main" xmlns:p1710="http://schemas.microsoft.com/office/powerpoint/2017/10/main" xmlns:p184="http://schemas.microsoft.com/office/powerpoint/2018/4/main" xmlns:dgm14="http://schemas.microsoft.com/office/drawing/2010/diagram" xmlns:a15="http://schemas.microsoft.com/office/drawing/2012/main" xmlns:pic14="http://schemas.microsoft.com/office/drawing/2010/picture" xmlns:c16ac="http://schemas.microsoft.com/office/drawing/2014/chart/ac" xmlns:a16="http://schemas.microsoft.com/office/drawing/2014/main" xmlns:a1611="http://schemas.microsoft.com/office/drawing/2016/11/main" xmlns:dgm1612="http://schemas.microsoft.com/office/drawing/2016/12/diagram" xmlns:a16svg="http://schemas.microsoft.com/office/drawing/2016/SVG/main" xmlns:adec="http://schemas.microsoft.com/office/drawing/2017/decorative" xmlns:a18hc="http://schemas.microsoft.com/office/drawing/2018/hyperlinkcolor" showSpecialPlsOnTitleSld="false" saveSubsetFonts="true" autoCompressPictures="false">
+<p:presentation xmlns:r="http://schemas.openxmlformats.org/officeDocument/2006/relationships" xmlns:a="http://schemas.openxmlformats.org/drawingml/2006/main" xmlns:p="http://schemas.openxmlformats.org/presentationml/2006/main" xmlns:mc="http://schemas.openxmlformats.org/markup-compatibility/2006" xmlns:c="http://schemas.openxmlformats.org/drawingml/2006/chart" xmlns:cdr="http://schemas.openxmlformats.org/drawingml/2006/chartDrawing" xmlns:c14="http://schemas.microsoft.com/office/drawing/2007/8/2/chart" xmlns:dgm="http://schemas.openxmlformats.org/drawingml/2006/diagram" xmlns:pic="http://schemas.openxmlformats.org/drawingml/2006/picture" xmlns:wp="http://schemas.openxmlformats.org/drawingml/2006/wordprocessingDrawing" xmlns:wp14="http://schemas.microsoft.com/office/word/2010/wordprocessingDrawing" xmlns:xdr="http://schemas.openxmlformats.org/drawingml/2006/spreadsheetDrawing" xmlns:dsp="http://schemas.microsoft.com/office/drawing/2008/diagram" xmlns:p14="http://schemas.microsoft.com/office/powerpoint/2010/main" xmlns:a14="http://schemas.microsoft.com/office/drawing/2010/main" xmlns:p15="http://schemas.microsoft.com/office/powerpoint/2012/main" xmlns:p166="http://schemas.microsoft.com/office/powerpoint/2016/6/main" xmlns:a13cmd="http://schemas.microsoft.com/office/drawing/2013/main/command" xmlns:p13cmd="http://schemas.microsoft.com/office/powerpoint/2013/main/command" xmlns:p1510="http://schemas.microsoft.com/office/powerpoint/2015/10/main" xmlns:psez="http://schemas.microsoft.com/office/powerpoint/2016/sectionzoom" xmlns:pslz="http://schemas.microsoft.com/office/powerpoint/2016/slidezoom" xmlns:psuz="http://schemas.microsoft.com/office/powerpoint/2016/summaryzoom" xmlns:p173="http://schemas.microsoft.com/office/powerpoint/2017/3/main" xmlns:b="http://schemas.openxmlformats.org/officeDocument/2006/bibliography" xmlns:msink="http://schemas.microsoft.com/ink/2010/main" xmlns:cdr14="http://schemas.microsoft.com/office/drawing/2010/chartDrawing" xmlns:c15="http://schemas.microsoft.com/office/drawing/2012/chart" xmlns:cs="http://schemas.microsoft.com/office/drawing/2012/chartStyle" xmlns:ns30="http://www.w3.org/1998/Math/MathML" xmlns:ns31="http://www.w3.org/2003/InkML" xmlns:cx="http://schemas.microsoft.com/office/drawing/2014/chartex" xmlns:c16="http://schemas.microsoft.com/office/drawing/2014/chart" xmlns:dgm1611="http://schemas.microsoft.com/office/drawing/2016/11/diagram" xmlns:c173="http://schemas.microsoft.com/office/drawing/2017/03/chart" xmlns:am3d="http://schemas.microsoft.com/office/drawing/2017/model3d" xmlns:an18="http://schemas.microsoft.com/office/drawing/2018/animation" xmlns:anam3d="http://schemas.microsoft.com/office/drawing/2018/animation/model3d" xmlns:iact="http://schemas.microsoft.com/office/powerpoint/2014/inkAction" xmlns:thm15="http://schemas.microsoft.com/office/thememl/2012/main" xmlns:wetp="http://schemas.microsoft.com/office/webextensions/taskpanes/2010/11" xmlns:we="http://schemas.microsoft.com/office/webextensions/webextension/2010/11" xmlns:comp="http://schemas.openxmlformats.org/drawingml/2006/compatibility" xmlns:lc="http://schemas.openxmlformats.org/drawingml/2006/lockedCanvas" xmlns:p159="http://schemas.microsoft.com/office/powerpoint/2015/09/main" xmlns:p16="http://schemas.microsoft.com/office/powerpoint/2015/main" xmlns:p1710="http://schemas.microsoft.com/office/powerpoint/2017/10/main" xmlns:p184="http://schemas.microsoft.com/office/powerpoint/2018/4/main" xmlns:dgm14="http://schemas.microsoft.com/office/drawing/2010/diagram" xmlns:a15="http://schemas.microsoft.com/office/drawing/2012/main" xmlns:pic14="http://schemas.microsoft.com/office/drawing/2010/picture" xmlns:c16ac="http://schemas.microsoft.com/office/drawing/2014/chart/ac" xmlns:a16="http://schemas.microsoft.com/office/drawing/2014/main" xmlns:a1611="http://schemas.microsoft.com/office/drawing/2016/11/main" xmlns:dgm1612="http://schemas.microsoft.com/office/drawing/2016/12/diagram" xmlns:a16svg="http://schemas.microsoft.com/office/drawing/2016/SVG/main" xmlns:adec="http://schemas.microsoft.com/office/drawing/2017/decorative" xmlns:a18hc="http://schemas.microsoft.com/office/drawing/2018/hyperlinkcolor" showSpecialPlsOnTitleSld="false" saveSubsetFonts="true" autoCompressPictures="false">
   <p:sldMasterIdLst>
     <p:sldMasterId id="2147483671" r:id="rId4"/>
   </p:sldMasterIdLst>
@@ -11,19 +11,19 @@
     <p:handoutMasterId r:id="rId19"/>
   </p:handoutMasterIdLst>
   <p:sldIdLst>
-    <p:sldId id="1428113546" r:id="rId25"/>
-    <p:sldId id="585097523" r:id="rId26"/>
-    <p:sldId id="1825611477" r:id="rId27"/>
-    <p:sldId id="1845708534" r:id="rId28"/>
-    <p:sldId id="1554440163" r:id="rId29"/>
-    <p:sldId id="1771905127" r:id="rId30"/>
-    <p:sldId id="1649495682" r:id="rId31"/>
-    <p:sldId id="144727174" r:id="rId32"/>
-    <p:sldId id="1800685084" r:id="rId33"/>
-    <p:sldId id="358717080" r:id="rId34"/>
-    <p:sldId id="1420699057" r:id="rId35"/>
-    <p:sldId id="146638475" r:id="rId36"/>
-    <p:sldId id="1373068699" r:id="rId37"/>
+    <p:sldId id="621631229" r:id="rId25"/>
+    <p:sldId id="1486394313" r:id="rId26"/>
+    <p:sldId id="2018886973" r:id="rId27"/>
+    <p:sldId id="126258396" r:id="rId28"/>
+    <p:sldId id="1483529483" r:id="rId29"/>
+    <p:sldId id="101465862" r:id="rId30"/>
+    <p:sldId id="1634043779" r:id="rId31"/>
+    <p:sldId id="73670988" r:id="rId32"/>
+    <p:sldId id="541877913" r:id="rId33"/>
+    <p:sldId id="1013699113" r:id="rId34"/>
+    <p:sldId id="218120213" r:id="rId35"/>
+    <p:sldId id="1510239803" r:id="rId36"/>
+    <p:sldId id="30499243" r:id="rId37"/>
   </p:sldIdLst>
   <p:sldSz cx="12192000" cy="6858000"/>
   <p:notesSz cx="6858000" cy="9144000"/>
@@ -6154,7 +6154,7 @@
 </file>
 
 <file path=ppt/slides/slide1.xml><?xml version="1.0" encoding="utf-8"?>
-<p:sld xmlns:a="http://schemas.openxmlformats.org/drawingml/2006/main" xmlns:r="http://schemas.openxmlformats.org/officeDocument/2006/relationships" xmlns:p="http://schemas.openxmlformats.org/presentationml/2006/main" xmlns:mc="http://schemas.openxmlformats.org/markup-compatibility/2006" xmlns:c="http://schemas.openxmlformats.org/drawingml/2006/chart" xmlns:cdr="http://schemas.openxmlformats.org/drawingml/2006/chartDrawing" xmlns:c14="http://schemas.microsoft.com/office/drawing/2007/8/2/chart" xmlns:dgm="http://schemas.openxmlformats.org/drawingml/2006/diagram" xmlns:pic="http://schemas.openxmlformats.org/drawingml/2006/picture" xmlns:wp="http://schemas.openxmlformats.org/drawingml/2006/wordprocessingDrawing" xmlns:wp14="http://schemas.microsoft.com/office/word/2010/wordprocessingDrawing" xmlns:xdr="http://schemas.openxmlformats.org/drawingml/2006/spreadsheetDrawing" xmlns:dsp="http://schemas.microsoft.com/office/drawing/2008/diagram" xmlns:p14="http://schemas.microsoft.com/office/powerpoint/2010/main" xmlns:a14="http://schemas.microsoft.com/office/drawing/2010/main" xmlns:p15="http://schemas.microsoft.com/office/powerpoint/2012/main" xmlns:p166="http://schemas.microsoft.com/office/powerpoint/2016/6/main" xmlns:a13cmd="http://schemas.microsoft.com/office/drawing/2013/main/command" xmlns:p13cmd="http://schemas.microsoft.com/office/powerpoint/2013/main/command" xmlns:p1510="http://schemas.microsoft.com/office/powerpoint/2015/10/main" xmlns:psez="http://schemas.microsoft.com/office/powerpoint/2016/sectionzoom" xmlns:pslz="http://schemas.microsoft.com/office/powerpoint/2016/slidezoom" xmlns:psuz="http://schemas.microsoft.com/office/powerpoint/2016/summaryzoom" xmlns:p173="http://schemas.microsoft.com/office/powerpoint/2017/3/main" xmlns:b="http://schemas.openxmlformats.org/officeDocument/2006/bibliography" xmlns:msink="http://schemas.microsoft.com/ink/2010/main" xmlns:cdr14="http://schemas.microsoft.com/office/drawing/2010/chartDrawing" xmlns:c15="http://schemas.microsoft.com/office/drawing/2012/chart" xmlns:cs="http://schemas.microsoft.com/office/drawing/2012/chartStyle" xmlns:ns30="http://www.w3.org/1998/Math/MathML" xmlns:ns31="http://www.w3.org/2003/InkML" xmlns:cx="http://schemas.microsoft.com/office/drawing/2014/chartex" xmlns:c16="http://schemas.microsoft.com/office/drawing/2014/chart" xmlns:dgm1611="http://schemas.microsoft.com/office/drawing/2016/11/diagram" xmlns:c173="http://schemas.microsoft.com/office/drawing/2017/03/chart" xmlns:am3d="http://schemas.microsoft.com/office/drawing/2017/model3d" xmlns:an18="http://schemas.microsoft.com/office/drawing/2018/animation" xmlns:anam3d="http://schemas.microsoft.com/office/drawing/2018/animation/model3d" xmlns:iact="http://schemas.microsoft.com/office/powerpoint/2014/inkAction" xmlns:thm15="http://schemas.microsoft.com/office/thememl/2012/main" xmlns:wetp="http://schemas.microsoft.com/office/webextensions/taskpanes/2010/11" xmlns:we="http://schemas.microsoft.com/office/webextensions/webextension/2010/11" xmlns:comp="http://schemas.openxmlformats.org/drawingml/2006/compatibility" xmlns:lc="http://schemas.openxmlformats.org/drawingml/2006/lockedCanvas" xmlns:p159="http://schemas.microsoft.com/office/powerpoint/2015/09/main" xmlns:p16="http://schemas.microsoft.com/office/powerpoint/2015/main" xmlns:p1710="http://schemas.microsoft.com/office/powerpoint/2017/10/main" xmlns:p184="http://schemas.microsoft.com/office/powerpoint/2018/4/main" xmlns:dgm14="http://schemas.microsoft.com/office/drawing/2010/diagram" xmlns:a15="http://schemas.microsoft.com/office/drawing/2012/main" xmlns:pic14="http://schemas.microsoft.com/office/drawing/2010/picture" xmlns:c16ac="http://schemas.microsoft.com/office/drawing/2014/chart/ac" xmlns:a16="http://schemas.microsoft.com/office/drawing/2014/main" xmlns:a1611="http://schemas.microsoft.com/office/drawing/2016/11/main" xmlns:dgm1612="http://schemas.microsoft.com/office/drawing/2016/12/diagram" xmlns:a16svg="http://schemas.microsoft.com/office/drawing/2016/SVG/main" xmlns:adec="http://schemas.microsoft.com/office/drawing/2017/decorative" xmlns:a18hc="http://schemas.microsoft.com/office/drawing/2018/hyperlinkcolor" xmlns:v="urn:schemas-microsoft-com:vml">
+<p:sld xmlns:r="http://schemas.openxmlformats.org/officeDocument/2006/relationships" xmlns:a="http://schemas.openxmlformats.org/drawingml/2006/main" xmlns:p="http://schemas.openxmlformats.org/presentationml/2006/main" xmlns:mc="http://schemas.openxmlformats.org/markup-compatibility/2006" xmlns:c="http://schemas.openxmlformats.org/drawingml/2006/chart" xmlns:cdr="http://schemas.openxmlformats.org/drawingml/2006/chartDrawing" xmlns:c14="http://schemas.microsoft.com/office/drawing/2007/8/2/chart" xmlns:dgm="http://schemas.openxmlformats.org/drawingml/2006/diagram" xmlns:pic="http://schemas.openxmlformats.org/drawingml/2006/picture" xmlns:wp="http://schemas.openxmlformats.org/drawingml/2006/wordprocessingDrawing" xmlns:wp14="http://schemas.microsoft.com/office/word/2010/wordprocessingDrawing" xmlns:xdr="http://schemas.openxmlformats.org/drawingml/2006/spreadsheetDrawing" xmlns:dsp="http://schemas.microsoft.com/office/drawing/2008/diagram" xmlns:p14="http://schemas.microsoft.com/office/powerpoint/2010/main" xmlns:a14="http://schemas.microsoft.com/office/drawing/2010/main" xmlns:p15="http://schemas.microsoft.com/office/powerpoint/2012/main" xmlns:p166="http://schemas.microsoft.com/office/powerpoint/2016/6/main" xmlns:a13cmd="http://schemas.microsoft.com/office/drawing/2013/main/command" xmlns:p13cmd="http://schemas.microsoft.com/office/powerpoint/2013/main/command" xmlns:p1510="http://schemas.microsoft.com/office/powerpoint/2015/10/main" xmlns:psez="http://schemas.microsoft.com/office/powerpoint/2016/sectionzoom" xmlns:pslz="http://schemas.microsoft.com/office/powerpoint/2016/slidezoom" xmlns:psuz="http://schemas.microsoft.com/office/powerpoint/2016/summaryzoom" xmlns:p173="http://schemas.microsoft.com/office/powerpoint/2017/3/main" xmlns:b="http://schemas.openxmlformats.org/officeDocument/2006/bibliography" xmlns:msink="http://schemas.microsoft.com/ink/2010/main" xmlns:cdr14="http://schemas.microsoft.com/office/drawing/2010/chartDrawing" xmlns:c15="http://schemas.microsoft.com/office/drawing/2012/chart" xmlns:cs="http://schemas.microsoft.com/office/drawing/2012/chartStyle" xmlns:ns30="http://www.w3.org/1998/Math/MathML" xmlns:ns31="http://www.w3.org/2003/InkML" xmlns:cx="http://schemas.microsoft.com/office/drawing/2014/chartex" xmlns:c16="http://schemas.microsoft.com/office/drawing/2014/chart" xmlns:dgm1611="http://schemas.microsoft.com/office/drawing/2016/11/diagram" xmlns:c173="http://schemas.microsoft.com/office/drawing/2017/03/chart" xmlns:am3d="http://schemas.microsoft.com/office/drawing/2017/model3d" xmlns:an18="http://schemas.microsoft.com/office/drawing/2018/animation" xmlns:anam3d="http://schemas.microsoft.com/office/drawing/2018/animation/model3d" xmlns:iact="http://schemas.microsoft.com/office/powerpoint/2014/inkAction" xmlns:thm15="http://schemas.microsoft.com/office/thememl/2012/main" xmlns:wetp="http://schemas.microsoft.com/office/webextensions/taskpanes/2010/11" xmlns:we="http://schemas.microsoft.com/office/webextensions/webextension/2010/11" xmlns:comp="http://schemas.openxmlformats.org/drawingml/2006/compatibility" xmlns:lc="http://schemas.openxmlformats.org/drawingml/2006/lockedCanvas" xmlns:p159="http://schemas.microsoft.com/office/powerpoint/2015/09/main" xmlns:p16="http://schemas.microsoft.com/office/powerpoint/2015/main" xmlns:p1710="http://schemas.microsoft.com/office/powerpoint/2017/10/main" xmlns:p184="http://schemas.microsoft.com/office/powerpoint/2018/4/main" xmlns:dgm14="http://schemas.microsoft.com/office/drawing/2010/diagram" xmlns:a15="http://schemas.microsoft.com/office/drawing/2012/main" xmlns:pic14="http://schemas.microsoft.com/office/drawing/2010/picture" xmlns:c16ac="http://schemas.microsoft.com/office/drawing/2014/chart/ac" xmlns:a16="http://schemas.microsoft.com/office/drawing/2014/main" xmlns:a1611="http://schemas.microsoft.com/office/drawing/2016/11/main" xmlns:dgm1612="http://schemas.microsoft.com/office/drawing/2016/12/diagram" xmlns:a16svg="http://schemas.microsoft.com/office/drawing/2016/SVG/main" xmlns:adec="http://schemas.microsoft.com/office/drawing/2017/decorative" xmlns:a18hc="http://schemas.microsoft.com/office/drawing/2018/hyperlinkcolor" xmlns:v="urn:schemas-microsoft-com:vml">
   <p:cSld>
     <p:spTree>
       <p:nvGrpSpPr>
@@ -6210,7 +6210,43 @@
       </p:sp>
       <p:sp>
         <p:nvSpPr>
-          <p:cNvPr id="1001" name="Clone_obj_1001">
+          <p:cNvPr id="1001" name="Clone_pic_1001">
+            <a:extLst>
+              <a:ext uri="{FF2B5EF4-FFF2-40B4-BE49-F238E27FC236}">
+                <a16:creationId id="{5229EB0D-B986-4E26-BDF3-305AE3233EB7}"/>
+              </a:ext>
+            </a:extLst>
+          </p:cNvPr>
+          <p:cNvSpPr>
+            <a:spLocks noGrp="true"/>
+          </p:cNvSpPr>
+          <p:nvPr>
+            <p:ph type="pic" sz="quarter" idx="13"/>
+          </p:nvPr>
+        </p:nvSpPr>
+        <p:spPr>
+          <a:xfrm>
+            <a:off x="758952" y="883487"/>
+            <a:ext cx="4562856" cy="5148072"/>
+          </a:xfrm>
+          <a:solidFill>
+            <a:schemeClr val="accent6"/>
+          </a:solidFill>
+        </p:spPr>
+        <p:txBody>
+          <a:bodyPr rtlCol="false"/>
+          <a:lstStyle/>
+          <a:p>
+            <a:r>
+              <a:t>[Zone PIC]
+Cliquez pour insérer</a:t>
+            </a:r>
+          </a:p>
+        </p:txBody>
+      </p:sp>
+      <p:sp>
+        <p:nvSpPr>
+          <p:cNvPr id="1002" name="Clone_obj_1002">
             <a:extLst>
               <a:ext uri="{FF2B5EF4-FFF2-40B4-BE49-F238E27FC236}">
                 <a16:creationId id="{1B73FFA1-F0AE-DFF4-B013-E635479FD563}"/>
@@ -6271,13 +6307,87 @@
           </a:p>
         </p:txBody>
       </p:sp>
+      <p:sp>
+        <p:nvSpPr>
+          <p:cNvPr id="1003" name="Clone_ftr_1003">
+            <a:extLst>
+              <a:ext uri="{FF2B5EF4-FFF2-40B4-BE49-F238E27FC236}">
+                <a16:creationId id="{452CFE08-03FE-487B-8963-9FAD3049CFFA}"/>
+              </a:ext>
+            </a:extLst>
+          </p:cNvPr>
+          <p:cNvSpPr>
+            <a:spLocks noGrp="true"/>
+          </p:cNvSpPr>
+          <p:nvPr>
+            <p:ph type="ftr" sz="quarter" idx="11"/>
+          </p:nvPr>
+        </p:nvSpPr>
+        <p:spPr>
+          <a:xfrm>
+            <a:off x="758952" y="6400800"/>
+            <a:ext cx="6099048" cy="365125"/>
+          </a:xfrm>
+          <a:prstGeom prst="rect">
+            <a:avLst/>
+          </a:prstGeom>
+        </p:spPr>
+        <p:txBody>
+          <a:bodyPr rtlCol="false"/>
+          <a:lstStyle/>
+        </p:txBody>
+      </p:sp>
+      <p:sp>
+        <p:nvSpPr>
+          <p:cNvPr id="1004" name="Clone_dt_1004">
+            <a:extLst>
+              <a:ext uri="{FF2B5EF4-FFF2-40B4-BE49-F238E27FC236}">
+                <a16:creationId id="{B7862271-51F6-4122-9709-D279042F8846}"/>
+              </a:ext>
+            </a:extLst>
+          </p:cNvPr>
+          <p:cNvSpPr>
+            <a:spLocks noGrp="true"/>
+          </p:cNvSpPr>
+          <p:nvPr>
+            <p:ph type="dt" sz="half" idx="10"/>
+          </p:nvPr>
+        </p:nvSpPr>
+        <p:spPr/>
+        <p:txBody>
+          <a:bodyPr rtlCol="false"/>
+          <a:lstStyle/>
+        </p:txBody>
+      </p:sp>
+      <p:sp>
+        <p:nvSpPr>
+          <p:cNvPr id="1005" name="Clone_sldNum_1005">
+            <a:extLst>
+              <a:ext uri="{FF2B5EF4-FFF2-40B4-BE49-F238E27FC236}">
+                <a16:creationId id="{CA935A50-18AE-4CB1-BB10-1CBDD8A7C2C4}"/>
+              </a:ext>
+            </a:extLst>
+          </p:cNvPr>
+          <p:cNvSpPr>
+            <a:spLocks noGrp="true"/>
+          </p:cNvSpPr>
+          <p:nvPr>
+            <p:ph type="sldNum" sz="quarter" idx="12"/>
+          </p:nvPr>
+        </p:nvSpPr>
+        <p:spPr/>
+        <p:txBody>
+          <a:bodyPr rtlCol="false"/>
+          <a:lstStyle/>
+        </p:txBody>
+      </p:sp>
     </p:spTree>
   </p:cSld>
 </p:sld>
 </file>
 
 <file path=ppt/slides/slide10.xml><?xml version="1.0" encoding="utf-8"?>
-<p:sld xmlns:a="http://schemas.openxmlformats.org/drawingml/2006/main" xmlns:r="http://schemas.openxmlformats.org/officeDocument/2006/relationships" xmlns:p="http://schemas.openxmlformats.org/presentationml/2006/main" xmlns:mc="http://schemas.openxmlformats.org/markup-compatibility/2006" xmlns:c="http://schemas.openxmlformats.org/drawingml/2006/chart" xmlns:cdr="http://schemas.openxmlformats.org/drawingml/2006/chartDrawing" xmlns:c14="http://schemas.microsoft.com/office/drawing/2007/8/2/chart" xmlns:dgm="http://schemas.openxmlformats.org/drawingml/2006/diagram" xmlns:pic="http://schemas.openxmlformats.org/drawingml/2006/picture" xmlns:wp="http://schemas.openxmlformats.org/drawingml/2006/wordprocessingDrawing" xmlns:wp14="http://schemas.microsoft.com/office/word/2010/wordprocessingDrawing" xmlns:xdr="http://schemas.openxmlformats.org/drawingml/2006/spreadsheetDrawing" xmlns:dsp="http://schemas.microsoft.com/office/drawing/2008/diagram" xmlns:p14="http://schemas.microsoft.com/office/powerpoint/2010/main" xmlns:a14="http://schemas.microsoft.com/office/drawing/2010/main" xmlns:p15="http://schemas.microsoft.com/office/powerpoint/2012/main" xmlns:p166="http://schemas.microsoft.com/office/powerpoint/2016/6/main" xmlns:a13cmd="http://schemas.microsoft.com/office/drawing/2013/main/command" xmlns:p13cmd="http://schemas.microsoft.com/office/powerpoint/2013/main/command" xmlns:p1510="http://schemas.microsoft.com/office/powerpoint/2015/10/main" xmlns:psez="http://schemas.microsoft.com/office/powerpoint/2016/sectionzoom" xmlns:pslz="http://schemas.microsoft.com/office/powerpoint/2016/slidezoom" xmlns:psuz="http://schemas.microsoft.com/office/powerpoint/2016/summaryzoom" xmlns:p173="http://schemas.microsoft.com/office/powerpoint/2017/3/main" xmlns:b="http://schemas.openxmlformats.org/officeDocument/2006/bibliography" xmlns:msink="http://schemas.microsoft.com/ink/2010/main" xmlns:cdr14="http://schemas.microsoft.com/office/drawing/2010/chartDrawing" xmlns:c15="http://schemas.microsoft.com/office/drawing/2012/chart" xmlns:cs="http://schemas.microsoft.com/office/drawing/2012/chartStyle" xmlns:ns30="http://www.w3.org/1998/Math/MathML" xmlns:ns31="http://www.w3.org/2003/InkML" xmlns:cx="http://schemas.microsoft.com/office/drawing/2014/chartex" xmlns:c16="http://schemas.microsoft.com/office/drawing/2014/chart" xmlns:dgm1611="http://schemas.microsoft.com/office/drawing/2016/11/diagram" xmlns:c173="http://schemas.microsoft.com/office/drawing/2017/03/chart" xmlns:am3d="http://schemas.microsoft.com/office/drawing/2017/model3d" xmlns:an18="http://schemas.microsoft.com/office/drawing/2018/animation" xmlns:anam3d="http://schemas.microsoft.com/office/drawing/2018/animation/model3d" xmlns:iact="http://schemas.microsoft.com/office/powerpoint/2014/inkAction" xmlns:thm15="http://schemas.microsoft.com/office/thememl/2012/main" xmlns:wetp="http://schemas.microsoft.com/office/webextensions/taskpanes/2010/11" xmlns:we="http://schemas.microsoft.com/office/webextensions/webextension/2010/11" xmlns:comp="http://schemas.openxmlformats.org/drawingml/2006/compatibility" xmlns:lc="http://schemas.openxmlformats.org/drawingml/2006/lockedCanvas" xmlns:p159="http://schemas.microsoft.com/office/powerpoint/2015/09/main" xmlns:p16="http://schemas.microsoft.com/office/powerpoint/2015/main" xmlns:p1710="http://schemas.microsoft.com/office/powerpoint/2017/10/main" xmlns:p184="http://schemas.microsoft.com/office/powerpoint/2018/4/main" xmlns:dgm14="http://schemas.microsoft.com/office/drawing/2010/diagram" xmlns:a15="http://schemas.microsoft.com/office/drawing/2012/main" xmlns:pic14="http://schemas.microsoft.com/office/drawing/2010/picture" xmlns:c16ac="http://schemas.microsoft.com/office/drawing/2014/chart/ac" xmlns:a16="http://schemas.microsoft.com/office/drawing/2014/main" xmlns:a1611="http://schemas.microsoft.com/office/drawing/2016/11/main" xmlns:dgm1612="http://schemas.microsoft.com/office/drawing/2016/12/diagram" xmlns:a16svg="http://schemas.microsoft.com/office/drawing/2016/SVG/main" xmlns:adec="http://schemas.microsoft.com/office/drawing/2017/decorative" xmlns:a18hc="http://schemas.microsoft.com/office/drawing/2018/hyperlinkcolor" xmlns:v="urn:schemas-microsoft-com:vml">
+<p:sld xmlns:r="http://schemas.openxmlformats.org/officeDocument/2006/relationships" xmlns:a="http://schemas.openxmlformats.org/drawingml/2006/main" xmlns:p="http://schemas.openxmlformats.org/presentationml/2006/main" xmlns:mc="http://schemas.openxmlformats.org/markup-compatibility/2006" xmlns:c="http://schemas.openxmlformats.org/drawingml/2006/chart" xmlns:cdr="http://schemas.openxmlformats.org/drawingml/2006/chartDrawing" xmlns:c14="http://schemas.microsoft.com/office/drawing/2007/8/2/chart" xmlns:dgm="http://schemas.openxmlformats.org/drawingml/2006/diagram" xmlns:pic="http://schemas.openxmlformats.org/drawingml/2006/picture" xmlns:wp="http://schemas.openxmlformats.org/drawingml/2006/wordprocessingDrawing" xmlns:wp14="http://schemas.microsoft.com/office/word/2010/wordprocessingDrawing" xmlns:xdr="http://schemas.openxmlformats.org/drawingml/2006/spreadsheetDrawing" xmlns:dsp="http://schemas.microsoft.com/office/drawing/2008/diagram" xmlns:p14="http://schemas.microsoft.com/office/powerpoint/2010/main" xmlns:a14="http://schemas.microsoft.com/office/drawing/2010/main" xmlns:p15="http://schemas.microsoft.com/office/powerpoint/2012/main" xmlns:p166="http://schemas.microsoft.com/office/powerpoint/2016/6/main" xmlns:a13cmd="http://schemas.microsoft.com/office/drawing/2013/main/command" xmlns:p13cmd="http://schemas.microsoft.com/office/powerpoint/2013/main/command" xmlns:p1510="http://schemas.microsoft.com/office/powerpoint/2015/10/main" xmlns:psez="http://schemas.microsoft.com/office/powerpoint/2016/sectionzoom" xmlns:pslz="http://schemas.microsoft.com/office/powerpoint/2016/slidezoom" xmlns:psuz="http://schemas.microsoft.com/office/powerpoint/2016/summaryzoom" xmlns:p173="http://schemas.microsoft.com/office/powerpoint/2017/3/main" xmlns:b="http://schemas.openxmlformats.org/officeDocument/2006/bibliography" xmlns:msink="http://schemas.microsoft.com/ink/2010/main" xmlns:cdr14="http://schemas.microsoft.com/office/drawing/2010/chartDrawing" xmlns:c15="http://schemas.microsoft.com/office/drawing/2012/chart" xmlns:cs="http://schemas.microsoft.com/office/drawing/2012/chartStyle" xmlns:ns30="http://www.w3.org/1998/Math/MathML" xmlns:ns31="http://www.w3.org/2003/InkML" xmlns:cx="http://schemas.microsoft.com/office/drawing/2014/chartex" xmlns:c16="http://schemas.microsoft.com/office/drawing/2014/chart" xmlns:dgm1611="http://schemas.microsoft.com/office/drawing/2016/11/diagram" xmlns:c173="http://schemas.microsoft.com/office/drawing/2017/03/chart" xmlns:am3d="http://schemas.microsoft.com/office/drawing/2017/model3d" xmlns:an18="http://schemas.microsoft.com/office/drawing/2018/animation" xmlns:anam3d="http://schemas.microsoft.com/office/drawing/2018/animation/model3d" xmlns:iact="http://schemas.microsoft.com/office/powerpoint/2014/inkAction" xmlns:thm15="http://schemas.microsoft.com/office/thememl/2012/main" xmlns:wetp="http://schemas.microsoft.com/office/webextensions/taskpanes/2010/11" xmlns:we="http://schemas.microsoft.com/office/webextensions/webextension/2010/11" xmlns:comp="http://schemas.openxmlformats.org/drawingml/2006/compatibility" xmlns:lc="http://schemas.openxmlformats.org/drawingml/2006/lockedCanvas" xmlns:p159="http://schemas.microsoft.com/office/powerpoint/2015/09/main" xmlns:p16="http://schemas.microsoft.com/office/powerpoint/2015/main" xmlns:p1710="http://schemas.microsoft.com/office/powerpoint/2017/10/main" xmlns:p184="http://schemas.microsoft.com/office/powerpoint/2018/4/main" xmlns:dgm14="http://schemas.microsoft.com/office/drawing/2010/diagram" xmlns:a15="http://schemas.microsoft.com/office/drawing/2012/main" xmlns:pic14="http://schemas.microsoft.com/office/drawing/2010/picture" xmlns:c16ac="http://schemas.microsoft.com/office/drawing/2014/chart/ac" xmlns:a16="http://schemas.microsoft.com/office/drawing/2014/main" xmlns:a1611="http://schemas.microsoft.com/office/drawing/2016/11/main" xmlns:dgm1612="http://schemas.microsoft.com/office/drawing/2016/12/diagram" xmlns:a16svg="http://schemas.microsoft.com/office/drawing/2016/SVG/main" xmlns:adec="http://schemas.microsoft.com/office/drawing/2017/decorative" xmlns:a18hc="http://schemas.microsoft.com/office/drawing/2018/hyperlinkcolor" xmlns:v="urn:schemas-microsoft-com:vml">
   <p:cSld>
     <p:spTree>
       <p:nvGrpSpPr>
@@ -6295,7 +6405,7 @@
       </p:grpSpPr>
       <p:sp>
         <p:nvSpPr>
-          <p:cNvPr id="1019" name="Clone_title_1019">
+          <p:cNvPr id="1039" name="Clone_title_1039">
             <a:extLst>
               <a:ext uri="{FF2B5EF4-FFF2-40B4-BE49-F238E27FC236}">
                 <a16:creationId id="{470AF812-9F51-0D2C-2EA5-A8D6DA66275F}"/>
@@ -6333,7 +6443,7 @@
       </p:sp>
       <p:sp>
         <p:nvSpPr>
-          <p:cNvPr id="1020" name="Clone_subTitle_1020">
+          <p:cNvPr id="1040" name="Clone_subTitle_1040">
             <a:extLst>
               <a:ext uri="{FF2B5EF4-FFF2-40B4-BE49-F238E27FC236}">
                 <a16:creationId id="{E8F46CAD-D4FF-4BBC-937E-CBBD034A180B}"/>
@@ -6370,13 +6480,49 @@
           </a:p>
         </p:txBody>
       </p:sp>
+      <p:sp>
+        <p:nvSpPr>
+          <p:cNvPr id="1041" name="Clone_pic_1041">
+            <a:extLst>
+              <a:ext uri="{FF2B5EF4-FFF2-40B4-BE49-F238E27FC236}">
+                <a16:creationId id="{A2750E7C-D01B-4533-A0B8-2E7EF2B168DC}"/>
+              </a:ext>
+            </a:extLst>
+          </p:cNvPr>
+          <p:cNvSpPr>
+            <a:spLocks noGrp="true"/>
+          </p:cNvSpPr>
+          <p:nvPr>
+            <p:ph type="pic" sz="quarter" idx="13"/>
+          </p:nvPr>
+        </p:nvSpPr>
+        <p:spPr>
+          <a:xfrm>
+            <a:off x="5330952" y="754711"/>
+            <a:ext cx="6099048" cy="5340096"/>
+          </a:xfrm>
+          <a:solidFill>
+            <a:schemeClr val="accent6"/>
+          </a:solidFill>
+        </p:spPr>
+        <p:txBody>
+          <a:bodyPr rtlCol="false"/>
+          <a:lstStyle/>
+          <a:p>
+            <a:r>
+              <a:t>[Zone PIC]
+Cliquez pour insérer</a:t>
+            </a:r>
+          </a:p>
+        </p:txBody>
+      </p:sp>
     </p:spTree>
   </p:cSld>
 </p:sld>
 </file>
 
 <file path=ppt/slides/slide11.xml><?xml version="1.0" encoding="utf-8"?>
-<p:sld xmlns:a="http://schemas.openxmlformats.org/drawingml/2006/main" xmlns:r="http://schemas.openxmlformats.org/officeDocument/2006/relationships" xmlns:p="http://schemas.openxmlformats.org/presentationml/2006/main" xmlns:mc="http://schemas.openxmlformats.org/markup-compatibility/2006" xmlns:c="http://schemas.openxmlformats.org/drawingml/2006/chart" xmlns:cdr="http://schemas.openxmlformats.org/drawingml/2006/chartDrawing" xmlns:c14="http://schemas.microsoft.com/office/drawing/2007/8/2/chart" xmlns:dgm="http://schemas.openxmlformats.org/drawingml/2006/diagram" xmlns:pic="http://schemas.openxmlformats.org/drawingml/2006/picture" xmlns:wp="http://schemas.openxmlformats.org/drawingml/2006/wordprocessingDrawing" xmlns:wp14="http://schemas.microsoft.com/office/word/2010/wordprocessingDrawing" xmlns:xdr="http://schemas.openxmlformats.org/drawingml/2006/spreadsheetDrawing" xmlns:dsp="http://schemas.microsoft.com/office/drawing/2008/diagram" xmlns:p14="http://schemas.microsoft.com/office/powerpoint/2010/main" xmlns:a14="http://schemas.microsoft.com/office/drawing/2010/main" xmlns:p15="http://schemas.microsoft.com/office/powerpoint/2012/main" xmlns:p166="http://schemas.microsoft.com/office/powerpoint/2016/6/main" xmlns:a13cmd="http://schemas.microsoft.com/office/drawing/2013/main/command" xmlns:p13cmd="http://schemas.microsoft.com/office/powerpoint/2013/main/command" xmlns:p1510="http://schemas.microsoft.com/office/powerpoint/2015/10/main" xmlns:psez="http://schemas.microsoft.com/office/powerpoint/2016/sectionzoom" xmlns:pslz="http://schemas.microsoft.com/office/powerpoint/2016/slidezoom" xmlns:psuz="http://schemas.microsoft.com/office/powerpoint/2016/summaryzoom" xmlns:p173="http://schemas.microsoft.com/office/powerpoint/2017/3/main" xmlns:b="http://schemas.openxmlformats.org/officeDocument/2006/bibliography" xmlns:msink="http://schemas.microsoft.com/ink/2010/main" xmlns:cdr14="http://schemas.microsoft.com/office/drawing/2010/chartDrawing" xmlns:c15="http://schemas.microsoft.com/office/drawing/2012/chart" xmlns:cs="http://schemas.microsoft.com/office/drawing/2012/chartStyle" xmlns:ns30="http://www.w3.org/1998/Math/MathML" xmlns:ns31="http://www.w3.org/2003/InkML" xmlns:cx="http://schemas.microsoft.com/office/drawing/2014/chartex" xmlns:c16="http://schemas.microsoft.com/office/drawing/2014/chart" xmlns:dgm1611="http://schemas.microsoft.com/office/drawing/2016/11/diagram" xmlns:c173="http://schemas.microsoft.com/office/drawing/2017/03/chart" xmlns:am3d="http://schemas.microsoft.com/office/drawing/2017/model3d" xmlns:an18="http://schemas.microsoft.com/office/drawing/2018/animation" xmlns:anam3d="http://schemas.microsoft.com/office/drawing/2018/animation/model3d" xmlns:iact="http://schemas.microsoft.com/office/powerpoint/2014/inkAction" xmlns:thm15="http://schemas.microsoft.com/office/thememl/2012/main" xmlns:wetp="http://schemas.microsoft.com/office/webextensions/taskpanes/2010/11" xmlns:we="http://schemas.microsoft.com/office/webextensions/webextension/2010/11" xmlns:comp="http://schemas.openxmlformats.org/drawingml/2006/compatibility" xmlns:lc="http://schemas.openxmlformats.org/drawingml/2006/lockedCanvas" xmlns:p159="http://schemas.microsoft.com/office/powerpoint/2015/09/main" xmlns:p16="http://schemas.microsoft.com/office/powerpoint/2015/main" xmlns:p1710="http://schemas.microsoft.com/office/powerpoint/2017/10/main" xmlns:p184="http://schemas.microsoft.com/office/powerpoint/2018/4/main" xmlns:dgm14="http://schemas.microsoft.com/office/drawing/2010/diagram" xmlns:a15="http://schemas.microsoft.com/office/drawing/2012/main" xmlns:pic14="http://schemas.microsoft.com/office/drawing/2010/picture" xmlns:c16ac="http://schemas.microsoft.com/office/drawing/2014/chart/ac" xmlns:a16="http://schemas.microsoft.com/office/drawing/2014/main" xmlns:a1611="http://schemas.microsoft.com/office/drawing/2016/11/main" xmlns:dgm1612="http://schemas.microsoft.com/office/drawing/2016/12/diagram" xmlns:a16svg="http://schemas.microsoft.com/office/drawing/2016/SVG/main" xmlns:adec="http://schemas.microsoft.com/office/drawing/2017/decorative" xmlns:a18hc="http://schemas.microsoft.com/office/drawing/2018/hyperlinkcolor" xmlns:v="urn:schemas-microsoft-com:vml">
+<p:sld xmlns:r="http://schemas.openxmlformats.org/officeDocument/2006/relationships" xmlns:a="http://schemas.openxmlformats.org/drawingml/2006/main" xmlns:p="http://schemas.openxmlformats.org/presentationml/2006/main" xmlns:mc="http://schemas.openxmlformats.org/markup-compatibility/2006" xmlns:c="http://schemas.openxmlformats.org/drawingml/2006/chart" xmlns:cdr="http://schemas.openxmlformats.org/drawingml/2006/chartDrawing" xmlns:c14="http://schemas.microsoft.com/office/drawing/2007/8/2/chart" xmlns:dgm="http://schemas.openxmlformats.org/drawingml/2006/diagram" xmlns:pic="http://schemas.openxmlformats.org/drawingml/2006/picture" xmlns:wp="http://schemas.openxmlformats.org/drawingml/2006/wordprocessingDrawing" xmlns:wp14="http://schemas.microsoft.com/office/word/2010/wordprocessingDrawing" xmlns:xdr="http://schemas.openxmlformats.org/drawingml/2006/spreadsheetDrawing" xmlns:dsp="http://schemas.microsoft.com/office/drawing/2008/diagram" xmlns:p14="http://schemas.microsoft.com/office/powerpoint/2010/main" xmlns:a14="http://schemas.microsoft.com/office/drawing/2010/main" xmlns:p15="http://schemas.microsoft.com/office/powerpoint/2012/main" xmlns:p166="http://schemas.microsoft.com/office/powerpoint/2016/6/main" xmlns:a13cmd="http://schemas.microsoft.com/office/drawing/2013/main/command" xmlns:p13cmd="http://schemas.microsoft.com/office/powerpoint/2013/main/command" xmlns:p1510="http://schemas.microsoft.com/office/powerpoint/2015/10/main" xmlns:psez="http://schemas.microsoft.com/office/powerpoint/2016/sectionzoom" xmlns:pslz="http://schemas.microsoft.com/office/powerpoint/2016/slidezoom" xmlns:psuz="http://schemas.microsoft.com/office/powerpoint/2016/summaryzoom" xmlns:p173="http://schemas.microsoft.com/office/powerpoint/2017/3/main" xmlns:b="http://schemas.openxmlformats.org/officeDocument/2006/bibliography" xmlns:msink="http://schemas.microsoft.com/ink/2010/main" xmlns:cdr14="http://schemas.microsoft.com/office/drawing/2010/chartDrawing" xmlns:c15="http://schemas.microsoft.com/office/drawing/2012/chart" xmlns:cs="http://schemas.microsoft.com/office/drawing/2012/chartStyle" xmlns:ns30="http://www.w3.org/1998/Math/MathML" xmlns:ns31="http://www.w3.org/2003/InkML" xmlns:cx="http://schemas.microsoft.com/office/drawing/2014/chartex" xmlns:c16="http://schemas.microsoft.com/office/drawing/2014/chart" xmlns:dgm1611="http://schemas.microsoft.com/office/drawing/2016/11/diagram" xmlns:c173="http://schemas.microsoft.com/office/drawing/2017/03/chart" xmlns:am3d="http://schemas.microsoft.com/office/drawing/2017/model3d" xmlns:an18="http://schemas.microsoft.com/office/drawing/2018/animation" xmlns:anam3d="http://schemas.microsoft.com/office/drawing/2018/animation/model3d" xmlns:iact="http://schemas.microsoft.com/office/powerpoint/2014/inkAction" xmlns:thm15="http://schemas.microsoft.com/office/thememl/2012/main" xmlns:wetp="http://schemas.microsoft.com/office/webextensions/taskpanes/2010/11" xmlns:we="http://schemas.microsoft.com/office/webextensions/webextension/2010/11" xmlns:comp="http://schemas.openxmlformats.org/drawingml/2006/compatibility" xmlns:lc="http://schemas.openxmlformats.org/drawingml/2006/lockedCanvas" xmlns:p159="http://schemas.microsoft.com/office/powerpoint/2015/09/main" xmlns:p16="http://schemas.microsoft.com/office/powerpoint/2015/main" xmlns:p1710="http://schemas.microsoft.com/office/powerpoint/2017/10/main" xmlns:p184="http://schemas.microsoft.com/office/powerpoint/2018/4/main" xmlns:dgm14="http://schemas.microsoft.com/office/drawing/2010/diagram" xmlns:a15="http://schemas.microsoft.com/office/drawing/2012/main" xmlns:pic14="http://schemas.microsoft.com/office/drawing/2010/picture" xmlns:c16ac="http://schemas.microsoft.com/office/drawing/2014/chart/ac" xmlns:a16="http://schemas.microsoft.com/office/drawing/2014/main" xmlns:a1611="http://schemas.microsoft.com/office/drawing/2016/11/main" xmlns:dgm1612="http://schemas.microsoft.com/office/drawing/2016/12/diagram" xmlns:a16svg="http://schemas.microsoft.com/office/drawing/2016/SVG/main" xmlns:adec="http://schemas.microsoft.com/office/drawing/2017/decorative" xmlns:a18hc="http://schemas.microsoft.com/office/drawing/2018/hyperlinkcolor" xmlns:v="urn:schemas-microsoft-com:vml">
   <p:cSld>
     <p:spTree>
       <p:nvGrpSpPr>
@@ -6394,7 +6540,7 @@
       </p:grpSpPr>
       <p:sp>
         <p:nvSpPr>
-          <p:cNvPr id="1021" name="Clone_title_1021">
+          <p:cNvPr id="1042" name="Clone_title_1042">
             <a:extLst>
               <a:ext uri="{FF2B5EF4-FFF2-40B4-BE49-F238E27FC236}">
                 <a16:creationId id="{D9D22302-83E3-4E22-93DF-1E5D463B64C3}"/>
@@ -6432,7 +6578,7 @@
       </p:sp>
       <p:sp>
         <p:nvSpPr>
-          <p:cNvPr id="1022" name="Clone_obj_1022">
+          <p:cNvPr id="1043" name="Clone_obj_1043">
             <a:extLst>
               <a:ext uri="{FF2B5EF4-FFF2-40B4-BE49-F238E27FC236}">
                 <a16:creationId id="{56DDD407-AEC1-3D37-ADE9-45D0416B2084}"/>
@@ -6495,7 +6641,7 @@
       </p:sp>
       <p:sp>
         <p:nvSpPr>
-          <p:cNvPr id="1023" name="Clone_obj_1023">
+          <p:cNvPr id="1044" name="Clone_obj_1044">
             <a:extLst>
               <a:ext uri="{FF2B5EF4-FFF2-40B4-BE49-F238E27FC236}">
                 <a16:creationId id="{6200E1C4-7A2D-07AE-8DB0-52CEF088A187}"/>
@@ -6556,13 +6702,87 @@
           </a:p>
         </p:txBody>
       </p:sp>
+      <p:sp>
+        <p:nvSpPr>
+          <p:cNvPr id="1045" name="Clone_ftr_1045">
+            <a:extLst>
+              <a:ext uri="{FF2B5EF4-FFF2-40B4-BE49-F238E27FC236}">
+                <a16:creationId id="{576AF721-83FE-4B57-B910-C395D23FDE31}"/>
+              </a:ext>
+            </a:extLst>
+          </p:cNvPr>
+          <p:cNvSpPr>
+            <a:spLocks noGrp="true"/>
+          </p:cNvSpPr>
+          <p:nvPr>
+            <p:ph type="ftr" sz="quarter" idx="11"/>
+          </p:nvPr>
+        </p:nvSpPr>
+        <p:spPr>
+          <a:xfrm>
+            <a:off x="758952" y="6400800"/>
+            <a:ext cx="6099048" cy="365125"/>
+          </a:xfrm>
+          <a:prstGeom prst="rect">
+            <a:avLst/>
+          </a:prstGeom>
+        </p:spPr>
+        <p:txBody>
+          <a:bodyPr rtlCol="false"/>
+          <a:lstStyle/>
+        </p:txBody>
+      </p:sp>
+      <p:sp>
+        <p:nvSpPr>
+          <p:cNvPr id="1046" name="Clone_dt_1046">
+            <a:extLst>
+              <a:ext uri="{FF2B5EF4-FFF2-40B4-BE49-F238E27FC236}">
+                <a16:creationId id="{7F3A70F0-5AFA-4C5A-812B-220C6A38DB6B}"/>
+              </a:ext>
+            </a:extLst>
+          </p:cNvPr>
+          <p:cNvSpPr>
+            <a:spLocks noGrp="true"/>
+          </p:cNvSpPr>
+          <p:nvPr>
+            <p:ph type="dt" sz="half" idx="10"/>
+          </p:nvPr>
+        </p:nvSpPr>
+        <p:spPr/>
+        <p:txBody>
+          <a:bodyPr rtlCol="false"/>
+          <a:lstStyle/>
+        </p:txBody>
+      </p:sp>
+      <p:sp>
+        <p:nvSpPr>
+          <p:cNvPr id="1047" name="Clone_sldNum_1047">
+            <a:extLst>
+              <a:ext uri="{FF2B5EF4-FFF2-40B4-BE49-F238E27FC236}">
+                <a16:creationId id="{556A5893-52F1-44A1-AE8E-CF094DB41CFA}"/>
+              </a:ext>
+            </a:extLst>
+          </p:cNvPr>
+          <p:cNvSpPr>
+            <a:spLocks noGrp="true"/>
+          </p:cNvSpPr>
+          <p:nvPr>
+            <p:ph type="sldNum" sz="quarter" idx="12"/>
+          </p:nvPr>
+        </p:nvSpPr>
+        <p:spPr/>
+        <p:txBody>
+          <a:bodyPr rtlCol="false"/>
+          <a:lstStyle/>
+        </p:txBody>
+      </p:sp>
     </p:spTree>
   </p:cSld>
 </p:sld>
 </file>
 
 <file path=ppt/slides/slide12.xml><?xml version="1.0" encoding="utf-8"?>
-<p:sld xmlns:a="http://schemas.openxmlformats.org/drawingml/2006/main" xmlns:r="http://schemas.openxmlformats.org/officeDocument/2006/relationships" xmlns:p="http://schemas.openxmlformats.org/presentationml/2006/main" xmlns:mc="http://schemas.openxmlformats.org/markup-compatibility/2006" xmlns:c="http://schemas.openxmlformats.org/drawingml/2006/chart" xmlns:cdr="http://schemas.openxmlformats.org/drawingml/2006/chartDrawing" xmlns:c14="http://schemas.microsoft.com/office/drawing/2007/8/2/chart" xmlns:dgm="http://schemas.openxmlformats.org/drawingml/2006/diagram" xmlns:pic="http://schemas.openxmlformats.org/drawingml/2006/picture" xmlns:wp="http://schemas.openxmlformats.org/drawingml/2006/wordprocessingDrawing" xmlns:wp14="http://schemas.microsoft.com/office/word/2010/wordprocessingDrawing" xmlns:xdr="http://schemas.openxmlformats.org/drawingml/2006/spreadsheetDrawing" xmlns:dsp="http://schemas.microsoft.com/office/drawing/2008/diagram" xmlns:p14="http://schemas.microsoft.com/office/powerpoint/2010/main" xmlns:a14="http://schemas.microsoft.com/office/drawing/2010/main" xmlns:p15="http://schemas.microsoft.com/office/powerpoint/2012/main" xmlns:p166="http://schemas.microsoft.com/office/powerpoint/2016/6/main" xmlns:a13cmd="http://schemas.microsoft.com/office/drawing/2013/main/command" xmlns:p13cmd="http://schemas.microsoft.com/office/powerpoint/2013/main/command" xmlns:p1510="http://schemas.microsoft.com/office/powerpoint/2015/10/main" xmlns:psez="http://schemas.microsoft.com/office/powerpoint/2016/sectionzoom" xmlns:pslz="http://schemas.microsoft.com/office/powerpoint/2016/slidezoom" xmlns:psuz="http://schemas.microsoft.com/office/powerpoint/2016/summaryzoom" xmlns:p173="http://schemas.microsoft.com/office/powerpoint/2017/3/main" xmlns:b="http://schemas.openxmlformats.org/officeDocument/2006/bibliography" xmlns:msink="http://schemas.microsoft.com/ink/2010/main" xmlns:cdr14="http://schemas.microsoft.com/office/drawing/2010/chartDrawing" xmlns:c15="http://schemas.microsoft.com/office/drawing/2012/chart" xmlns:cs="http://schemas.microsoft.com/office/drawing/2012/chartStyle" xmlns:ns30="http://www.w3.org/1998/Math/MathML" xmlns:ns31="http://www.w3.org/2003/InkML" xmlns:cx="http://schemas.microsoft.com/office/drawing/2014/chartex" xmlns:c16="http://schemas.microsoft.com/office/drawing/2014/chart" xmlns:dgm1611="http://schemas.microsoft.com/office/drawing/2016/11/diagram" xmlns:c173="http://schemas.microsoft.com/office/drawing/2017/03/chart" xmlns:am3d="http://schemas.microsoft.com/office/drawing/2017/model3d" xmlns:an18="http://schemas.microsoft.com/office/drawing/2018/animation" xmlns:anam3d="http://schemas.microsoft.com/office/drawing/2018/animation/model3d" xmlns:iact="http://schemas.microsoft.com/office/powerpoint/2014/inkAction" xmlns:thm15="http://schemas.microsoft.com/office/thememl/2012/main" xmlns:wetp="http://schemas.microsoft.com/office/webextensions/taskpanes/2010/11" xmlns:we="http://schemas.microsoft.com/office/webextensions/webextension/2010/11" xmlns:comp="http://schemas.openxmlformats.org/drawingml/2006/compatibility" xmlns:lc="http://schemas.openxmlformats.org/drawingml/2006/lockedCanvas" xmlns:p159="http://schemas.microsoft.com/office/powerpoint/2015/09/main" xmlns:p16="http://schemas.microsoft.com/office/powerpoint/2015/main" xmlns:p1710="http://schemas.microsoft.com/office/powerpoint/2017/10/main" xmlns:p184="http://schemas.microsoft.com/office/powerpoint/2018/4/main" xmlns:dgm14="http://schemas.microsoft.com/office/drawing/2010/diagram" xmlns:a15="http://schemas.microsoft.com/office/drawing/2012/main" xmlns:pic14="http://schemas.microsoft.com/office/drawing/2010/picture" xmlns:c16ac="http://schemas.microsoft.com/office/drawing/2014/chart/ac" xmlns:a16="http://schemas.microsoft.com/office/drawing/2014/main" xmlns:a1611="http://schemas.microsoft.com/office/drawing/2016/11/main" xmlns:dgm1612="http://schemas.microsoft.com/office/drawing/2016/12/diagram" xmlns:a16svg="http://schemas.microsoft.com/office/drawing/2016/SVG/main" xmlns:adec="http://schemas.microsoft.com/office/drawing/2017/decorative" xmlns:a18hc="http://schemas.microsoft.com/office/drawing/2018/hyperlinkcolor" xmlns:v="urn:schemas-microsoft-com:vml">
+<p:sld xmlns:r="http://schemas.openxmlformats.org/officeDocument/2006/relationships" xmlns:a="http://schemas.openxmlformats.org/drawingml/2006/main" xmlns:p="http://schemas.openxmlformats.org/presentationml/2006/main" xmlns:mc="http://schemas.openxmlformats.org/markup-compatibility/2006" xmlns:c="http://schemas.openxmlformats.org/drawingml/2006/chart" xmlns:cdr="http://schemas.openxmlformats.org/drawingml/2006/chartDrawing" xmlns:c14="http://schemas.microsoft.com/office/drawing/2007/8/2/chart" xmlns:dgm="http://schemas.openxmlformats.org/drawingml/2006/diagram" xmlns:pic="http://schemas.openxmlformats.org/drawingml/2006/picture" xmlns:wp="http://schemas.openxmlformats.org/drawingml/2006/wordprocessingDrawing" xmlns:wp14="http://schemas.microsoft.com/office/word/2010/wordprocessingDrawing" xmlns:xdr="http://schemas.openxmlformats.org/drawingml/2006/spreadsheetDrawing" xmlns:dsp="http://schemas.microsoft.com/office/drawing/2008/diagram" xmlns:p14="http://schemas.microsoft.com/office/powerpoint/2010/main" xmlns:a14="http://schemas.microsoft.com/office/drawing/2010/main" xmlns:p15="http://schemas.microsoft.com/office/powerpoint/2012/main" xmlns:p166="http://schemas.microsoft.com/office/powerpoint/2016/6/main" xmlns:a13cmd="http://schemas.microsoft.com/office/drawing/2013/main/command" xmlns:p13cmd="http://schemas.microsoft.com/office/powerpoint/2013/main/command" xmlns:p1510="http://schemas.microsoft.com/office/powerpoint/2015/10/main" xmlns:psez="http://schemas.microsoft.com/office/powerpoint/2016/sectionzoom" xmlns:pslz="http://schemas.microsoft.com/office/powerpoint/2016/slidezoom" xmlns:psuz="http://schemas.microsoft.com/office/powerpoint/2016/summaryzoom" xmlns:p173="http://schemas.microsoft.com/office/powerpoint/2017/3/main" xmlns:b="http://schemas.openxmlformats.org/officeDocument/2006/bibliography" xmlns:msink="http://schemas.microsoft.com/ink/2010/main" xmlns:cdr14="http://schemas.microsoft.com/office/drawing/2010/chartDrawing" xmlns:c15="http://schemas.microsoft.com/office/drawing/2012/chart" xmlns:cs="http://schemas.microsoft.com/office/drawing/2012/chartStyle" xmlns:ns30="http://www.w3.org/1998/Math/MathML" xmlns:ns31="http://www.w3.org/2003/InkML" xmlns:cx="http://schemas.microsoft.com/office/drawing/2014/chartex" xmlns:c16="http://schemas.microsoft.com/office/drawing/2014/chart" xmlns:dgm1611="http://schemas.microsoft.com/office/drawing/2016/11/diagram" xmlns:c173="http://schemas.microsoft.com/office/drawing/2017/03/chart" xmlns:am3d="http://schemas.microsoft.com/office/drawing/2017/model3d" xmlns:an18="http://schemas.microsoft.com/office/drawing/2018/animation" xmlns:anam3d="http://schemas.microsoft.com/office/drawing/2018/animation/model3d" xmlns:iact="http://schemas.microsoft.com/office/powerpoint/2014/inkAction" xmlns:thm15="http://schemas.microsoft.com/office/thememl/2012/main" xmlns:wetp="http://schemas.microsoft.com/office/webextensions/taskpanes/2010/11" xmlns:we="http://schemas.microsoft.com/office/webextensions/webextension/2010/11" xmlns:comp="http://schemas.openxmlformats.org/drawingml/2006/compatibility" xmlns:lc="http://schemas.openxmlformats.org/drawingml/2006/lockedCanvas" xmlns:p159="http://schemas.microsoft.com/office/powerpoint/2015/09/main" xmlns:p16="http://schemas.microsoft.com/office/powerpoint/2015/main" xmlns:p1710="http://schemas.microsoft.com/office/powerpoint/2017/10/main" xmlns:p184="http://schemas.microsoft.com/office/powerpoint/2018/4/main" xmlns:dgm14="http://schemas.microsoft.com/office/drawing/2010/diagram" xmlns:a15="http://schemas.microsoft.com/office/drawing/2012/main" xmlns:pic14="http://schemas.microsoft.com/office/drawing/2010/picture" xmlns:c16ac="http://schemas.microsoft.com/office/drawing/2014/chart/ac" xmlns:a16="http://schemas.microsoft.com/office/drawing/2014/main" xmlns:a1611="http://schemas.microsoft.com/office/drawing/2016/11/main" xmlns:dgm1612="http://schemas.microsoft.com/office/drawing/2016/12/diagram" xmlns:a16svg="http://schemas.microsoft.com/office/drawing/2016/SVG/main" xmlns:adec="http://schemas.microsoft.com/office/drawing/2017/decorative" xmlns:a18hc="http://schemas.microsoft.com/office/drawing/2018/hyperlinkcolor" xmlns:v="urn:schemas-microsoft-com:vml">
   <p:cSld>
     <p:spTree>
       <p:nvGrpSpPr>
@@ -6580,7 +6800,7 @@
       </p:grpSpPr>
       <p:sp>
         <p:nvSpPr>
-          <p:cNvPr id="1024" name="Clone_title_1024">
+          <p:cNvPr id="1048" name="Clone_title_1048">
             <a:extLst>
               <a:ext uri="{FF2B5EF4-FFF2-40B4-BE49-F238E27FC236}">
                 <a16:creationId id="{D9D22302-83E3-4E22-93DF-1E5D463B64C3}"/>
@@ -6618,7 +6838,7 @@
       </p:sp>
       <p:sp>
         <p:nvSpPr>
-          <p:cNvPr id="1025" name="Clone_obj_1025">
+          <p:cNvPr id="1049" name="Clone_obj_1049">
             <a:extLst>
               <a:ext uri="{FF2B5EF4-FFF2-40B4-BE49-F238E27FC236}">
                 <a16:creationId id="{56DDD407-AEC1-3D37-ADE9-45D0416B2084}"/>
@@ -6681,7 +6901,7 @@
       </p:sp>
       <p:sp>
         <p:nvSpPr>
-          <p:cNvPr id="1026" name="Clone_obj_1026">
+          <p:cNvPr id="1050" name="Clone_obj_1050">
             <a:extLst>
               <a:ext uri="{FF2B5EF4-FFF2-40B4-BE49-F238E27FC236}">
                 <a16:creationId id="{6200E1C4-7A2D-07AE-8DB0-52CEF088A187}"/>
@@ -6742,13 +6962,87 @@
           </a:p>
         </p:txBody>
       </p:sp>
+      <p:sp>
+        <p:nvSpPr>
+          <p:cNvPr id="1051" name="Clone_ftr_1051">
+            <a:extLst>
+              <a:ext uri="{FF2B5EF4-FFF2-40B4-BE49-F238E27FC236}">
+                <a16:creationId id="{576AF721-83FE-4B57-B910-C395D23FDE31}"/>
+              </a:ext>
+            </a:extLst>
+          </p:cNvPr>
+          <p:cNvSpPr>
+            <a:spLocks noGrp="true"/>
+          </p:cNvSpPr>
+          <p:nvPr>
+            <p:ph type="ftr" sz="quarter" idx="11"/>
+          </p:nvPr>
+        </p:nvSpPr>
+        <p:spPr>
+          <a:xfrm>
+            <a:off x="758952" y="6400800"/>
+            <a:ext cx="6099048" cy="365125"/>
+          </a:xfrm>
+          <a:prstGeom prst="rect">
+            <a:avLst/>
+          </a:prstGeom>
+        </p:spPr>
+        <p:txBody>
+          <a:bodyPr rtlCol="false"/>
+          <a:lstStyle/>
+        </p:txBody>
+      </p:sp>
+      <p:sp>
+        <p:nvSpPr>
+          <p:cNvPr id="1052" name="Clone_dt_1052">
+            <a:extLst>
+              <a:ext uri="{FF2B5EF4-FFF2-40B4-BE49-F238E27FC236}">
+                <a16:creationId id="{7F3A70F0-5AFA-4C5A-812B-220C6A38DB6B}"/>
+              </a:ext>
+            </a:extLst>
+          </p:cNvPr>
+          <p:cNvSpPr>
+            <a:spLocks noGrp="true"/>
+          </p:cNvSpPr>
+          <p:nvPr>
+            <p:ph type="dt" sz="half" idx="10"/>
+          </p:nvPr>
+        </p:nvSpPr>
+        <p:spPr/>
+        <p:txBody>
+          <a:bodyPr rtlCol="false"/>
+          <a:lstStyle/>
+        </p:txBody>
+      </p:sp>
+      <p:sp>
+        <p:nvSpPr>
+          <p:cNvPr id="1053" name="Clone_sldNum_1053">
+            <a:extLst>
+              <a:ext uri="{FF2B5EF4-FFF2-40B4-BE49-F238E27FC236}">
+                <a16:creationId id="{556A5893-52F1-44A1-AE8E-CF094DB41CFA}"/>
+              </a:ext>
+            </a:extLst>
+          </p:cNvPr>
+          <p:cNvSpPr>
+            <a:spLocks noGrp="true"/>
+          </p:cNvSpPr>
+          <p:nvPr>
+            <p:ph type="sldNum" sz="quarter" idx="12"/>
+          </p:nvPr>
+        </p:nvSpPr>
+        <p:spPr/>
+        <p:txBody>
+          <a:bodyPr rtlCol="false"/>
+          <a:lstStyle/>
+        </p:txBody>
+      </p:sp>
     </p:spTree>
   </p:cSld>
 </p:sld>
 </file>
 
 <file path=ppt/slides/slide13.xml><?xml version="1.0" encoding="utf-8"?>
-<p:sld xmlns:a="http://schemas.openxmlformats.org/drawingml/2006/main" xmlns:r="http://schemas.openxmlformats.org/officeDocument/2006/relationships" xmlns:p="http://schemas.openxmlformats.org/presentationml/2006/main" xmlns:mc="http://schemas.openxmlformats.org/markup-compatibility/2006" xmlns:c="http://schemas.openxmlformats.org/drawingml/2006/chart" xmlns:cdr="http://schemas.openxmlformats.org/drawingml/2006/chartDrawing" xmlns:c14="http://schemas.microsoft.com/office/drawing/2007/8/2/chart" xmlns:dgm="http://schemas.openxmlformats.org/drawingml/2006/diagram" xmlns:pic="http://schemas.openxmlformats.org/drawingml/2006/picture" xmlns:wp="http://schemas.openxmlformats.org/drawingml/2006/wordprocessingDrawing" xmlns:wp14="http://schemas.microsoft.com/office/word/2010/wordprocessingDrawing" xmlns:xdr="http://schemas.openxmlformats.org/drawingml/2006/spreadsheetDrawing" xmlns:dsp="http://schemas.microsoft.com/office/drawing/2008/diagram" xmlns:p14="http://schemas.microsoft.com/office/powerpoint/2010/main" xmlns:a14="http://schemas.microsoft.com/office/drawing/2010/main" xmlns:p15="http://schemas.microsoft.com/office/powerpoint/2012/main" xmlns:p166="http://schemas.microsoft.com/office/powerpoint/2016/6/main" xmlns:a13cmd="http://schemas.microsoft.com/office/drawing/2013/main/command" xmlns:p13cmd="http://schemas.microsoft.com/office/powerpoint/2013/main/command" xmlns:p1510="http://schemas.microsoft.com/office/powerpoint/2015/10/main" xmlns:psez="http://schemas.microsoft.com/office/powerpoint/2016/sectionzoom" xmlns:pslz="http://schemas.microsoft.com/office/powerpoint/2016/slidezoom" xmlns:psuz="http://schemas.microsoft.com/office/powerpoint/2016/summaryzoom" xmlns:p173="http://schemas.microsoft.com/office/powerpoint/2017/3/main" xmlns:b="http://schemas.openxmlformats.org/officeDocument/2006/bibliography" xmlns:msink="http://schemas.microsoft.com/ink/2010/main" xmlns:cdr14="http://schemas.microsoft.com/office/drawing/2010/chartDrawing" xmlns:c15="http://schemas.microsoft.com/office/drawing/2012/chart" xmlns:cs="http://schemas.microsoft.com/office/drawing/2012/chartStyle" xmlns:ns30="http://www.w3.org/1998/Math/MathML" xmlns:ns31="http://www.w3.org/2003/InkML" xmlns:cx="http://schemas.microsoft.com/office/drawing/2014/chartex" xmlns:c16="http://schemas.microsoft.com/office/drawing/2014/chart" xmlns:dgm1611="http://schemas.microsoft.com/office/drawing/2016/11/diagram" xmlns:c173="http://schemas.microsoft.com/office/drawing/2017/03/chart" xmlns:am3d="http://schemas.microsoft.com/office/drawing/2017/model3d" xmlns:an18="http://schemas.microsoft.com/office/drawing/2018/animation" xmlns:anam3d="http://schemas.microsoft.com/office/drawing/2018/animation/model3d" xmlns:iact="http://schemas.microsoft.com/office/powerpoint/2014/inkAction" xmlns:thm15="http://schemas.microsoft.com/office/thememl/2012/main" xmlns:wetp="http://schemas.microsoft.com/office/webextensions/taskpanes/2010/11" xmlns:we="http://schemas.microsoft.com/office/webextensions/webextension/2010/11" xmlns:comp="http://schemas.openxmlformats.org/drawingml/2006/compatibility" xmlns:lc="http://schemas.openxmlformats.org/drawingml/2006/lockedCanvas" xmlns:p159="http://schemas.microsoft.com/office/powerpoint/2015/09/main" xmlns:p16="http://schemas.microsoft.com/office/powerpoint/2015/main" xmlns:p1710="http://schemas.microsoft.com/office/powerpoint/2017/10/main" xmlns:p184="http://schemas.microsoft.com/office/powerpoint/2018/4/main" xmlns:dgm14="http://schemas.microsoft.com/office/drawing/2010/diagram" xmlns:a15="http://schemas.microsoft.com/office/drawing/2012/main" xmlns:pic14="http://schemas.microsoft.com/office/drawing/2010/picture" xmlns:c16ac="http://schemas.microsoft.com/office/drawing/2014/chart/ac" xmlns:a16="http://schemas.microsoft.com/office/drawing/2014/main" xmlns:a1611="http://schemas.microsoft.com/office/drawing/2016/11/main" xmlns:dgm1612="http://schemas.microsoft.com/office/drawing/2016/12/diagram" xmlns:a16svg="http://schemas.microsoft.com/office/drawing/2016/SVG/main" xmlns:adec="http://schemas.microsoft.com/office/drawing/2017/decorative" xmlns:a18hc="http://schemas.microsoft.com/office/drawing/2018/hyperlinkcolor" xmlns:v="urn:schemas-microsoft-com:vml">
+<p:sld xmlns:r="http://schemas.openxmlformats.org/officeDocument/2006/relationships" xmlns:a="http://schemas.openxmlformats.org/drawingml/2006/main" xmlns:p="http://schemas.openxmlformats.org/presentationml/2006/main" xmlns:mc="http://schemas.openxmlformats.org/markup-compatibility/2006" xmlns:c="http://schemas.openxmlformats.org/drawingml/2006/chart" xmlns:cdr="http://schemas.openxmlformats.org/drawingml/2006/chartDrawing" xmlns:c14="http://schemas.microsoft.com/office/drawing/2007/8/2/chart" xmlns:dgm="http://schemas.openxmlformats.org/drawingml/2006/diagram" xmlns:pic="http://schemas.openxmlformats.org/drawingml/2006/picture" xmlns:wp="http://schemas.openxmlformats.org/drawingml/2006/wordprocessingDrawing" xmlns:wp14="http://schemas.microsoft.com/office/word/2010/wordprocessingDrawing" xmlns:xdr="http://schemas.openxmlformats.org/drawingml/2006/spreadsheetDrawing" xmlns:dsp="http://schemas.microsoft.com/office/drawing/2008/diagram" xmlns:p14="http://schemas.microsoft.com/office/powerpoint/2010/main" xmlns:a14="http://schemas.microsoft.com/office/drawing/2010/main" xmlns:p15="http://schemas.microsoft.com/office/powerpoint/2012/main" xmlns:p166="http://schemas.microsoft.com/office/powerpoint/2016/6/main" xmlns:a13cmd="http://schemas.microsoft.com/office/drawing/2013/main/command" xmlns:p13cmd="http://schemas.microsoft.com/office/powerpoint/2013/main/command" xmlns:p1510="http://schemas.microsoft.com/office/powerpoint/2015/10/main" xmlns:psez="http://schemas.microsoft.com/office/powerpoint/2016/sectionzoom" xmlns:pslz="http://schemas.microsoft.com/office/powerpoint/2016/slidezoom" xmlns:psuz="http://schemas.microsoft.com/office/powerpoint/2016/summaryzoom" xmlns:p173="http://schemas.microsoft.com/office/powerpoint/2017/3/main" xmlns:b="http://schemas.openxmlformats.org/officeDocument/2006/bibliography" xmlns:msink="http://schemas.microsoft.com/ink/2010/main" xmlns:cdr14="http://schemas.microsoft.com/office/drawing/2010/chartDrawing" xmlns:c15="http://schemas.microsoft.com/office/drawing/2012/chart" xmlns:cs="http://schemas.microsoft.com/office/drawing/2012/chartStyle" xmlns:ns30="http://www.w3.org/1998/Math/MathML" xmlns:ns31="http://www.w3.org/2003/InkML" xmlns:cx="http://schemas.microsoft.com/office/drawing/2014/chartex" xmlns:c16="http://schemas.microsoft.com/office/drawing/2014/chart" xmlns:dgm1611="http://schemas.microsoft.com/office/drawing/2016/11/diagram" xmlns:c173="http://schemas.microsoft.com/office/drawing/2017/03/chart" xmlns:am3d="http://schemas.microsoft.com/office/drawing/2017/model3d" xmlns:an18="http://schemas.microsoft.com/office/drawing/2018/animation" xmlns:anam3d="http://schemas.microsoft.com/office/drawing/2018/animation/model3d" xmlns:iact="http://schemas.microsoft.com/office/powerpoint/2014/inkAction" xmlns:thm15="http://schemas.microsoft.com/office/thememl/2012/main" xmlns:wetp="http://schemas.microsoft.com/office/webextensions/taskpanes/2010/11" xmlns:we="http://schemas.microsoft.com/office/webextensions/webextension/2010/11" xmlns:comp="http://schemas.openxmlformats.org/drawingml/2006/compatibility" xmlns:lc="http://schemas.openxmlformats.org/drawingml/2006/lockedCanvas" xmlns:p159="http://schemas.microsoft.com/office/powerpoint/2015/09/main" xmlns:p16="http://schemas.microsoft.com/office/powerpoint/2015/main" xmlns:p1710="http://schemas.microsoft.com/office/powerpoint/2017/10/main" xmlns:p184="http://schemas.microsoft.com/office/powerpoint/2018/4/main" xmlns:dgm14="http://schemas.microsoft.com/office/drawing/2010/diagram" xmlns:a15="http://schemas.microsoft.com/office/drawing/2012/main" xmlns:pic14="http://schemas.microsoft.com/office/drawing/2010/picture" xmlns:c16ac="http://schemas.microsoft.com/office/drawing/2014/chart/ac" xmlns:a16="http://schemas.microsoft.com/office/drawing/2014/main" xmlns:a1611="http://schemas.microsoft.com/office/drawing/2016/11/main" xmlns:dgm1612="http://schemas.microsoft.com/office/drawing/2016/12/diagram" xmlns:a16svg="http://schemas.microsoft.com/office/drawing/2016/SVG/main" xmlns:adec="http://schemas.microsoft.com/office/drawing/2017/decorative" xmlns:a18hc="http://schemas.microsoft.com/office/drawing/2018/hyperlinkcolor" xmlns:v="urn:schemas-microsoft-com:vml">
   <p:cSld>
     <p:spTree>
       <p:nvGrpSpPr>
@@ -6766,7 +7060,7 @@
       </p:grpSpPr>
       <p:sp>
         <p:nvSpPr>
-          <p:cNvPr id="1027" name="Clone_title_1027">
+          <p:cNvPr id="1054" name="Clone_title_1054">
             <a:extLst>
               <a:ext uri="{FF2B5EF4-FFF2-40B4-BE49-F238E27FC236}">
                 <a16:creationId id="{4CD44A43-6E39-4FE6-87BB-C65CE8FC6B1A}"/>
@@ -6804,7 +7098,7 @@
       </p:sp>
       <p:sp>
         <p:nvSpPr>
-          <p:cNvPr id="1028" name="Clone_obj_1028">
+          <p:cNvPr id="1055" name="Clone_obj_1055">
             <a:extLst>
               <a:ext uri="{FF2B5EF4-FFF2-40B4-BE49-F238E27FC236}">
                 <a16:creationId id="{0C795068-4EB8-AD75-B4FA-E0676D823527}"/>
@@ -6865,13 +7159,123 @@
           </a:p>
         </p:txBody>
       </p:sp>
+      <p:sp>
+        <p:nvSpPr>
+          <p:cNvPr id="1056" name="Clone_pic_1056">
+            <a:extLst>
+              <a:ext uri="{FF2B5EF4-FFF2-40B4-BE49-F238E27FC236}">
+                <a16:creationId id="{5229EB0D-B986-4E26-BDF3-305AE3233EB7}"/>
+              </a:ext>
+            </a:extLst>
+          </p:cNvPr>
+          <p:cNvSpPr>
+            <a:spLocks noGrp="true"/>
+          </p:cNvSpPr>
+          <p:nvPr>
+            <p:ph type="pic" sz="quarter" idx="13"/>
+          </p:nvPr>
+        </p:nvSpPr>
+        <p:spPr>
+          <a:xfrm>
+            <a:off x="6900954" y="883486"/>
+            <a:ext cx="4562856" cy="5212513"/>
+          </a:xfrm>
+          <a:solidFill>
+            <a:schemeClr val="accent6"/>
+          </a:solidFill>
+        </p:spPr>
+        <p:txBody>
+          <a:bodyPr rtlCol="false"/>
+          <a:lstStyle/>
+          <a:p>
+            <a:r>
+              <a:t>[Zone PIC]
+Cliquez pour insérer</a:t>
+            </a:r>
+          </a:p>
+        </p:txBody>
+      </p:sp>
+      <p:sp>
+        <p:nvSpPr>
+          <p:cNvPr id="1057" name="Clone_ftr_1057">
+            <a:extLst>
+              <a:ext uri="{FF2B5EF4-FFF2-40B4-BE49-F238E27FC236}">
+                <a16:creationId id="{452CFE08-03FE-487B-8963-9FAD3049CFFA}"/>
+              </a:ext>
+            </a:extLst>
+          </p:cNvPr>
+          <p:cNvSpPr>
+            <a:spLocks noGrp="true"/>
+          </p:cNvSpPr>
+          <p:nvPr>
+            <p:ph type="ftr" sz="quarter" idx="11"/>
+          </p:nvPr>
+        </p:nvSpPr>
+        <p:spPr>
+          <a:xfrm>
+            <a:off x="758952" y="6400800"/>
+            <a:ext cx="6099048" cy="365125"/>
+          </a:xfrm>
+          <a:prstGeom prst="rect">
+            <a:avLst/>
+          </a:prstGeom>
+        </p:spPr>
+        <p:txBody>
+          <a:bodyPr rtlCol="false"/>
+          <a:lstStyle/>
+        </p:txBody>
+      </p:sp>
+      <p:sp>
+        <p:nvSpPr>
+          <p:cNvPr id="1058" name="Clone_dt_1058">
+            <a:extLst>
+              <a:ext uri="{FF2B5EF4-FFF2-40B4-BE49-F238E27FC236}">
+                <a16:creationId id="{B7862271-51F6-4122-9709-D279042F8846}"/>
+              </a:ext>
+            </a:extLst>
+          </p:cNvPr>
+          <p:cNvSpPr>
+            <a:spLocks noGrp="true"/>
+          </p:cNvSpPr>
+          <p:nvPr>
+            <p:ph type="dt" sz="half" idx="10"/>
+          </p:nvPr>
+        </p:nvSpPr>
+        <p:spPr/>
+        <p:txBody>
+          <a:bodyPr rtlCol="false"/>
+          <a:lstStyle/>
+        </p:txBody>
+      </p:sp>
+      <p:sp>
+        <p:nvSpPr>
+          <p:cNvPr id="1059" name="Clone_sldNum_1059">
+            <a:extLst>
+              <a:ext uri="{FF2B5EF4-FFF2-40B4-BE49-F238E27FC236}">
+                <a16:creationId id="{CA935A50-18AE-4CB1-BB10-1CBDD8A7C2C4}"/>
+              </a:ext>
+            </a:extLst>
+          </p:cNvPr>
+          <p:cNvSpPr>
+            <a:spLocks noGrp="true"/>
+          </p:cNvSpPr>
+          <p:nvPr>
+            <p:ph type="sldNum" sz="quarter" idx="12"/>
+          </p:nvPr>
+        </p:nvSpPr>
+        <p:spPr/>
+        <p:txBody>
+          <a:bodyPr rtlCol="false"/>
+          <a:lstStyle/>
+        </p:txBody>
+      </p:sp>
     </p:spTree>
   </p:cSld>
 </p:sld>
 </file>
 
 <file path=ppt/slides/slide2.xml><?xml version="1.0" encoding="utf-8"?>
-<p:sld xmlns:a="http://schemas.openxmlformats.org/drawingml/2006/main" xmlns:r="http://schemas.openxmlformats.org/officeDocument/2006/relationships" xmlns:p="http://schemas.openxmlformats.org/presentationml/2006/main" xmlns:mc="http://schemas.openxmlformats.org/markup-compatibility/2006" xmlns:c="http://schemas.openxmlformats.org/drawingml/2006/chart" xmlns:cdr="http://schemas.openxmlformats.org/drawingml/2006/chartDrawing" xmlns:c14="http://schemas.microsoft.com/office/drawing/2007/8/2/chart" xmlns:dgm="http://schemas.openxmlformats.org/drawingml/2006/diagram" xmlns:pic="http://schemas.openxmlformats.org/drawingml/2006/picture" xmlns:wp="http://schemas.openxmlformats.org/drawingml/2006/wordprocessingDrawing" xmlns:wp14="http://schemas.microsoft.com/office/word/2010/wordprocessingDrawing" xmlns:xdr="http://schemas.openxmlformats.org/drawingml/2006/spreadsheetDrawing" xmlns:dsp="http://schemas.microsoft.com/office/drawing/2008/diagram" xmlns:p14="http://schemas.microsoft.com/office/powerpoint/2010/main" xmlns:a14="http://schemas.microsoft.com/office/drawing/2010/main" xmlns:p15="http://schemas.microsoft.com/office/powerpoint/2012/main" xmlns:p166="http://schemas.microsoft.com/office/powerpoint/2016/6/main" xmlns:a13cmd="http://schemas.microsoft.com/office/drawing/2013/main/command" xmlns:p13cmd="http://schemas.microsoft.com/office/powerpoint/2013/main/command" xmlns:p1510="http://schemas.microsoft.com/office/powerpoint/2015/10/main" xmlns:psez="http://schemas.microsoft.com/office/powerpoint/2016/sectionzoom" xmlns:pslz="http://schemas.microsoft.com/office/powerpoint/2016/slidezoom" xmlns:psuz="http://schemas.microsoft.com/office/powerpoint/2016/summaryzoom" xmlns:p173="http://schemas.microsoft.com/office/powerpoint/2017/3/main" xmlns:b="http://schemas.openxmlformats.org/officeDocument/2006/bibliography" xmlns:msink="http://schemas.microsoft.com/ink/2010/main" xmlns:cdr14="http://schemas.microsoft.com/office/drawing/2010/chartDrawing" xmlns:c15="http://schemas.microsoft.com/office/drawing/2012/chart" xmlns:cs="http://schemas.microsoft.com/office/drawing/2012/chartStyle" xmlns:ns30="http://www.w3.org/1998/Math/MathML" xmlns:ns31="http://www.w3.org/2003/InkML" xmlns:cx="http://schemas.microsoft.com/office/drawing/2014/chartex" xmlns:c16="http://schemas.microsoft.com/office/drawing/2014/chart" xmlns:dgm1611="http://schemas.microsoft.com/office/drawing/2016/11/diagram" xmlns:c173="http://schemas.microsoft.com/office/drawing/2017/03/chart" xmlns:am3d="http://schemas.microsoft.com/office/drawing/2017/model3d" xmlns:an18="http://schemas.microsoft.com/office/drawing/2018/animation" xmlns:anam3d="http://schemas.microsoft.com/office/drawing/2018/animation/model3d" xmlns:iact="http://schemas.microsoft.com/office/powerpoint/2014/inkAction" xmlns:thm15="http://schemas.microsoft.com/office/thememl/2012/main" xmlns:wetp="http://schemas.microsoft.com/office/webextensions/taskpanes/2010/11" xmlns:we="http://schemas.microsoft.com/office/webextensions/webextension/2010/11" xmlns:comp="http://schemas.openxmlformats.org/drawingml/2006/compatibility" xmlns:lc="http://schemas.openxmlformats.org/drawingml/2006/lockedCanvas" xmlns:p159="http://schemas.microsoft.com/office/powerpoint/2015/09/main" xmlns:p16="http://schemas.microsoft.com/office/powerpoint/2015/main" xmlns:p1710="http://schemas.microsoft.com/office/powerpoint/2017/10/main" xmlns:p184="http://schemas.microsoft.com/office/powerpoint/2018/4/main" xmlns:dgm14="http://schemas.microsoft.com/office/drawing/2010/diagram" xmlns:a15="http://schemas.microsoft.com/office/drawing/2012/main" xmlns:pic14="http://schemas.microsoft.com/office/drawing/2010/picture" xmlns:c16ac="http://schemas.microsoft.com/office/drawing/2014/chart/ac" xmlns:a16="http://schemas.microsoft.com/office/drawing/2014/main" xmlns:a1611="http://schemas.microsoft.com/office/drawing/2016/11/main" xmlns:dgm1612="http://schemas.microsoft.com/office/drawing/2016/12/diagram" xmlns:a16svg="http://schemas.microsoft.com/office/drawing/2016/SVG/main" xmlns:adec="http://schemas.microsoft.com/office/drawing/2017/decorative" xmlns:a18hc="http://schemas.microsoft.com/office/drawing/2018/hyperlinkcolor" xmlns:v="urn:schemas-microsoft-com:vml">
+<p:sld xmlns:r="http://schemas.openxmlformats.org/officeDocument/2006/relationships" xmlns:a="http://schemas.openxmlformats.org/drawingml/2006/main" xmlns:p="http://schemas.openxmlformats.org/presentationml/2006/main" xmlns:mc="http://schemas.openxmlformats.org/markup-compatibility/2006" xmlns:c="http://schemas.openxmlformats.org/drawingml/2006/chart" xmlns:cdr="http://schemas.openxmlformats.org/drawingml/2006/chartDrawing" xmlns:c14="http://schemas.microsoft.com/office/drawing/2007/8/2/chart" xmlns:dgm="http://schemas.openxmlformats.org/drawingml/2006/diagram" xmlns:pic="http://schemas.openxmlformats.org/drawingml/2006/picture" xmlns:wp="http://schemas.openxmlformats.org/drawingml/2006/wordprocessingDrawing" xmlns:wp14="http://schemas.microsoft.com/office/word/2010/wordprocessingDrawing" xmlns:xdr="http://schemas.openxmlformats.org/drawingml/2006/spreadsheetDrawing" xmlns:dsp="http://schemas.microsoft.com/office/drawing/2008/diagram" xmlns:p14="http://schemas.microsoft.com/office/powerpoint/2010/main" xmlns:a14="http://schemas.microsoft.com/office/drawing/2010/main" xmlns:p15="http://schemas.microsoft.com/office/powerpoint/2012/main" xmlns:p166="http://schemas.microsoft.com/office/powerpoint/2016/6/main" xmlns:a13cmd="http://schemas.microsoft.com/office/drawing/2013/main/command" xmlns:p13cmd="http://schemas.microsoft.com/office/powerpoint/2013/main/command" xmlns:p1510="http://schemas.microsoft.com/office/powerpoint/2015/10/main" xmlns:psez="http://schemas.microsoft.com/office/powerpoint/2016/sectionzoom" xmlns:pslz="http://schemas.microsoft.com/office/powerpoint/2016/slidezoom" xmlns:psuz="http://schemas.microsoft.com/office/powerpoint/2016/summaryzoom" xmlns:p173="http://schemas.microsoft.com/office/powerpoint/2017/3/main" xmlns:b="http://schemas.openxmlformats.org/officeDocument/2006/bibliography" xmlns:msink="http://schemas.microsoft.com/ink/2010/main" xmlns:cdr14="http://schemas.microsoft.com/office/drawing/2010/chartDrawing" xmlns:c15="http://schemas.microsoft.com/office/drawing/2012/chart" xmlns:cs="http://schemas.microsoft.com/office/drawing/2012/chartStyle" xmlns:ns30="http://www.w3.org/1998/Math/MathML" xmlns:ns31="http://www.w3.org/2003/InkML" xmlns:cx="http://schemas.microsoft.com/office/drawing/2014/chartex" xmlns:c16="http://schemas.microsoft.com/office/drawing/2014/chart" xmlns:dgm1611="http://schemas.microsoft.com/office/drawing/2016/11/diagram" xmlns:c173="http://schemas.microsoft.com/office/drawing/2017/03/chart" xmlns:am3d="http://schemas.microsoft.com/office/drawing/2017/model3d" xmlns:an18="http://schemas.microsoft.com/office/drawing/2018/animation" xmlns:anam3d="http://schemas.microsoft.com/office/drawing/2018/animation/model3d" xmlns:iact="http://schemas.microsoft.com/office/powerpoint/2014/inkAction" xmlns:thm15="http://schemas.microsoft.com/office/thememl/2012/main" xmlns:wetp="http://schemas.microsoft.com/office/webextensions/taskpanes/2010/11" xmlns:we="http://schemas.microsoft.com/office/webextensions/webextension/2010/11" xmlns:comp="http://schemas.openxmlformats.org/drawingml/2006/compatibility" xmlns:lc="http://schemas.openxmlformats.org/drawingml/2006/lockedCanvas" xmlns:p159="http://schemas.microsoft.com/office/powerpoint/2015/09/main" xmlns:p16="http://schemas.microsoft.com/office/powerpoint/2015/main" xmlns:p1710="http://schemas.microsoft.com/office/powerpoint/2017/10/main" xmlns:p184="http://schemas.microsoft.com/office/powerpoint/2018/4/main" xmlns:dgm14="http://schemas.microsoft.com/office/drawing/2010/diagram" xmlns:a15="http://schemas.microsoft.com/office/drawing/2012/main" xmlns:pic14="http://schemas.microsoft.com/office/drawing/2010/picture" xmlns:c16ac="http://schemas.microsoft.com/office/drawing/2014/chart/ac" xmlns:a16="http://schemas.microsoft.com/office/drawing/2014/main" xmlns:a1611="http://schemas.microsoft.com/office/drawing/2016/11/main" xmlns:dgm1612="http://schemas.microsoft.com/office/drawing/2016/12/diagram" xmlns:a16svg="http://schemas.microsoft.com/office/drawing/2016/SVG/main" xmlns:adec="http://schemas.microsoft.com/office/drawing/2017/decorative" xmlns:a18hc="http://schemas.microsoft.com/office/drawing/2018/hyperlinkcolor" xmlns:v="urn:schemas-microsoft-com:vml">
   <p:cSld>
     <p:spTree>
       <p:nvGrpSpPr>
@@ -6889,7 +7293,7 @@
       </p:grpSpPr>
       <p:sp>
         <p:nvSpPr>
-          <p:cNvPr id="1002" name="Clone_title_1002">
+          <p:cNvPr id="1006" name="Clone_title_1006">
             <a:extLst>
               <a:ext uri="{FF2B5EF4-FFF2-40B4-BE49-F238E27FC236}">
                 <a16:creationId id="{00406F9C-B330-46B3-A03C-15F85CD76061}"/>
@@ -6927,7 +7331,43 @@
       </p:sp>
       <p:sp>
         <p:nvSpPr>
-          <p:cNvPr id="1003" name="Clone_obj_1003">
+          <p:cNvPr id="1007" name="Clone_pic_1007">
+            <a:extLst>
+              <a:ext uri="{FF2B5EF4-FFF2-40B4-BE49-F238E27FC236}">
+                <a16:creationId id="{34FC9061-555D-4FE2-ABE9-07A195BC022E}"/>
+              </a:ext>
+            </a:extLst>
+          </p:cNvPr>
+          <p:cNvSpPr>
+            <a:spLocks noGrp="true"/>
+          </p:cNvSpPr>
+          <p:nvPr>
+            <p:ph type="pic" sz="quarter" idx="13"/>
+          </p:nvPr>
+        </p:nvSpPr>
+        <p:spPr>
+          <a:xfrm>
+            <a:off x="758952" y="761988"/>
+            <a:ext cx="10689336" cy="2660904"/>
+          </a:xfrm>
+          <a:solidFill>
+            <a:schemeClr val="accent6"/>
+          </a:solidFill>
+        </p:spPr>
+        <p:txBody>
+          <a:bodyPr rtlCol="false"/>
+          <a:lstStyle/>
+          <a:p>
+            <a:r>
+              <a:t>[Zone PIC]
+Cliquez pour insérer</a:t>
+            </a:r>
+          </a:p>
+        </p:txBody>
+      </p:sp>
+      <p:sp>
+        <p:nvSpPr>
+          <p:cNvPr id="1008" name="Clone_obj_1008">
             <a:extLst>
               <a:ext uri="{FF2B5EF4-FFF2-40B4-BE49-F238E27FC236}">
                 <a16:creationId id="{6B179E90-1F70-6673-6D11-A0CDD3C3BF0C}"/>
@@ -6981,7 +7421,7 @@
 </file>
 
 <file path=ppt/slides/slide3.xml><?xml version="1.0" encoding="utf-8"?>
-<p:sld xmlns:a="http://schemas.openxmlformats.org/drawingml/2006/main" xmlns:r="http://schemas.openxmlformats.org/officeDocument/2006/relationships" xmlns:p="http://schemas.openxmlformats.org/presentationml/2006/main" xmlns:mc="http://schemas.openxmlformats.org/markup-compatibility/2006" xmlns:c="http://schemas.openxmlformats.org/drawingml/2006/chart" xmlns:cdr="http://schemas.openxmlformats.org/drawingml/2006/chartDrawing" xmlns:c14="http://schemas.microsoft.com/office/drawing/2007/8/2/chart" xmlns:dgm="http://schemas.openxmlformats.org/drawingml/2006/diagram" xmlns:pic="http://schemas.openxmlformats.org/drawingml/2006/picture" xmlns:wp="http://schemas.openxmlformats.org/drawingml/2006/wordprocessingDrawing" xmlns:wp14="http://schemas.microsoft.com/office/word/2010/wordprocessingDrawing" xmlns:xdr="http://schemas.openxmlformats.org/drawingml/2006/spreadsheetDrawing" xmlns:dsp="http://schemas.microsoft.com/office/drawing/2008/diagram" xmlns:p14="http://schemas.microsoft.com/office/powerpoint/2010/main" xmlns:a14="http://schemas.microsoft.com/office/drawing/2010/main" xmlns:p15="http://schemas.microsoft.com/office/powerpoint/2012/main" xmlns:p166="http://schemas.microsoft.com/office/powerpoint/2016/6/main" xmlns:a13cmd="http://schemas.microsoft.com/office/drawing/2013/main/command" xmlns:p13cmd="http://schemas.microsoft.com/office/powerpoint/2013/main/command" xmlns:p1510="http://schemas.microsoft.com/office/powerpoint/2015/10/main" xmlns:psez="http://schemas.microsoft.com/office/powerpoint/2016/sectionzoom" xmlns:pslz="http://schemas.microsoft.com/office/powerpoint/2016/slidezoom" xmlns:psuz="http://schemas.microsoft.com/office/powerpoint/2016/summaryzoom" xmlns:p173="http://schemas.microsoft.com/office/powerpoint/2017/3/main" xmlns:b="http://schemas.openxmlformats.org/officeDocument/2006/bibliography" xmlns:msink="http://schemas.microsoft.com/ink/2010/main" xmlns:cdr14="http://schemas.microsoft.com/office/drawing/2010/chartDrawing" xmlns:c15="http://schemas.microsoft.com/office/drawing/2012/chart" xmlns:cs="http://schemas.microsoft.com/office/drawing/2012/chartStyle" xmlns:ns30="http://www.w3.org/1998/Math/MathML" xmlns:ns31="http://www.w3.org/2003/InkML" xmlns:cx="http://schemas.microsoft.com/office/drawing/2014/chartex" xmlns:c16="http://schemas.microsoft.com/office/drawing/2014/chart" xmlns:dgm1611="http://schemas.microsoft.com/office/drawing/2016/11/diagram" xmlns:c173="http://schemas.microsoft.com/office/drawing/2017/03/chart" xmlns:am3d="http://schemas.microsoft.com/office/drawing/2017/model3d" xmlns:an18="http://schemas.microsoft.com/office/drawing/2018/animation" xmlns:anam3d="http://schemas.microsoft.com/office/drawing/2018/animation/model3d" xmlns:iact="http://schemas.microsoft.com/office/powerpoint/2014/inkAction" xmlns:thm15="http://schemas.microsoft.com/office/thememl/2012/main" xmlns:wetp="http://schemas.microsoft.com/office/webextensions/taskpanes/2010/11" xmlns:we="http://schemas.microsoft.com/office/webextensions/webextension/2010/11" xmlns:comp="http://schemas.openxmlformats.org/drawingml/2006/compatibility" xmlns:lc="http://schemas.openxmlformats.org/drawingml/2006/lockedCanvas" xmlns:p159="http://schemas.microsoft.com/office/powerpoint/2015/09/main" xmlns:p16="http://schemas.microsoft.com/office/powerpoint/2015/main" xmlns:p1710="http://schemas.microsoft.com/office/powerpoint/2017/10/main" xmlns:p184="http://schemas.microsoft.com/office/powerpoint/2018/4/main" xmlns:dgm14="http://schemas.microsoft.com/office/drawing/2010/diagram" xmlns:a15="http://schemas.microsoft.com/office/drawing/2012/main" xmlns:pic14="http://schemas.microsoft.com/office/drawing/2010/picture" xmlns:c16ac="http://schemas.microsoft.com/office/drawing/2014/chart/ac" xmlns:a16="http://schemas.microsoft.com/office/drawing/2014/main" xmlns:a1611="http://schemas.microsoft.com/office/drawing/2016/11/main" xmlns:dgm1612="http://schemas.microsoft.com/office/drawing/2016/12/diagram" xmlns:a16svg="http://schemas.microsoft.com/office/drawing/2016/SVG/main" xmlns:adec="http://schemas.microsoft.com/office/drawing/2017/decorative" xmlns:a18hc="http://schemas.microsoft.com/office/drawing/2018/hyperlinkcolor" xmlns:v="urn:schemas-microsoft-com:vml">
+<p:sld xmlns:r="http://schemas.openxmlformats.org/officeDocument/2006/relationships" xmlns:a="http://schemas.openxmlformats.org/drawingml/2006/main" xmlns:p="http://schemas.openxmlformats.org/presentationml/2006/main" xmlns:mc="http://schemas.openxmlformats.org/markup-compatibility/2006" xmlns:c="http://schemas.openxmlformats.org/drawingml/2006/chart" xmlns:cdr="http://schemas.openxmlformats.org/drawingml/2006/chartDrawing" xmlns:c14="http://schemas.microsoft.com/office/drawing/2007/8/2/chart" xmlns:dgm="http://schemas.openxmlformats.org/drawingml/2006/diagram" xmlns:pic="http://schemas.openxmlformats.org/drawingml/2006/picture" xmlns:wp="http://schemas.openxmlformats.org/drawingml/2006/wordprocessingDrawing" xmlns:wp14="http://schemas.microsoft.com/office/word/2010/wordprocessingDrawing" xmlns:xdr="http://schemas.openxmlformats.org/drawingml/2006/spreadsheetDrawing" xmlns:dsp="http://schemas.microsoft.com/office/drawing/2008/diagram" xmlns:p14="http://schemas.microsoft.com/office/powerpoint/2010/main" xmlns:a14="http://schemas.microsoft.com/office/drawing/2010/main" xmlns:p15="http://schemas.microsoft.com/office/powerpoint/2012/main" xmlns:p166="http://schemas.microsoft.com/office/powerpoint/2016/6/main" xmlns:a13cmd="http://schemas.microsoft.com/office/drawing/2013/main/command" xmlns:p13cmd="http://schemas.microsoft.com/office/powerpoint/2013/main/command" xmlns:p1510="http://schemas.microsoft.com/office/powerpoint/2015/10/main" xmlns:psez="http://schemas.microsoft.com/office/powerpoint/2016/sectionzoom" xmlns:pslz="http://schemas.microsoft.com/office/powerpoint/2016/slidezoom" xmlns:psuz="http://schemas.microsoft.com/office/powerpoint/2016/summaryzoom" xmlns:p173="http://schemas.microsoft.com/office/powerpoint/2017/3/main" xmlns:b="http://schemas.openxmlformats.org/officeDocument/2006/bibliography" xmlns:msink="http://schemas.microsoft.com/ink/2010/main" xmlns:cdr14="http://schemas.microsoft.com/office/drawing/2010/chartDrawing" xmlns:c15="http://schemas.microsoft.com/office/drawing/2012/chart" xmlns:cs="http://schemas.microsoft.com/office/drawing/2012/chartStyle" xmlns:ns30="http://www.w3.org/1998/Math/MathML" xmlns:ns31="http://www.w3.org/2003/InkML" xmlns:cx="http://schemas.microsoft.com/office/drawing/2014/chartex" xmlns:c16="http://schemas.microsoft.com/office/drawing/2014/chart" xmlns:dgm1611="http://schemas.microsoft.com/office/drawing/2016/11/diagram" xmlns:c173="http://schemas.microsoft.com/office/drawing/2017/03/chart" xmlns:am3d="http://schemas.microsoft.com/office/drawing/2017/model3d" xmlns:an18="http://schemas.microsoft.com/office/drawing/2018/animation" xmlns:anam3d="http://schemas.microsoft.com/office/drawing/2018/animation/model3d" xmlns:iact="http://schemas.microsoft.com/office/powerpoint/2014/inkAction" xmlns:thm15="http://schemas.microsoft.com/office/thememl/2012/main" xmlns:wetp="http://schemas.microsoft.com/office/webextensions/taskpanes/2010/11" xmlns:we="http://schemas.microsoft.com/office/webextensions/webextension/2010/11" xmlns:comp="http://schemas.openxmlformats.org/drawingml/2006/compatibility" xmlns:lc="http://schemas.openxmlformats.org/drawingml/2006/lockedCanvas" xmlns:p159="http://schemas.microsoft.com/office/powerpoint/2015/09/main" xmlns:p16="http://schemas.microsoft.com/office/powerpoint/2015/main" xmlns:p1710="http://schemas.microsoft.com/office/powerpoint/2017/10/main" xmlns:p184="http://schemas.microsoft.com/office/powerpoint/2018/4/main" xmlns:dgm14="http://schemas.microsoft.com/office/drawing/2010/diagram" xmlns:a15="http://schemas.microsoft.com/office/drawing/2012/main" xmlns:pic14="http://schemas.microsoft.com/office/drawing/2010/picture" xmlns:c16ac="http://schemas.microsoft.com/office/drawing/2014/chart/ac" xmlns:a16="http://schemas.microsoft.com/office/drawing/2014/main" xmlns:a1611="http://schemas.microsoft.com/office/drawing/2016/11/main" xmlns:dgm1612="http://schemas.microsoft.com/office/drawing/2016/12/diagram" xmlns:a16svg="http://schemas.microsoft.com/office/drawing/2016/SVG/main" xmlns:adec="http://schemas.microsoft.com/office/drawing/2017/decorative" xmlns:a18hc="http://schemas.microsoft.com/office/drawing/2018/hyperlinkcolor" xmlns:v="urn:schemas-microsoft-com:vml">
   <p:cSld>
     <p:spTree>
       <p:nvGrpSpPr>
@@ -6999,7 +7439,7 @@
       </p:grpSpPr>
       <p:sp>
         <p:nvSpPr>
-          <p:cNvPr id="1004" name="Clone_ctrTitle_1004">
+          <p:cNvPr id="1009" name="Clone_ctrTitle_1009">
             <a:extLst>
               <a:ext uri="{FF2B5EF4-FFF2-40B4-BE49-F238E27FC236}">
                 <a16:creationId id="{8950CCE3-163E-46A1-B489-395F3F75FE34}"/>
@@ -7037,7 +7477,7 @@
       </p:sp>
       <p:sp>
         <p:nvSpPr>
-          <p:cNvPr id="1005" name="Clone_subTitle_1005">
+          <p:cNvPr id="1010" name="Clone_subTitle_1010">
             <a:extLst>
               <a:ext uri="{FF2B5EF4-FFF2-40B4-BE49-F238E27FC236}">
                 <a16:creationId id="{81E38157-454C-44D5-8D2B-A220A53D780E}"/>
@@ -7074,13 +7514,49 @@
           </a:p>
         </p:txBody>
       </p:sp>
+      <p:sp>
+        <p:nvSpPr>
+          <p:cNvPr id="1011" name="Clone_pic_1011">
+            <a:extLst>
+              <a:ext uri="{FF2B5EF4-FFF2-40B4-BE49-F238E27FC236}">
+                <a16:creationId id="{82190B39-D040-425A-9AD6-58A7533FEA6D}"/>
+              </a:ext>
+            </a:extLst>
+          </p:cNvPr>
+          <p:cNvSpPr>
+            <a:spLocks noGrp="true"/>
+          </p:cNvSpPr>
+          <p:nvPr>
+            <p:ph type="pic" sz="quarter" idx="13"/>
+          </p:nvPr>
+        </p:nvSpPr>
+        <p:spPr>
+          <a:xfrm>
+            <a:off x="7013448" y="756284"/>
+            <a:ext cx="4434840" cy="5349240"/>
+          </a:xfrm>
+          <a:solidFill>
+            <a:schemeClr val="accent6"/>
+          </a:solidFill>
+        </p:spPr>
+        <p:txBody>
+          <a:bodyPr rtlCol="false"/>
+          <a:lstStyle/>
+          <a:p>
+            <a:r>
+              <a:t>[Zone PIC]
+Cliquez pour insérer</a:t>
+            </a:r>
+          </a:p>
+        </p:txBody>
+      </p:sp>
     </p:spTree>
   </p:cSld>
 </p:sld>
 </file>
 
 <file path=ppt/slides/slide4.xml><?xml version="1.0" encoding="utf-8"?>
-<p:sld xmlns:a="http://schemas.openxmlformats.org/drawingml/2006/main" xmlns:r="http://schemas.openxmlformats.org/officeDocument/2006/relationships" xmlns:p="http://schemas.openxmlformats.org/presentationml/2006/main" xmlns:mc="http://schemas.openxmlformats.org/markup-compatibility/2006" xmlns:c="http://schemas.openxmlformats.org/drawingml/2006/chart" xmlns:cdr="http://schemas.openxmlformats.org/drawingml/2006/chartDrawing" xmlns:c14="http://schemas.microsoft.com/office/drawing/2007/8/2/chart" xmlns:dgm="http://schemas.openxmlformats.org/drawingml/2006/diagram" xmlns:pic="http://schemas.openxmlformats.org/drawingml/2006/picture" xmlns:wp="http://schemas.openxmlformats.org/drawingml/2006/wordprocessingDrawing" xmlns:wp14="http://schemas.microsoft.com/office/word/2010/wordprocessingDrawing" xmlns:xdr="http://schemas.openxmlformats.org/drawingml/2006/spreadsheetDrawing" xmlns:dsp="http://schemas.microsoft.com/office/drawing/2008/diagram" xmlns:p14="http://schemas.microsoft.com/office/powerpoint/2010/main" xmlns:a14="http://schemas.microsoft.com/office/drawing/2010/main" xmlns:p15="http://schemas.microsoft.com/office/powerpoint/2012/main" xmlns:p166="http://schemas.microsoft.com/office/powerpoint/2016/6/main" xmlns:a13cmd="http://schemas.microsoft.com/office/drawing/2013/main/command" xmlns:p13cmd="http://schemas.microsoft.com/office/powerpoint/2013/main/command" xmlns:p1510="http://schemas.microsoft.com/office/powerpoint/2015/10/main" xmlns:psez="http://schemas.microsoft.com/office/powerpoint/2016/sectionzoom" xmlns:pslz="http://schemas.microsoft.com/office/powerpoint/2016/slidezoom" xmlns:psuz="http://schemas.microsoft.com/office/powerpoint/2016/summaryzoom" xmlns:p173="http://schemas.microsoft.com/office/powerpoint/2017/3/main" xmlns:b="http://schemas.openxmlformats.org/officeDocument/2006/bibliography" xmlns:msink="http://schemas.microsoft.com/ink/2010/main" xmlns:cdr14="http://schemas.microsoft.com/office/drawing/2010/chartDrawing" xmlns:c15="http://schemas.microsoft.com/office/drawing/2012/chart" xmlns:cs="http://schemas.microsoft.com/office/drawing/2012/chartStyle" xmlns:ns30="http://www.w3.org/1998/Math/MathML" xmlns:ns31="http://www.w3.org/2003/InkML" xmlns:cx="http://schemas.microsoft.com/office/drawing/2014/chartex" xmlns:c16="http://schemas.microsoft.com/office/drawing/2014/chart" xmlns:dgm1611="http://schemas.microsoft.com/office/drawing/2016/11/diagram" xmlns:c173="http://schemas.microsoft.com/office/drawing/2017/03/chart" xmlns:am3d="http://schemas.microsoft.com/office/drawing/2017/model3d" xmlns:an18="http://schemas.microsoft.com/office/drawing/2018/animation" xmlns:anam3d="http://schemas.microsoft.com/office/drawing/2018/animation/model3d" xmlns:iact="http://schemas.microsoft.com/office/powerpoint/2014/inkAction" xmlns:thm15="http://schemas.microsoft.com/office/thememl/2012/main" xmlns:wetp="http://schemas.microsoft.com/office/webextensions/taskpanes/2010/11" xmlns:we="http://schemas.microsoft.com/office/webextensions/webextension/2010/11" xmlns:comp="http://schemas.openxmlformats.org/drawingml/2006/compatibility" xmlns:lc="http://schemas.openxmlformats.org/drawingml/2006/lockedCanvas" xmlns:p159="http://schemas.microsoft.com/office/powerpoint/2015/09/main" xmlns:p16="http://schemas.microsoft.com/office/powerpoint/2015/main" xmlns:p1710="http://schemas.microsoft.com/office/powerpoint/2017/10/main" xmlns:p184="http://schemas.microsoft.com/office/powerpoint/2018/4/main" xmlns:dgm14="http://schemas.microsoft.com/office/drawing/2010/diagram" xmlns:a15="http://schemas.microsoft.com/office/drawing/2012/main" xmlns:pic14="http://schemas.microsoft.com/office/drawing/2010/picture" xmlns:c16ac="http://schemas.microsoft.com/office/drawing/2014/chart/ac" xmlns:a16="http://schemas.microsoft.com/office/drawing/2014/main" xmlns:a1611="http://schemas.microsoft.com/office/drawing/2016/11/main" xmlns:dgm1612="http://schemas.microsoft.com/office/drawing/2016/12/diagram" xmlns:a16svg="http://schemas.microsoft.com/office/drawing/2016/SVG/main" xmlns:adec="http://schemas.microsoft.com/office/drawing/2017/decorative" xmlns:a18hc="http://schemas.microsoft.com/office/drawing/2018/hyperlinkcolor" xmlns:v="urn:schemas-microsoft-com:vml">
+<p:sld xmlns:r="http://schemas.openxmlformats.org/officeDocument/2006/relationships" xmlns:a="http://schemas.openxmlformats.org/drawingml/2006/main" xmlns:p="http://schemas.openxmlformats.org/presentationml/2006/main" xmlns:mc="http://schemas.openxmlformats.org/markup-compatibility/2006" xmlns:c="http://schemas.openxmlformats.org/drawingml/2006/chart" xmlns:cdr="http://schemas.openxmlformats.org/drawingml/2006/chartDrawing" xmlns:c14="http://schemas.microsoft.com/office/drawing/2007/8/2/chart" xmlns:dgm="http://schemas.openxmlformats.org/drawingml/2006/diagram" xmlns:pic="http://schemas.openxmlformats.org/drawingml/2006/picture" xmlns:wp="http://schemas.openxmlformats.org/drawingml/2006/wordprocessingDrawing" xmlns:wp14="http://schemas.microsoft.com/office/word/2010/wordprocessingDrawing" xmlns:xdr="http://schemas.openxmlformats.org/drawingml/2006/spreadsheetDrawing" xmlns:dsp="http://schemas.microsoft.com/office/drawing/2008/diagram" xmlns:p14="http://schemas.microsoft.com/office/powerpoint/2010/main" xmlns:a14="http://schemas.microsoft.com/office/drawing/2010/main" xmlns:p15="http://schemas.microsoft.com/office/powerpoint/2012/main" xmlns:p166="http://schemas.microsoft.com/office/powerpoint/2016/6/main" xmlns:a13cmd="http://schemas.microsoft.com/office/drawing/2013/main/command" xmlns:p13cmd="http://schemas.microsoft.com/office/powerpoint/2013/main/command" xmlns:p1510="http://schemas.microsoft.com/office/powerpoint/2015/10/main" xmlns:psez="http://schemas.microsoft.com/office/powerpoint/2016/sectionzoom" xmlns:pslz="http://schemas.microsoft.com/office/powerpoint/2016/slidezoom" xmlns:psuz="http://schemas.microsoft.com/office/powerpoint/2016/summaryzoom" xmlns:p173="http://schemas.microsoft.com/office/powerpoint/2017/3/main" xmlns:b="http://schemas.openxmlformats.org/officeDocument/2006/bibliography" xmlns:msink="http://schemas.microsoft.com/ink/2010/main" xmlns:cdr14="http://schemas.microsoft.com/office/drawing/2010/chartDrawing" xmlns:c15="http://schemas.microsoft.com/office/drawing/2012/chart" xmlns:cs="http://schemas.microsoft.com/office/drawing/2012/chartStyle" xmlns:ns30="http://www.w3.org/1998/Math/MathML" xmlns:ns31="http://www.w3.org/2003/InkML" xmlns:cx="http://schemas.microsoft.com/office/drawing/2014/chartex" xmlns:c16="http://schemas.microsoft.com/office/drawing/2014/chart" xmlns:dgm1611="http://schemas.microsoft.com/office/drawing/2016/11/diagram" xmlns:c173="http://schemas.microsoft.com/office/drawing/2017/03/chart" xmlns:am3d="http://schemas.microsoft.com/office/drawing/2017/model3d" xmlns:an18="http://schemas.microsoft.com/office/drawing/2018/animation" xmlns:anam3d="http://schemas.microsoft.com/office/drawing/2018/animation/model3d" xmlns:iact="http://schemas.microsoft.com/office/powerpoint/2014/inkAction" xmlns:thm15="http://schemas.microsoft.com/office/thememl/2012/main" xmlns:wetp="http://schemas.microsoft.com/office/webextensions/taskpanes/2010/11" xmlns:we="http://schemas.microsoft.com/office/webextensions/webextension/2010/11" xmlns:comp="http://schemas.openxmlformats.org/drawingml/2006/compatibility" xmlns:lc="http://schemas.openxmlformats.org/drawingml/2006/lockedCanvas" xmlns:p159="http://schemas.microsoft.com/office/powerpoint/2015/09/main" xmlns:p16="http://schemas.microsoft.com/office/powerpoint/2015/main" xmlns:p1710="http://schemas.microsoft.com/office/powerpoint/2017/10/main" xmlns:p184="http://schemas.microsoft.com/office/powerpoint/2018/4/main" xmlns:dgm14="http://schemas.microsoft.com/office/drawing/2010/diagram" xmlns:a15="http://schemas.microsoft.com/office/drawing/2012/main" xmlns:pic14="http://schemas.microsoft.com/office/drawing/2010/picture" xmlns:c16ac="http://schemas.microsoft.com/office/drawing/2014/chart/ac" xmlns:a16="http://schemas.microsoft.com/office/drawing/2014/main" xmlns:a1611="http://schemas.microsoft.com/office/drawing/2016/11/main" xmlns:dgm1612="http://schemas.microsoft.com/office/drawing/2016/12/diagram" xmlns:a16svg="http://schemas.microsoft.com/office/drawing/2016/SVG/main" xmlns:adec="http://schemas.microsoft.com/office/drawing/2017/decorative" xmlns:a18hc="http://schemas.microsoft.com/office/drawing/2018/hyperlinkcolor" xmlns:v="urn:schemas-microsoft-com:vml">
   <p:cSld>
     <p:spTree>
       <p:nvGrpSpPr>
@@ -7098,7 +7574,7 @@
       </p:grpSpPr>
       <p:sp>
         <p:nvSpPr>
-          <p:cNvPr id="1006" name="Clone_ctrTitle_1006">
+          <p:cNvPr id="1012" name="Clone_ctrTitle_1012">
             <a:extLst>
               <a:ext uri="{FF2B5EF4-FFF2-40B4-BE49-F238E27FC236}">
                 <a16:creationId id="{8950CCE3-163E-46A1-B489-395F3F75FE34}"/>
@@ -7134,13 +7610,49 @@
           </a:p>
         </p:txBody>
       </p:sp>
+      <p:sp>
+        <p:nvSpPr>
+          <p:cNvPr id="1013" name="Clone_pic_1013">
+            <a:extLst>
+              <a:ext uri="{FF2B5EF4-FFF2-40B4-BE49-F238E27FC236}">
+                <a16:creationId id="{82190B39-D040-425A-9AD6-58A7533FEA6D}"/>
+              </a:ext>
+            </a:extLst>
+          </p:cNvPr>
+          <p:cNvSpPr>
+            <a:spLocks noGrp="true"/>
+          </p:cNvSpPr>
+          <p:nvPr>
+            <p:ph type="pic" sz="quarter" idx="13"/>
+          </p:nvPr>
+        </p:nvSpPr>
+        <p:spPr>
+          <a:xfrm>
+            <a:off x="6665976" y="756284"/>
+            <a:ext cx="4773168" cy="5349240"/>
+          </a:xfrm>
+          <a:solidFill>
+            <a:schemeClr val="accent6"/>
+          </a:solidFill>
+        </p:spPr>
+        <p:txBody>
+          <a:bodyPr rtlCol="false"/>
+          <a:lstStyle/>
+          <a:p>
+            <a:r>
+              <a:t>[Zone PIC]
+Cliquez pour insérer</a:t>
+            </a:r>
+          </a:p>
+        </p:txBody>
+      </p:sp>
     </p:spTree>
   </p:cSld>
 </p:sld>
 </file>
 
 <file path=ppt/slides/slide5.xml><?xml version="1.0" encoding="utf-8"?>
-<p:sld xmlns:a="http://schemas.openxmlformats.org/drawingml/2006/main" xmlns:r="http://schemas.openxmlformats.org/officeDocument/2006/relationships" xmlns:p="http://schemas.openxmlformats.org/presentationml/2006/main" xmlns:mc="http://schemas.openxmlformats.org/markup-compatibility/2006" xmlns:c="http://schemas.openxmlformats.org/drawingml/2006/chart" xmlns:cdr="http://schemas.openxmlformats.org/drawingml/2006/chartDrawing" xmlns:c14="http://schemas.microsoft.com/office/drawing/2007/8/2/chart" xmlns:dgm="http://schemas.openxmlformats.org/drawingml/2006/diagram" xmlns:pic="http://schemas.openxmlformats.org/drawingml/2006/picture" xmlns:wp="http://schemas.openxmlformats.org/drawingml/2006/wordprocessingDrawing" xmlns:wp14="http://schemas.microsoft.com/office/word/2010/wordprocessingDrawing" xmlns:xdr="http://schemas.openxmlformats.org/drawingml/2006/spreadsheetDrawing" xmlns:dsp="http://schemas.microsoft.com/office/drawing/2008/diagram" xmlns:p14="http://schemas.microsoft.com/office/powerpoint/2010/main" xmlns:a14="http://schemas.microsoft.com/office/drawing/2010/main" xmlns:p15="http://schemas.microsoft.com/office/powerpoint/2012/main" xmlns:p166="http://schemas.microsoft.com/office/powerpoint/2016/6/main" xmlns:a13cmd="http://schemas.microsoft.com/office/drawing/2013/main/command" xmlns:p13cmd="http://schemas.microsoft.com/office/powerpoint/2013/main/command" xmlns:p1510="http://schemas.microsoft.com/office/powerpoint/2015/10/main" xmlns:psez="http://schemas.microsoft.com/office/powerpoint/2016/sectionzoom" xmlns:pslz="http://schemas.microsoft.com/office/powerpoint/2016/slidezoom" xmlns:psuz="http://schemas.microsoft.com/office/powerpoint/2016/summaryzoom" xmlns:p173="http://schemas.microsoft.com/office/powerpoint/2017/3/main" xmlns:b="http://schemas.openxmlformats.org/officeDocument/2006/bibliography" xmlns:msink="http://schemas.microsoft.com/ink/2010/main" xmlns:cdr14="http://schemas.microsoft.com/office/drawing/2010/chartDrawing" xmlns:c15="http://schemas.microsoft.com/office/drawing/2012/chart" xmlns:cs="http://schemas.microsoft.com/office/drawing/2012/chartStyle" xmlns:ns30="http://www.w3.org/1998/Math/MathML" xmlns:ns31="http://www.w3.org/2003/InkML" xmlns:cx="http://schemas.microsoft.com/office/drawing/2014/chartex" xmlns:c16="http://schemas.microsoft.com/office/drawing/2014/chart" xmlns:dgm1611="http://schemas.microsoft.com/office/drawing/2016/11/diagram" xmlns:c173="http://schemas.microsoft.com/office/drawing/2017/03/chart" xmlns:am3d="http://schemas.microsoft.com/office/drawing/2017/model3d" xmlns:an18="http://schemas.microsoft.com/office/drawing/2018/animation" xmlns:anam3d="http://schemas.microsoft.com/office/drawing/2018/animation/model3d" xmlns:iact="http://schemas.microsoft.com/office/powerpoint/2014/inkAction" xmlns:thm15="http://schemas.microsoft.com/office/thememl/2012/main" xmlns:wetp="http://schemas.microsoft.com/office/webextensions/taskpanes/2010/11" xmlns:we="http://schemas.microsoft.com/office/webextensions/webextension/2010/11" xmlns:comp="http://schemas.openxmlformats.org/drawingml/2006/compatibility" xmlns:lc="http://schemas.openxmlformats.org/drawingml/2006/lockedCanvas" xmlns:p159="http://schemas.microsoft.com/office/powerpoint/2015/09/main" xmlns:p16="http://schemas.microsoft.com/office/powerpoint/2015/main" xmlns:p1710="http://schemas.microsoft.com/office/powerpoint/2017/10/main" xmlns:p184="http://schemas.microsoft.com/office/powerpoint/2018/4/main" xmlns:dgm14="http://schemas.microsoft.com/office/drawing/2010/diagram" xmlns:a15="http://schemas.microsoft.com/office/drawing/2012/main" xmlns:pic14="http://schemas.microsoft.com/office/drawing/2010/picture" xmlns:c16ac="http://schemas.microsoft.com/office/drawing/2014/chart/ac" xmlns:a16="http://schemas.microsoft.com/office/drawing/2014/main" xmlns:a1611="http://schemas.microsoft.com/office/drawing/2016/11/main" xmlns:dgm1612="http://schemas.microsoft.com/office/drawing/2016/12/diagram" xmlns:a16svg="http://schemas.microsoft.com/office/drawing/2016/SVG/main" xmlns:adec="http://schemas.microsoft.com/office/drawing/2017/decorative" xmlns:a18hc="http://schemas.microsoft.com/office/drawing/2018/hyperlinkcolor" xmlns:v="urn:schemas-microsoft-com:vml">
+<p:sld xmlns:r="http://schemas.openxmlformats.org/officeDocument/2006/relationships" xmlns:a="http://schemas.openxmlformats.org/drawingml/2006/main" xmlns:p="http://schemas.openxmlformats.org/presentationml/2006/main" xmlns:mc="http://schemas.openxmlformats.org/markup-compatibility/2006" xmlns:c="http://schemas.openxmlformats.org/drawingml/2006/chart" xmlns:cdr="http://schemas.openxmlformats.org/drawingml/2006/chartDrawing" xmlns:c14="http://schemas.microsoft.com/office/drawing/2007/8/2/chart" xmlns:dgm="http://schemas.openxmlformats.org/drawingml/2006/diagram" xmlns:pic="http://schemas.openxmlformats.org/drawingml/2006/picture" xmlns:wp="http://schemas.openxmlformats.org/drawingml/2006/wordprocessingDrawing" xmlns:wp14="http://schemas.microsoft.com/office/word/2010/wordprocessingDrawing" xmlns:xdr="http://schemas.openxmlformats.org/drawingml/2006/spreadsheetDrawing" xmlns:dsp="http://schemas.microsoft.com/office/drawing/2008/diagram" xmlns:p14="http://schemas.microsoft.com/office/powerpoint/2010/main" xmlns:a14="http://schemas.microsoft.com/office/drawing/2010/main" xmlns:p15="http://schemas.microsoft.com/office/powerpoint/2012/main" xmlns:p166="http://schemas.microsoft.com/office/powerpoint/2016/6/main" xmlns:a13cmd="http://schemas.microsoft.com/office/drawing/2013/main/command" xmlns:p13cmd="http://schemas.microsoft.com/office/powerpoint/2013/main/command" xmlns:p1510="http://schemas.microsoft.com/office/powerpoint/2015/10/main" xmlns:psez="http://schemas.microsoft.com/office/powerpoint/2016/sectionzoom" xmlns:pslz="http://schemas.microsoft.com/office/powerpoint/2016/slidezoom" xmlns:psuz="http://schemas.microsoft.com/office/powerpoint/2016/summaryzoom" xmlns:p173="http://schemas.microsoft.com/office/powerpoint/2017/3/main" xmlns:b="http://schemas.openxmlformats.org/officeDocument/2006/bibliography" xmlns:msink="http://schemas.microsoft.com/ink/2010/main" xmlns:cdr14="http://schemas.microsoft.com/office/drawing/2010/chartDrawing" xmlns:c15="http://schemas.microsoft.com/office/drawing/2012/chart" xmlns:cs="http://schemas.microsoft.com/office/drawing/2012/chartStyle" xmlns:ns30="http://www.w3.org/1998/Math/MathML" xmlns:ns31="http://www.w3.org/2003/InkML" xmlns:cx="http://schemas.microsoft.com/office/drawing/2014/chartex" xmlns:c16="http://schemas.microsoft.com/office/drawing/2014/chart" xmlns:dgm1611="http://schemas.microsoft.com/office/drawing/2016/11/diagram" xmlns:c173="http://schemas.microsoft.com/office/drawing/2017/03/chart" xmlns:am3d="http://schemas.microsoft.com/office/drawing/2017/model3d" xmlns:an18="http://schemas.microsoft.com/office/drawing/2018/animation" xmlns:anam3d="http://schemas.microsoft.com/office/drawing/2018/animation/model3d" xmlns:iact="http://schemas.microsoft.com/office/powerpoint/2014/inkAction" xmlns:thm15="http://schemas.microsoft.com/office/thememl/2012/main" xmlns:wetp="http://schemas.microsoft.com/office/webextensions/taskpanes/2010/11" xmlns:we="http://schemas.microsoft.com/office/webextensions/webextension/2010/11" xmlns:comp="http://schemas.openxmlformats.org/drawingml/2006/compatibility" xmlns:lc="http://schemas.openxmlformats.org/drawingml/2006/lockedCanvas" xmlns:p159="http://schemas.microsoft.com/office/powerpoint/2015/09/main" xmlns:p16="http://schemas.microsoft.com/office/powerpoint/2015/main" xmlns:p1710="http://schemas.microsoft.com/office/powerpoint/2017/10/main" xmlns:p184="http://schemas.microsoft.com/office/powerpoint/2018/4/main" xmlns:dgm14="http://schemas.microsoft.com/office/drawing/2010/diagram" xmlns:a15="http://schemas.microsoft.com/office/drawing/2012/main" xmlns:pic14="http://schemas.microsoft.com/office/drawing/2010/picture" xmlns:c16ac="http://schemas.microsoft.com/office/drawing/2014/chart/ac" xmlns:a16="http://schemas.microsoft.com/office/drawing/2014/main" xmlns:a1611="http://schemas.microsoft.com/office/drawing/2016/11/main" xmlns:dgm1612="http://schemas.microsoft.com/office/drawing/2016/12/diagram" xmlns:a16svg="http://schemas.microsoft.com/office/drawing/2016/SVG/main" xmlns:adec="http://schemas.microsoft.com/office/drawing/2017/decorative" xmlns:a18hc="http://schemas.microsoft.com/office/drawing/2018/hyperlinkcolor" xmlns:v="urn:schemas-microsoft-com:vml">
   <p:cSld>
     <p:spTree>
       <p:nvGrpSpPr>
@@ -7158,7 +7670,7 @@
       </p:grpSpPr>
       <p:sp>
         <p:nvSpPr>
-          <p:cNvPr id="1007" name="Clone_title_1007">
+          <p:cNvPr id="1014" name="Clone_title_1014">
             <a:extLst>
               <a:ext uri="{FF2B5EF4-FFF2-40B4-BE49-F238E27FC236}">
                 <a16:creationId id="{D9D22302-83E3-4E22-93DF-1E5D463B64C3}"/>
@@ -7196,7 +7708,7 @@
       </p:sp>
       <p:sp>
         <p:nvSpPr>
-          <p:cNvPr id="1008" name="Clone_obj_1008">
+          <p:cNvPr id="1015" name="Clone_obj_1015">
             <a:extLst>
               <a:ext uri="{FF2B5EF4-FFF2-40B4-BE49-F238E27FC236}">
                 <a16:creationId id="{3B778B8B-E9A3-44BE-85A6-3E316659A9B4}"/>
@@ -7260,7 +7772,7 @@
       </p:sp>
       <p:sp>
         <p:nvSpPr>
-          <p:cNvPr id="1009" name="Clone_obj_1009">
+          <p:cNvPr id="1016" name="Clone_obj_1016">
             <a:extLst>
               <a:ext uri="{FF2B5EF4-FFF2-40B4-BE49-F238E27FC236}">
                 <a16:creationId id="{A336BAA8-288D-4A65-AF12-E44ED08AF83A}"/>
@@ -7321,13 +7833,87 @@
           </a:p>
         </p:txBody>
       </p:sp>
+      <p:sp>
+        <p:nvSpPr>
+          <p:cNvPr id="1017" name="Clone_ftr_1017">
+            <a:extLst>
+              <a:ext uri="{FF2B5EF4-FFF2-40B4-BE49-F238E27FC236}">
+                <a16:creationId id="{576AF721-83FE-4B57-B910-C395D23FDE31}"/>
+              </a:ext>
+            </a:extLst>
+          </p:cNvPr>
+          <p:cNvSpPr>
+            <a:spLocks noGrp="true"/>
+          </p:cNvSpPr>
+          <p:nvPr>
+            <p:ph type="ftr" sz="quarter" idx="11"/>
+          </p:nvPr>
+        </p:nvSpPr>
+        <p:spPr>
+          <a:xfrm>
+            <a:off x="758952" y="6400800"/>
+            <a:ext cx="6099048" cy="365125"/>
+          </a:xfrm>
+          <a:prstGeom prst="rect">
+            <a:avLst/>
+          </a:prstGeom>
+        </p:spPr>
+        <p:txBody>
+          <a:bodyPr rtlCol="false"/>
+          <a:lstStyle/>
+        </p:txBody>
+      </p:sp>
+      <p:sp>
+        <p:nvSpPr>
+          <p:cNvPr id="1018" name="Clone_dt_1018">
+            <a:extLst>
+              <a:ext uri="{FF2B5EF4-FFF2-40B4-BE49-F238E27FC236}">
+                <a16:creationId id="{7F3A70F0-5AFA-4C5A-812B-220C6A38DB6B}"/>
+              </a:ext>
+            </a:extLst>
+          </p:cNvPr>
+          <p:cNvSpPr>
+            <a:spLocks noGrp="true"/>
+          </p:cNvSpPr>
+          <p:nvPr>
+            <p:ph type="dt" sz="half" idx="10"/>
+          </p:nvPr>
+        </p:nvSpPr>
+        <p:spPr/>
+        <p:txBody>
+          <a:bodyPr rtlCol="false"/>
+          <a:lstStyle/>
+        </p:txBody>
+      </p:sp>
+      <p:sp>
+        <p:nvSpPr>
+          <p:cNvPr id="1019" name="Clone_sldNum_1019">
+            <a:extLst>
+              <a:ext uri="{FF2B5EF4-FFF2-40B4-BE49-F238E27FC236}">
+                <a16:creationId id="{556A5893-52F1-44A1-AE8E-CF094DB41CFA}"/>
+              </a:ext>
+            </a:extLst>
+          </p:cNvPr>
+          <p:cNvSpPr>
+            <a:spLocks noGrp="true"/>
+          </p:cNvSpPr>
+          <p:nvPr>
+            <p:ph type="sldNum" sz="quarter" idx="12"/>
+          </p:nvPr>
+        </p:nvSpPr>
+        <p:spPr/>
+        <p:txBody>
+          <a:bodyPr rtlCol="false"/>
+          <a:lstStyle/>
+        </p:txBody>
+      </p:sp>
     </p:spTree>
   </p:cSld>
 </p:sld>
 </file>
 
 <file path=ppt/slides/slide6.xml><?xml version="1.0" encoding="utf-8"?>
-<p:sld xmlns:a="http://schemas.openxmlformats.org/drawingml/2006/main" xmlns:r="http://schemas.openxmlformats.org/officeDocument/2006/relationships" xmlns:p="http://schemas.openxmlformats.org/presentationml/2006/main" xmlns:mc="http://schemas.openxmlformats.org/markup-compatibility/2006" xmlns:c="http://schemas.openxmlformats.org/drawingml/2006/chart" xmlns:cdr="http://schemas.openxmlformats.org/drawingml/2006/chartDrawing" xmlns:c14="http://schemas.microsoft.com/office/drawing/2007/8/2/chart" xmlns:dgm="http://schemas.openxmlformats.org/drawingml/2006/diagram" xmlns:pic="http://schemas.openxmlformats.org/drawingml/2006/picture" xmlns:wp="http://schemas.openxmlformats.org/drawingml/2006/wordprocessingDrawing" xmlns:wp14="http://schemas.microsoft.com/office/word/2010/wordprocessingDrawing" xmlns:xdr="http://schemas.openxmlformats.org/drawingml/2006/spreadsheetDrawing" xmlns:dsp="http://schemas.microsoft.com/office/drawing/2008/diagram" xmlns:p14="http://schemas.microsoft.com/office/powerpoint/2010/main" xmlns:a14="http://schemas.microsoft.com/office/drawing/2010/main" xmlns:p15="http://schemas.microsoft.com/office/powerpoint/2012/main" xmlns:p166="http://schemas.microsoft.com/office/powerpoint/2016/6/main" xmlns:a13cmd="http://schemas.microsoft.com/office/drawing/2013/main/command" xmlns:p13cmd="http://schemas.microsoft.com/office/powerpoint/2013/main/command" xmlns:p1510="http://schemas.microsoft.com/office/powerpoint/2015/10/main" xmlns:psez="http://schemas.microsoft.com/office/powerpoint/2016/sectionzoom" xmlns:pslz="http://schemas.microsoft.com/office/powerpoint/2016/slidezoom" xmlns:psuz="http://schemas.microsoft.com/office/powerpoint/2016/summaryzoom" xmlns:p173="http://schemas.microsoft.com/office/powerpoint/2017/3/main" xmlns:b="http://schemas.openxmlformats.org/officeDocument/2006/bibliography" xmlns:msink="http://schemas.microsoft.com/ink/2010/main" xmlns:cdr14="http://schemas.microsoft.com/office/drawing/2010/chartDrawing" xmlns:c15="http://schemas.microsoft.com/office/drawing/2012/chart" xmlns:cs="http://schemas.microsoft.com/office/drawing/2012/chartStyle" xmlns:ns30="http://www.w3.org/1998/Math/MathML" xmlns:ns31="http://www.w3.org/2003/InkML" xmlns:cx="http://schemas.microsoft.com/office/drawing/2014/chartex" xmlns:c16="http://schemas.microsoft.com/office/drawing/2014/chart" xmlns:dgm1611="http://schemas.microsoft.com/office/drawing/2016/11/diagram" xmlns:c173="http://schemas.microsoft.com/office/drawing/2017/03/chart" xmlns:am3d="http://schemas.microsoft.com/office/drawing/2017/model3d" xmlns:an18="http://schemas.microsoft.com/office/drawing/2018/animation" xmlns:anam3d="http://schemas.microsoft.com/office/drawing/2018/animation/model3d" xmlns:iact="http://schemas.microsoft.com/office/powerpoint/2014/inkAction" xmlns:thm15="http://schemas.microsoft.com/office/thememl/2012/main" xmlns:wetp="http://schemas.microsoft.com/office/webextensions/taskpanes/2010/11" xmlns:we="http://schemas.microsoft.com/office/webextensions/webextension/2010/11" xmlns:comp="http://schemas.openxmlformats.org/drawingml/2006/compatibility" xmlns:lc="http://schemas.openxmlformats.org/drawingml/2006/lockedCanvas" xmlns:p159="http://schemas.microsoft.com/office/powerpoint/2015/09/main" xmlns:p16="http://schemas.microsoft.com/office/powerpoint/2015/main" xmlns:p1710="http://schemas.microsoft.com/office/powerpoint/2017/10/main" xmlns:p184="http://schemas.microsoft.com/office/powerpoint/2018/4/main" xmlns:dgm14="http://schemas.microsoft.com/office/drawing/2010/diagram" xmlns:a15="http://schemas.microsoft.com/office/drawing/2012/main" xmlns:pic14="http://schemas.microsoft.com/office/drawing/2010/picture" xmlns:c16ac="http://schemas.microsoft.com/office/drawing/2014/chart/ac" xmlns:a16="http://schemas.microsoft.com/office/drawing/2014/main" xmlns:a1611="http://schemas.microsoft.com/office/drawing/2016/11/main" xmlns:dgm1612="http://schemas.microsoft.com/office/drawing/2016/12/diagram" xmlns:a16svg="http://schemas.microsoft.com/office/drawing/2016/SVG/main" xmlns:adec="http://schemas.microsoft.com/office/drawing/2017/decorative" xmlns:a18hc="http://schemas.microsoft.com/office/drawing/2018/hyperlinkcolor" xmlns:v="urn:schemas-microsoft-com:vml">
+<p:sld xmlns:r="http://schemas.openxmlformats.org/officeDocument/2006/relationships" xmlns:a="http://schemas.openxmlformats.org/drawingml/2006/main" xmlns:p="http://schemas.openxmlformats.org/presentationml/2006/main" xmlns:mc="http://schemas.openxmlformats.org/markup-compatibility/2006" xmlns:c="http://schemas.openxmlformats.org/drawingml/2006/chart" xmlns:cdr="http://schemas.openxmlformats.org/drawingml/2006/chartDrawing" xmlns:c14="http://schemas.microsoft.com/office/drawing/2007/8/2/chart" xmlns:dgm="http://schemas.openxmlformats.org/drawingml/2006/diagram" xmlns:pic="http://schemas.openxmlformats.org/drawingml/2006/picture" xmlns:wp="http://schemas.openxmlformats.org/drawingml/2006/wordprocessingDrawing" xmlns:wp14="http://schemas.microsoft.com/office/word/2010/wordprocessingDrawing" xmlns:xdr="http://schemas.openxmlformats.org/drawingml/2006/spreadsheetDrawing" xmlns:dsp="http://schemas.microsoft.com/office/drawing/2008/diagram" xmlns:p14="http://schemas.microsoft.com/office/powerpoint/2010/main" xmlns:a14="http://schemas.microsoft.com/office/drawing/2010/main" xmlns:p15="http://schemas.microsoft.com/office/powerpoint/2012/main" xmlns:p166="http://schemas.microsoft.com/office/powerpoint/2016/6/main" xmlns:a13cmd="http://schemas.microsoft.com/office/drawing/2013/main/command" xmlns:p13cmd="http://schemas.microsoft.com/office/powerpoint/2013/main/command" xmlns:p1510="http://schemas.microsoft.com/office/powerpoint/2015/10/main" xmlns:psez="http://schemas.microsoft.com/office/powerpoint/2016/sectionzoom" xmlns:pslz="http://schemas.microsoft.com/office/powerpoint/2016/slidezoom" xmlns:psuz="http://schemas.microsoft.com/office/powerpoint/2016/summaryzoom" xmlns:p173="http://schemas.microsoft.com/office/powerpoint/2017/3/main" xmlns:b="http://schemas.openxmlformats.org/officeDocument/2006/bibliography" xmlns:msink="http://schemas.microsoft.com/ink/2010/main" xmlns:cdr14="http://schemas.microsoft.com/office/drawing/2010/chartDrawing" xmlns:c15="http://schemas.microsoft.com/office/drawing/2012/chart" xmlns:cs="http://schemas.microsoft.com/office/drawing/2012/chartStyle" xmlns:ns30="http://www.w3.org/1998/Math/MathML" xmlns:ns31="http://www.w3.org/2003/InkML" xmlns:cx="http://schemas.microsoft.com/office/drawing/2014/chartex" xmlns:c16="http://schemas.microsoft.com/office/drawing/2014/chart" xmlns:dgm1611="http://schemas.microsoft.com/office/drawing/2016/11/diagram" xmlns:c173="http://schemas.microsoft.com/office/drawing/2017/03/chart" xmlns:am3d="http://schemas.microsoft.com/office/drawing/2017/model3d" xmlns:an18="http://schemas.microsoft.com/office/drawing/2018/animation" xmlns:anam3d="http://schemas.microsoft.com/office/drawing/2018/animation/model3d" xmlns:iact="http://schemas.microsoft.com/office/powerpoint/2014/inkAction" xmlns:thm15="http://schemas.microsoft.com/office/thememl/2012/main" xmlns:wetp="http://schemas.microsoft.com/office/webextensions/taskpanes/2010/11" xmlns:we="http://schemas.microsoft.com/office/webextensions/webextension/2010/11" xmlns:comp="http://schemas.openxmlformats.org/drawingml/2006/compatibility" xmlns:lc="http://schemas.openxmlformats.org/drawingml/2006/lockedCanvas" xmlns:p159="http://schemas.microsoft.com/office/powerpoint/2015/09/main" xmlns:p16="http://schemas.microsoft.com/office/powerpoint/2015/main" xmlns:p1710="http://schemas.microsoft.com/office/powerpoint/2017/10/main" xmlns:p184="http://schemas.microsoft.com/office/powerpoint/2018/4/main" xmlns:dgm14="http://schemas.microsoft.com/office/drawing/2010/diagram" xmlns:a15="http://schemas.microsoft.com/office/drawing/2012/main" xmlns:pic14="http://schemas.microsoft.com/office/drawing/2010/picture" xmlns:c16ac="http://schemas.microsoft.com/office/drawing/2014/chart/ac" xmlns:a16="http://schemas.microsoft.com/office/drawing/2014/main" xmlns:a1611="http://schemas.microsoft.com/office/drawing/2016/11/main" xmlns:dgm1612="http://schemas.microsoft.com/office/drawing/2016/12/diagram" xmlns:a16svg="http://schemas.microsoft.com/office/drawing/2016/SVG/main" xmlns:adec="http://schemas.microsoft.com/office/drawing/2017/decorative" xmlns:a18hc="http://schemas.microsoft.com/office/drawing/2018/hyperlinkcolor" xmlns:v="urn:schemas-microsoft-com:vml">
   <p:cSld>
     <p:spTree>
       <p:nvGrpSpPr>
@@ -7345,7 +7931,7 @@
       </p:grpSpPr>
       <p:sp>
         <p:nvSpPr>
-          <p:cNvPr id="1010" name="Clone_title_1010">
+          <p:cNvPr id="1020" name="Clone_title_1020">
             <a:extLst>
               <a:ext uri="{FF2B5EF4-FFF2-40B4-BE49-F238E27FC236}">
                 <a16:creationId id="{424C5BB2-C09C-49B0-BAFA-DE1801CD3E90}"/>
@@ -7383,7 +7969,7 @@
       </p:sp>
       <p:sp>
         <p:nvSpPr>
-          <p:cNvPr id="1011" name="Clone_obj_1011">
+          <p:cNvPr id="1021" name="Clone_obj_1021">
             <a:extLst>
               <a:ext uri="{FF2B5EF4-FFF2-40B4-BE49-F238E27FC236}">
                 <a16:creationId id="{C3A47C21-944D-47FE-9519-A25518837115}"/>
@@ -7424,6 +8010,72 @@
               <a:t>Troisième donnée factuelle ou chiffre</a:t>
             </a:r>
           </a:p>
+        </p:txBody>
+      </p:sp>
+      <p:sp>
+        <p:nvSpPr>
+          <p:cNvPr id="1022" name="Clone_ftr_1022">
+            <a:extLst>
+              <a:ext uri="{FF2B5EF4-FFF2-40B4-BE49-F238E27FC236}">
+                <a16:creationId id="{BA2AD668-6E19-425C-88F7-AF4220662C0D}"/>
+              </a:ext>
+            </a:extLst>
+          </p:cNvPr>
+          <p:cNvSpPr>
+            <a:spLocks noGrp="true"/>
+          </p:cNvSpPr>
+          <p:nvPr>
+            <p:ph type="ftr" sz="quarter" idx="11"/>
+          </p:nvPr>
+        </p:nvSpPr>
+        <p:spPr/>
+        <p:txBody>
+          <a:bodyPr rtlCol="false"/>
+          <a:lstStyle/>
+        </p:txBody>
+      </p:sp>
+      <p:sp>
+        <p:nvSpPr>
+          <p:cNvPr id="1023" name="Clone_dt_1023">
+            <a:extLst>
+              <a:ext uri="{FF2B5EF4-FFF2-40B4-BE49-F238E27FC236}">
+                <a16:creationId id="{AC7CE36D-6B7B-4D5E-831E-34A4286D6E6A}"/>
+              </a:ext>
+            </a:extLst>
+          </p:cNvPr>
+          <p:cNvSpPr>
+            <a:spLocks noGrp="true"/>
+          </p:cNvSpPr>
+          <p:nvPr>
+            <p:ph type="dt" sz="half" idx="10"/>
+          </p:nvPr>
+        </p:nvSpPr>
+        <p:spPr/>
+        <p:txBody>
+          <a:bodyPr rtlCol="false"/>
+          <a:lstStyle/>
+        </p:txBody>
+      </p:sp>
+      <p:sp>
+        <p:nvSpPr>
+          <p:cNvPr id="1024" name="Clone_sldNum_1024">
+            <a:extLst>
+              <a:ext uri="{FF2B5EF4-FFF2-40B4-BE49-F238E27FC236}">
+                <a16:creationId id="{36905C53-CF7C-4936-9E35-1BEBD683626E}"/>
+              </a:ext>
+            </a:extLst>
+          </p:cNvPr>
+          <p:cNvSpPr>
+            <a:spLocks noGrp="true"/>
+          </p:cNvSpPr>
+          <p:nvPr>
+            <p:ph type="sldNum" sz="quarter" idx="12"/>
+          </p:nvPr>
+        </p:nvSpPr>
+        <p:spPr/>
+        <p:txBody>
+          <a:bodyPr rtlCol="false"/>
+          <a:lstStyle/>
         </p:txBody>
       </p:sp>
     </p:spTree>
@@ -7432,7 +8084,7 @@
 </file>
 
 <file path=ppt/slides/slide7.xml><?xml version="1.0" encoding="utf-8"?>
-<p:sld xmlns:a="http://schemas.openxmlformats.org/drawingml/2006/main" xmlns:r="http://schemas.openxmlformats.org/officeDocument/2006/relationships" xmlns:p="http://schemas.openxmlformats.org/presentationml/2006/main" xmlns:mc="http://schemas.openxmlformats.org/markup-compatibility/2006" xmlns:c="http://schemas.openxmlformats.org/drawingml/2006/chart" xmlns:cdr="http://schemas.openxmlformats.org/drawingml/2006/chartDrawing" xmlns:c14="http://schemas.microsoft.com/office/drawing/2007/8/2/chart" xmlns:dgm="http://schemas.openxmlformats.org/drawingml/2006/diagram" xmlns:pic="http://schemas.openxmlformats.org/drawingml/2006/picture" xmlns:wp="http://schemas.openxmlformats.org/drawingml/2006/wordprocessingDrawing" xmlns:wp14="http://schemas.microsoft.com/office/word/2010/wordprocessingDrawing" xmlns:xdr="http://schemas.openxmlformats.org/drawingml/2006/spreadsheetDrawing" xmlns:dsp="http://schemas.microsoft.com/office/drawing/2008/diagram" xmlns:p14="http://schemas.microsoft.com/office/powerpoint/2010/main" xmlns:a14="http://schemas.microsoft.com/office/drawing/2010/main" xmlns:p15="http://schemas.microsoft.com/office/powerpoint/2012/main" xmlns:p166="http://schemas.microsoft.com/office/powerpoint/2016/6/main" xmlns:a13cmd="http://schemas.microsoft.com/office/drawing/2013/main/command" xmlns:p13cmd="http://schemas.microsoft.com/office/powerpoint/2013/main/command" xmlns:p1510="http://schemas.microsoft.com/office/powerpoint/2015/10/main" xmlns:psez="http://schemas.microsoft.com/office/powerpoint/2016/sectionzoom" xmlns:pslz="http://schemas.microsoft.com/office/powerpoint/2016/slidezoom" xmlns:psuz="http://schemas.microsoft.com/office/powerpoint/2016/summaryzoom" xmlns:p173="http://schemas.microsoft.com/office/powerpoint/2017/3/main" xmlns:b="http://schemas.openxmlformats.org/officeDocument/2006/bibliography" xmlns:msink="http://schemas.microsoft.com/ink/2010/main" xmlns:cdr14="http://schemas.microsoft.com/office/drawing/2010/chartDrawing" xmlns:c15="http://schemas.microsoft.com/office/drawing/2012/chart" xmlns:cs="http://schemas.microsoft.com/office/drawing/2012/chartStyle" xmlns:ns30="http://www.w3.org/1998/Math/MathML" xmlns:ns31="http://www.w3.org/2003/InkML" xmlns:cx="http://schemas.microsoft.com/office/drawing/2014/chartex" xmlns:c16="http://schemas.microsoft.com/office/drawing/2014/chart" xmlns:dgm1611="http://schemas.microsoft.com/office/drawing/2016/11/diagram" xmlns:c173="http://schemas.microsoft.com/office/drawing/2017/03/chart" xmlns:am3d="http://schemas.microsoft.com/office/drawing/2017/model3d" xmlns:an18="http://schemas.microsoft.com/office/drawing/2018/animation" xmlns:anam3d="http://schemas.microsoft.com/office/drawing/2018/animation/model3d" xmlns:iact="http://schemas.microsoft.com/office/powerpoint/2014/inkAction" xmlns:thm15="http://schemas.microsoft.com/office/thememl/2012/main" xmlns:wetp="http://schemas.microsoft.com/office/webextensions/taskpanes/2010/11" xmlns:we="http://schemas.microsoft.com/office/webextensions/webextension/2010/11" xmlns:comp="http://schemas.openxmlformats.org/drawingml/2006/compatibility" xmlns:lc="http://schemas.openxmlformats.org/drawingml/2006/lockedCanvas" xmlns:p159="http://schemas.microsoft.com/office/powerpoint/2015/09/main" xmlns:p16="http://schemas.microsoft.com/office/powerpoint/2015/main" xmlns:p1710="http://schemas.microsoft.com/office/powerpoint/2017/10/main" xmlns:p184="http://schemas.microsoft.com/office/powerpoint/2018/4/main" xmlns:dgm14="http://schemas.microsoft.com/office/drawing/2010/diagram" xmlns:a15="http://schemas.microsoft.com/office/drawing/2012/main" xmlns:pic14="http://schemas.microsoft.com/office/drawing/2010/picture" xmlns:c16ac="http://schemas.microsoft.com/office/drawing/2014/chart/ac" xmlns:a16="http://schemas.microsoft.com/office/drawing/2014/main" xmlns:a1611="http://schemas.microsoft.com/office/drawing/2016/11/main" xmlns:dgm1612="http://schemas.microsoft.com/office/drawing/2016/12/diagram" xmlns:a16svg="http://schemas.microsoft.com/office/drawing/2016/SVG/main" xmlns:adec="http://schemas.microsoft.com/office/drawing/2017/decorative" xmlns:a18hc="http://schemas.microsoft.com/office/drawing/2018/hyperlinkcolor" xmlns:v="urn:schemas-microsoft-com:vml">
+<p:sld xmlns:r="http://schemas.openxmlformats.org/officeDocument/2006/relationships" xmlns:a="http://schemas.openxmlformats.org/drawingml/2006/main" xmlns:p="http://schemas.openxmlformats.org/presentationml/2006/main" xmlns:mc="http://schemas.openxmlformats.org/markup-compatibility/2006" xmlns:c="http://schemas.openxmlformats.org/drawingml/2006/chart" xmlns:cdr="http://schemas.openxmlformats.org/drawingml/2006/chartDrawing" xmlns:c14="http://schemas.microsoft.com/office/drawing/2007/8/2/chart" xmlns:dgm="http://schemas.openxmlformats.org/drawingml/2006/diagram" xmlns:pic="http://schemas.openxmlformats.org/drawingml/2006/picture" xmlns:wp="http://schemas.openxmlformats.org/drawingml/2006/wordprocessingDrawing" xmlns:wp14="http://schemas.microsoft.com/office/word/2010/wordprocessingDrawing" xmlns:xdr="http://schemas.openxmlformats.org/drawingml/2006/spreadsheetDrawing" xmlns:dsp="http://schemas.microsoft.com/office/drawing/2008/diagram" xmlns:p14="http://schemas.microsoft.com/office/powerpoint/2010/main" xmlns:a14="http://schemas.microsoft.com/office/drawing/2010/main" xmlns:p15="http://schemas.microsoft.com/office/powerpoint/2012/main" xmlns:p166="http://schemas.microsoft.com/office/powerpoint/2016/6/main" xmlns:a13cmd="http://schemas.microsoft.com/office/drawing/2013/main/command" xmlns:p13cmd="http://schemas.microsoft.com/office/powerpoint/2013/main/command" xmlns:p1510="http://schemas.microsoft.com/office/powerpoint/2015/10/main" xmlns:psez="http://schemas.microsoft.com/office/powerpoint/2016/sectionzoom" xmlns:pslz="http://schemas.microsoft.com/office/powerpoint/2016/slidezoom" xmlns:psuz="http://schemas.microsoft.com/office/powerpoint/2016/summaryzoom" xmlns:p173="http://schemas.microsoft.com/office/powerpoint/2017/3/main" xmlns:b="http://schemas.openxmlformats.org/officeDocument/2006/bibliography" xmlns:msink="http://schemas.microsoft.com/ink/2010/main" xmlns:cdr14="http://schemas.microsoft.com/office/drawing/2010/chartDrawing" xmlns:c15="http://schemas.microsoft.com/office/drawing/2012/chart" xmlns:cs="http://schemas.microsoft.com/office/drawing/2012/chartStyle" xmlns:ns30="http://www.w3.org/1998/Math/MathML" xmlns:ns31="http://www.w3.org/2003/InkML" xmlns:cx="http://schemas.microsoft.com/office/drawing/2014/chartex" xmlns:c16="http://schemas.microsoft.com/office/drawing/2014/chart" xmlns:dgm1611="http://schemas.microsoft.com/office/drawing/2016/11/diagram" xmlns:c173="http://schemas.microsoft.com/office/drawing/2017/03/chart" xmlns:am3d="http://schemas.microsoft.com/office/drawing/2017/model3d" xmlns:an18="http://schemas.microsoft.com/office/drawing/2018/animation" xmlns:anam3d="http://schemas.microsoft.com/office/drawing/2018/animation/model3d" xmlns:iact="http://schemas.microsoft.com/office/powerpoint/2014/inkAction" xmlns:thm15="http://schemas.microsoft.com/office/thememl/2012/main" xmlns:wetp="http://schemas.microsoft.com/office/webextensions/taskpanes/2010/11" xmlns:we="http://schemas.microsoft.com/office/webextensions/webextension/2010/11" xmlns:comp="http://schemas.openxmlformats.org/drawingml/2006/compatibility" xmlns:lc="http://schemas.openxmlformats.org/drawingml/2006/lockedCanvas" xmlns:p159="http://schemas.microsoft.com/office/powerpoint/2015/09/main" xmlns:p16="http://schemas.microsoft.com/office/powerpoint/2015/main" xmlns:p1710="http://schemas.microsoft.com/office/powerpoint/2017/10/main" xmlns:p184="http://schemas.microsoft.com/office/powerpoint/2018/4/main" xmlns:dgm14="http://schemas.microsoft.com/office/drawing/2010/diagram" xmlns:a15="http://schemas.microsoft.com/office/drawing/2012/main" xmlns:pic14="http://schemas.microsoft.com/office/drawing/2010/picture" xmlns:c16ac="http://schemas.microsoft.com/office/drawing/2014/chart/ac" xmlns:a16="http://schemas.microsoft.com/office/drawing/2014/main" xmlns:a1611="http://schemas.microsoft.com/office/drawing/2016/11/main" xmlns:dgm1612="http://schemas.microsoft.com/office/drawing/2016/12/diagram" xmlns:a16svg="http://schemas.microsoft.com/office/drawing/2016/SVG/main" xmlns:adec="http://schemas.microsoft.com/office/drawing/2017/decorative" xmlns:a18hc="http://schemas.microsoft.com/office/drawing/2018/hyperlinkcolor" xmlns:v="urn:schemas-microsoft-com:vml">
   <p:cSld>
     <p:spTree>
       <p:nvGrpSpPr>
@@ -7450,7 +8102,7 @@
       </p:grpSpPr>
       <p:sp>
         <p:nvSpPr>
-          <p:cNvPr id="1012" name="Clone_title_1012">
+          <p:cNvPr id="1025" name="Clone_title_1025">
             <a:extLst>
               <a:ext uri="{FF2B5EF4-FFF2-40B4-BE49-F238E27FC236}">
                 <a16:creationId id="{62A5B690-D47A-166B-0BEE-8CDC1BB59826}"/>
@@ -7488,7 +8140,7 @@
       </p:sp>
       <p:sp>
         <p:nvSpPr>
-          <p:cNvPr id="1013" name="Clone_obj_1013">
+          <p:cNvPr id="1026" name="Clone_obj_1026">
             <a:extLst>
               <a:ext uri="{FF2B5EF4-FFF2-40B4-BE49-F238E27FC236}">
                 <a16:creationId id="{D99B7A4E-1E73-5148-8EF4-5232DBEAFE0B}"/>
@@ -7557,13 +8209,87 @@
           </a:p>
         </p:txBody>
       </p:sp>
+      <p:sp>
+        <p:nvSpPr>
+          <p:cNvPr id="1027" name="Clone_ftr_1027">
+            <a:extLst>
+              <a:ext uri="{FF2B5EF4-FFF2-40B4-BE49-F238E27FC236}">
+                <a16:creationId id="{452CFE08-03FE-487B-8963-9FAD3049CFFA}"/>
+              </a:ext>
+            </a:extLst>
+          </p:cNvPr>
+          <p:cNvSpPr>
+            <a:spLocks noGrp="true"/>
+          </p:cNvSpPr>
+          <p:nvPr>
+            <p:ph type="ftr" sz="quarter" idx="11"/>
+          </p:nvPr>
+        </p:nvSpPr>
+        <p:spPr>
+          <a:xfrm>
+            <a:off x="758952" y="6400800"/>
+            <a:ext cx="6099048" cy="365125"/>
+          </a:xfrm>
+          <a:prstGeom prst="rect">
+            <a:avLst/>
+          </a:prstGeom>
+        </p:spPr>
+        <p:txBody>
+          <a:bodyPr rtlCol="false"/>
+          <a:lstStyle/>
+        </p:txBody>
+      </p:sp>
+      <p:sp>
+        <p:nvSpPr>
+          <p:cNvPr id="1028" name="Clone_dt_1028">
+            <a:extLst>
+              <a:ext uri="{FF2B5EF4-FFF2-40B4-BE49-F238E27FC236}">
+                <a16:creationId id="{B7862271-51F6-4122-9709-D279042F8846}"/>
+              </a:ext>
+            </a:extLst>
+          </p:cNvPr>
+          <p:cNvSpPr>
+            <a:spLocks noGrp="true"/>
+          </p:cNvSpPr>
+          <p:nvPr>
+            <p:ph type="dt" sz="half" idx="10"/>
+          </p:nvPr>
+        </p:nvSpPr>
+        <p:spPr/>
+        <p:txBody>
+          <a:bodyPr rtlCol="false"/>
+          <a:lstStyle/>
+        </p:txBody>
+      </p:sp>
+      <p:sp>
+        <p:nvSpPr>
+          <p:cNvPr id="1029" name="Clone_sldNum_1029">
+            <a:extLst>
+              <a:ext uri="{FF2B5EF4-FFF2-40B4-BE49-F238E27FC236}">
+                <a16:creationId id="{CA935A50-18AE-4CB1-BB10-1CBDD8A7C2C4}"/>
+              </a:ext>
+            </a:extLst>
+          </p:cNvPr>
+          <p:cNvSpPr>
+            <a:spLocks noGrp="true"/>
+          </p:cNvSpPr>
+          <p:nvPr>
+            <p:ph type="sldNum" sz="quarter" idx="12"/>
+          </p:nvPr>
+        </p:nvSpPr>
+        <p:spPr/>
+        <p:txBody>
+          <a:bodyPr rtlCol="false"/>
+          <a:lstStyle/>
+        </p:txBody>
+      </p:sp>
     </p:spTree>
   </p:cSld>
 </p:sld>
 </file>
 
 <file path=ppt/slides/slide8.xml><?xml version="1.0" encoding="utf-8"?>
-<p:sld xmlns:a="http://schemas.openxmlformats.org/drawingml/2006/main" xmlns:r="http://schemas.openxmlformats.org/officeDocument/2006/relationships" xmlns:p="http://schemas.openxmlformats.org/presentationml/2006/main" xmlns:mc="http://schemas.openxmlformats.org/markup-compatibility/2006" xmlns:c="http://schemas.openxmlformats.org/drawingml/2006/chart" xmlns:cdr="http://schemas.openxmlformats.org/drawingml/2006/chartDrawing" xmlns:c14="http://schemas.microsoft.com/office/drawing/2007/8/2/chart" xmlns:dgm="http://schemas.openxmlformats.org/drawingml/2006/diagram" xmlns:pic="http://schemas.openxmlformats.org/drawingml/2006/picture" xmlns:wp="http://schemas.openxmlformats.org/drawingml/2006/wordprocessingDrawing" xmlns:wp14="http://schemas.microsoft.com/office/word/2010/wordprocessingDrawing" xmlns:xdr="http://schemas.openxmlformats.org/drawingml/2006/spreadsheetDrawing" xmlns:dsp="http://schemas.microsoft.com/office/drawing/2008/diagram" xmlns:p14="http://schemas.microsoft.com/office/powerpoint/2010/main" xmlns:a14="http://schemas.microsoft.com/office/drawing/2010/main" xmlns:p15="http://schemas.microsoft.com/office/powerpoint/2012/main" xmlns:p166="http://schemas.microsoft.com/office/powerpoint/2016/6/main" xmlns:a13cmd="http://schemas.microsoft.com/office/drawing/2013/main/command" xmlns:p13cmd="http://schemas.microsoft.com/office/powerpoint/2013/main/command" xmlns:p1510="http://schemas.microsoft.com/office/powerpoint/2015/10/main" xmlns:psez="http://schemas.microsoft.com/office/powerpoint/2016/sectionzoom" xmlns:pslz="http://schemas.microsoft.com/office/powerpoint/2016/slidezoom" xmlns:psuz="http://schemas.microsoft.com/office/powerpoint/2016/summaryzoom" xmlns:p173="http://schemas.microsoft.com/office/powerpoint/2017/3/main" xmlns:b="http://schemas.openxmlformats.org/officeDocument/2006/bibliography" xmlns:msink="http://schemas.microsoft.com/ink/2010/main" xmlns:cdr14="http://schemas.microsoft.com/office/drawing/2010/chartDrawing" xmlns:c15="http://schemas.microsoft.com/office/drawing/2012/chart" xmlns:cs="http://schemas.microsoft.com/office/drawing/2012/chartStyle" xmlns:ns30="http://www.w3.org/1998/Math/MathML" xmlns:ns31="http://www.w3.org/2003/InkML" xmlns:cx="http://schemas.microsoft.com/office/drawing/2014/chartex" xmlns:c16="http://schemas.microsoft.com/office/drawing/2014/chart" xmlns:dgm1611="http://schemas.microsoft.com/office/drawing/2016/11/diagram" xmlns:c173="http://schemas.microsoft.com/office/drawing/2017/03/chart" xmlns:am3d="http://schemas.microsoft.com/office/drawing/2017/model3d" xmlns:an18="http://schemas.microsoft.com/office/drawing/2018/animation" xmlns:anam3d="http://schemas.microsoft.com/office/drawing/2018/animation/model3d" xmlns:iact="http://schemas.microsoft.com/office/powerpoint/2014/inkAction" xmlns:thm15="http://schemas.microsoft.com/office/thememl/2012/main" xmlns:wetp="http://schemas.microsoft.com/office/webextensions/taskpanes/2010/11" xmlns:we="http://schemas.microsoft.com/office/webextensions/webextension/2010/11" xmlns:comp="http://schemas.openxmlformats.org/drawingml/2006/compatibility" xmlns:lc="http://schemas.openxmlformats.org/drawingml/2006/lockedCanvas" xmlns:p159="http://schemas.microsoft.com/office/powerpoint/2015/09/main" xmlns:p16="http://schemas.microsoft.com/office/powerpoint/2015/main" xmlns:p1710="http://schemas.microsoft.com/office/powerpoint/2017/10/main" xmlns:p184="http://schemas.microsoft.com/office/powerpoint/2018/4/main" xmlns:dgm14="http://schemas.microsoft.com/office/drawing/2010/diagram" xmlns:a15="http://schemas.microsoft.com/office/drawing/2012/main" xmlns:pic14="http://schemas.microsoft.com/office/drawing/2010/picture" xmlns:c16ac="http://schemas.microsoft.com/office/drawing/2014/chart/ac" xmlns:a16="http://schemas.microsoft.com/office/drawing/2014/main" xmlns:a1611="http://schemas.microsoft.com/office/drawing/2016/11/main" xmlns:dgm1612="http://schemas.microsoft.com/office/drawing/2016/12/diagram" xmlns:a16svg="http://schemas.microsoft.com/office/drawing/2016/SVG/main" xmlns:adec="http://schemas.microsoft.com/office/drawing/2017/decorative" xmlns:a18hc="http://schemas.microsoft.com/office/drawing/2018/hyperlinkcolor" xmlns:v="urn:schemas-microsoft-com:vml">
+<p:sld xmlns:r="http://schemas.openxmlformats.org/officeDocument/2006/relationships" xmlns:a="http://schemas.openxmlformats.org/drawingml/2006/main" xmlns:p="http://schemas.openxmlformats.org/presentationml/2006/main" xmlns:mc="http://schemas.openxmlformats.org/markup-compatibility/2006" xmlns:c="http://schemas.openxmlformats.org/drawingml/2006/chart" xmlns:cdr="http://schemas.openxmlformats.org/drawingml/2006/chartDrawing" xmlns:c14="http://schemas.microsoft.com/office/drawing/2007/8/2/chart" xmlns:dgm="http://schemas.openxmlformats.org/drawingml/2006/diagram" xmlns:pic="http://schemas.openxmlformats.org/drawingml/2006/picture" xmlns:wp="http://schemas.openxmlformats.org/drawingml/2006/wordprocessingDrawing" xmlns:wp14="http://schemas.microsoft.com/office/word/2010/wordprocessingDrawing" xmlns:xdr="http://schemas.openxmlformats.org/drawingml/2006/spreadsheetDrawing" xmlns:dsp="http://schemas.microsoft.com/office/drawing/2008/diagram" xmlns:p14="http://schemas.microsoft.com/office/powerpoint/2010/main" xmlns:a14="http://schemas.microsoft.com/office/drawing/2010/main" xmlns:p15="http://schemas.microsoft.com/office/powerpoint/2012/main" xmlns:p166="http://schemas.microsoft.com/office/powerpoint/2016/6/main" xmlns:a13cmd="http://schemas.microsoft.com/office/drawing/2013/main/command" xmlns:p13cmd="http://schemas.microsoft.com/office/powerpoint/2013/main/command" xmlns:p1510="http://schemas.microsoft.com/office/powerpoint/2015/10/main" xmlns:psez="http://schemas.microsoft.com/office/powerpoint/2016/sectionzoom" xmlns:pslz="http://schemas.microsoft.com/office/powerpoint/2016/slidezoom" xmlns:psuz="http://schemas.microsoft.com/office/powerpoint/2016/summaryzoom" xmlns:p173="http://schemas.microsoft.com/office/powerpoint/2017/3/main" xmlns:b="http://schemas.openxmlformats.org/officeDocument/2006/bibliography" xmlns:msink="http://schemas.microsoft.com/ink/2010/main" xmlns:cdr14="http://schemas.microsoft.com/office/drawing/2010/chartDrawing" xmlns:c15="http://schemas.microsoft.com/office/drawing/2012/chart" xmlns:cs="http://schemas.microsoft.com/office/drawing/2012/chartStyle" xmlns:ns30="http://www.w3.org/1998/Math/MathML" xmlns:ns31="http://www.w3.org/2003/InkML" xmlns:cx="http://schemas.microsoft.com/office/drawing/2014/chartex" xmlns:c16="http://schemas.microsoft.com/office/drawing/2014/chart" xmlns:dgm1611="http://schemas.microsoft.com/office/drawing/2016/11/diagram" xmlns:c173="http://schemas.microsoft.com/office/drawing/2017/03/chart" xmlns:am3d="http://schemas.microsoft.com/office/drawing/2017/model3d" xmlns:an18="http://schemas.microsoft.com/office/drawing/2018/animation" xmlns:anam3d="http://schemas.microsoft.com/office/drawing/2018/animation/model3d" xmlns:iact="http://schemas.microsoft.com/office/powerpoint/2014/inkAction" xmlns:thm15="http://schemas.microsoft.com/office/thememl/2012/main" xmlns:wetp="http://schemas.microsoft.com/office/webextensions/taskpanes/2010/11" xmlns:we="http://schemas.microsoft.com/office/webextensions/webextension/2010/11" xmlns:comp="http://schemas.openxmlformats.org/drawingml/2006/compatibility" xmlns:lc="http://schemas.openxmlformats.org/drawingml/2006/lockedCanvas" xmlns:p159="http://schemas.microsoft.com/office/powerpoint/2015/09/main" xmlns:p16="http://schemas.microsoft.com/office/powerpoint/2015/main" xmlns:p1710="http://schemas.microsoft.com/office/powerpoint/2017/10/main" xmlns:p184="http://schemas.microsoft.com/office/powerpoint/2018/4/main" xmlns:dgm14="http://schemas.microsoft.com/office/drawing/2010/diagram" xmlns:a15="http://schemas.microsoft.com/office/drawing/2012/main" xmlns:pic14="http://schemas.microsoft.com/office/drawing/2010/picture" xmlns:c16ac="http://schemas.microsoft.com/office/drawing/2014/chart/ac" xmlns:a16="http://schemas.microsoft.com/office/drawing/2014/main" xmlns:a1611="http://schemas.microsoft.com/office/drawing/2016/11/main" xmlns:dgm1612="http://schemas.microsoft.com/office/drawing/2016/12/diagram" xmlns:a16svg="http://schemas.microsoft.com/office/drawing/2016/SVG/main" xmlns:adec="http://schemas.microsoft.com/office/drawing/2017/decorative" xmlns:a18hc="http://schemas.microsoft.com/office/drawing/2018/hyperlinkcolor" xmlns:v="urn:schemas-microsoft-com:vml">
   <p:cSld>
     <p:spTree>
       <p:nvGrpSpPr>
@@ -7581,7 +8307,7 @@
       </p:grpSpPr>
       <p:sp>
         <p:nvSpPr>
-          <p:cNvPr id="1014" name="Clone_title_1014">
+          <p:cNvPr id="1030" name="Clone_title_1030">
             <a:extLst>
               <a:ext uri="{FF2B5EF4-FFF2-40B4-BE49-F238E27FC236}">
                 <a16:creationId id="{DF86B59D-D895-19E7-B742-EE199B71841A}"/>
@@ -7619,7 +8345,7 @@
       </p:sp>
       <p:sp>
         <p:nvSpPr>
-          <p:cNvPr id="1015" name="Clone_obj_1015">
+          <p:cNvPr id="1031" name="Clone_obj_1031">
             <a:extLst>
               <a:ext uri="{FF2B5EF4-FFF2-40B4-BE49-F238E27FC236}">
                 <a16:creationId id="{A7544B75-76FD-A2AD-3444-313EF1771A4C}"/>
@@ -7691,7 +8417,7 @@
       </p:sp>
       <p:sp>
         <p:nvSpPr>
-          <p:cNvPr id="1016" name="Clone_obj_1016">
+          <p:cNvPr id="1032" name="Clone_obj_1032">
             <a:extLst>
               <a:ext uri="{FF2B5EF4-FFF2-40B4-BE49-F238E27FC236}">
                 <a16:creationId id="{0F9EB1B3-9B21-0E61-FC8A-659EDC63DAA1}"/>
@@ -7752,13 +8478,87 @@
           </a:p>
         </p:txBody>
       </p:sp>
+      <p:sp>
+        <p:nvSpPr>
+          <p:cNvPr id="1033" name="Clone_ftr_1033">
+            <a:extLst>
+              <a:ext uri="{FF2B5EF4-FFF2-40B4-BE49-F238E27FC236}">
+                <a16:creationId id="{452CFE08-03FE-487B-8963-9FAD3049CFFA}"/>
+              </a:ext>
+            </a:extLst>
+          </p:cNvPr>
+          <p:cNvSpPr>
+            <a:spLocks noGrp="true"/>
+          </p:cNvSpPr>
+          <p:nvPr>
+            <p:ph type="ftr" sz="quarter" idx="11"/>
+          </p:nvPr>
+        </p:nvSpPr>
+        <p:spPr>
+          <a:xfrm>
+            <a:off x="758952" y="6400800"/>
+            <a:ext cx="6099048" cy="365125"/>
+          </a:xfrm>
+          <a:prstGeom prst="rect">
+            <a:avLst/>
+          </a:prstGeom>
+        </p:spPr>
+        <p:txBody>
+          <a:bodyPr rtlCol="false"/>
+          <a:lstStyle/>
+        </p:txBody>
+      </p:sp>
+      <p:sp>
+        <p:nvSpPr>
+          <p:cNvPr id="1034" name="Clone_dt_1034">
+            <a:extLst>
+              <a:ext uri="{FF2B5EF4-FFF2-40B4-BE49-F238E27FC236}">
+                <a16:creationId id="{B7862271-51F6-4122-9709-D279042F8846}"/>
+              </a:ext>
+            </a:extLst>
+          </p:cNvPr>
+          <p:cNvSpPr>
+            <a:spLocks noGrp="true"/>
+          </p:cNvSpPr>
+          <p:nvPr>
+            <p:ph type="dt" sz="half" idx="10"/>
+          </p:nvPr>
+        </p:nvSpPr>
+        <p:spPr/>
+        <p:txBody>
+          <a:bodyPr rtlCol="false"/>
+          <a:lstStyle/>
+        </p:txBody>
+      </p:sp>
+      <p:sp>
+        <p:nvSpPr>
+          <p:cNvPr id="1035" name="Clone_sldNum_1035">
+            <a:extLst>
+              <a:ext uri="{FF2B5EF4-FFF2-40B4-BE49-F238E27FC236}">
+                <a16:creationId id="{CA935A50-18AE-4CB1-BB10-1CBDD8A7C2C4}"/>
+              </a:ext>
+            </a:extLst>
+          </p:cNvPr>
+          <p:cNvSpPr>
+            <a:spLocks noGrp="true"/>
+          </p:cNvSpPr>
+          <p:nvPr>
+            <p:ph type="sldNum" sz="quarter" idx="12"/>
+          </p:nvPr>
+        </p:nvSpPr>
+        <p:spPr/>
+        <p:txBody>
+          <a:bodyPr rtlCol="false"/>
+          <a:lstStyle/>
+        </p:txBody>
+      </p:sp>
     </p:spTree>
   </p:cSld>
 </p:sld>
 </file>
 
 <file path=ppt/slides/slide9.xml><?xml version="1.0" encoding="utf-8"?>
-<p:sld xmlns:a="http://schemas.openxmlformats.org/drawingml/2006/main" xmlns:r="http://schemas.openxmlformats.org/officeDocument/2006/relationships" xmlns:p="http://schemas.openxmlformats.org/presentationml/2006/main" xmlns:mc="http://schemas.openxmlformats.org/markup-compatibility/2006" xmlns:c="http://schemas.openxmlformats.org/drawingml/2006/chart" xmlns:cdr="http://schemas.openxmlformats.org/drawingml/2006/chartDrawing" xmlns:c14="http://schemas.microsoft.com/office/drawing/2007/8/2/chart" xmlns:dgm="http://schemas.openxmlformats.org/drawingml/2006/diagram" xmlns:pic="http://schemas.openxmlformats.org/drawingml/2006/picture" xmlns:wp="http://schemas.openxmlformats.org/drawingml/2006/wordprocessingDrawing" xmlns:wp14="http://schemas.microsoft.com/office/word/2010/wordprocessingDrawing" xmlns:xdr="http://schemas.openxmlformats.org/drawingml/2006/spreadsheetDrawing" xmlns:dsp="http://schemas.microsoft.com/office/drawing/2008/diagram" xmlns:p14="http://schemas.microsoft.com/office/powerpoint/2010/main" xmlns:a14="http://schemas.microsoft.com/office/drawing/2010/main" xmlns:p15="http://schemas.microsoft.com/office/powerpoint/2012/main" xmlns:p166="http://schemas.microsoft.com/office/powerpoint/2016/6/main" xmlns:a13cmd="http://schemas.microsoft.com/office/drawing/2013/main/command" xmlns:p13cmd="http://schemas.microsoft.com/office/powerpoint/2013/main/command" xmlns:p1510="http://schemas.microsoft.com/office/powerpoint/2015/10/main" xmlns:psez="http://schemas.microsoft.com/office/powerpoint/2016/sectionzoom" xmlns:pslz="http://schemas.microsoft.com/office/powerpoint/2016/slidezoom" xmlns:psuz="http://schemas.microsoft.com/office/powerpoint/2016/summaryzoom" xmlns:p173="http://schemas.microsoft.com/office/powerpoint/2017/3/main" xmlns:b="http://schemas.openxmlformats.org/officeDocument/2006/bibliography" xmlns:msink="http://schemas.microsoft.com/ink/2010/main" xmlns:cdr14="http://schemas.microsoft.com/office/drawing/2010/chartDrawing" xmlns:c15="http://schemas.microsoft.com/office/drawing/2012/chart" xmlns:cs="http://schemas.microsoft.com/office/drawing/2012/chartStyle" xmlns:ns30="http://www.w3.org/1998/Math/MathML" xmlns:ns31="http://www.w3.org/2003/InkML" xmlns:cx="http://schemas.microsoft.com/office/drawing/2014/chartex" xmlns:c16="http://schemas.microsoft.com/office/drawing/2014/chart" xmlns:dgm1611="http://schemas.microsoft.com/office/drawing/2016/11/diagram" xmlns:c173="http://schemas.microsoft.com/office/drawing/2017/03/chart" xmlns:am3d="http://schemas.microsoft.com/office/drawing/2017/model3d" xmlns:an18="http://schemas.microsoft.com/office/drawing/2018/animation" xmlns:anam3d="http://schemas.microsoft.com/office/drawing/2018/animation/model3d" xmlns:iact="http://schemas.microsoft.com/office/powerpoint/2014/inkAction" xmlns:thm15="http://schemas.microsoft.com/office/thememl/2012/main" xmlns:wetp="http://schemas.microsoft.com/office/webextensions/taskpanes/2010/11" xmlns:we="http://schemas.microsoft.com/office/webextensions/webextension/2010/11" xmlns:comp="http://schemas.openxmlformats.org/drawingml/2006/compatibility" xmlns:lc="http://schemas.openxmlformats.org/drawingml/2006/lockedCanvas" xmlns:p159="http://schemas.microsoft.com/office/powerpoint/2015/09/main" xmlns:p16="http://schemas.microsoft.com/office/powerpoint/2015/main" xmlns:p1710="http://schemas.microsoft.com/office/powerpoint/2017/10/main" xmlns:p184="http://schemas.microsoft.com/office/powerpoint/2018/4/main" xmlns:dgm14="http://schemas.microsoft.com/office/drawing/2010/diagram" xmlns:a15="http://schemas.microsoft.com/office/drawing/2012/main" xmlns:pic14="http://schemas.microsoft.com/office/drawing/2010/picture" xmlns:c16ac="http://schemas.microsoft.com/office/drawing/2014/chart/ac" xmlns:a16="http://schemas.microsoft.com/office/drawing/2014/main" xmlns:a1611="http://schemas.microsoft.com/office/drawing/2016/11/main" xmlns:dgm1612="http://schemas.microsoft.com/office/drawing/2016/12/diagram" xmlns:a16svg="http://schemas.microsoft.com/office/drawing/2016/SVG/main" xmlns:adec="http://schemas.microsoft.com/office/drawing/2017/decorative" xmlns:a18hc="http://schemas.microsoft.com/office/drawing/2018/hyperlinkcolor" xmlns:v="urn:schemas-microsoft-com:vml">
+<p:sld xmlns:r="http://schemas.openxmlformats.org/officeDocument/2006/relationships" xmlns:a="http://schemas.openxmlformats.org/drawingml/2006/main" xmlns:p="http://schemas.openxmlformats.org/presentationml/2006/main" xmlns:mc="http://schemas.openxmlformats.org/markup-compatibility/2006" xmlns:c="http://schemas.openxmlformats.org/drawingml/2006/chart" xmlns:cdr="http://schemas.openxmlformats.org/drawingml/2006/chartDrawing" xmlns:c14="http://schemas.microsoft.com/office/drawing/2007/8/2/chart" xmlns:dgm="http://schemas.openxmlformats.org/drawingml/2006/diagram" xmlns:pic="http://schemas.openxmlformats.org/drawingml/2006/picture" xmlns:wp="http://schemas.openxmlformats.org/drawingml/2006/wordprocessingDrawing" xmlns:wp14="http://schemas.microsoft.com/office/word/2010/wordprocessingDrawing" xmlns:xdr="http://schemas.openxmlformats.org/drawingml/2006/spreadsheetDrawing" xmlns:dsp="http://schemas.microsoft.com/office/drawing/2008/diagram" xmlns:p14="http://schemas.microsoft.com/office/powerpoint/2010/main" xmlns:a14="http://schemas.microsoft.com/office/drawing/2010/main" xmlns:p15="http://schemas.microsoft.com/office/powerpoint/2012/main" xmlns:p166="http://schemas.microsoft.com/office/powerpoint/2016/6/main" xmlns:a13cmd="http://schemas.microsoft.com/office/drawing/2013/main/command" xmlns:p13cmd="http://schemas.microsoft.com/office/powerpoint/2013/main/command" xmlns:p1510="http://schemas.microsoft.com/office/powerpoint/2015/10/main" xmlns:psez="http://schemas.microsoft.com/office/powerpoint/2016/sectionzoom" xmlns:pslz="http://schemas.microsoft.com/office/powerpoint/2016/slidezoom" xmlns:psuz="http://schemas.microsoft.com/office/powerpoint/2016/summaryzoom" xmlns:p173="http://schemas.microsoft.com/office/powerpoint/2017/3/main" xmlns:b="http://schemas.openxmlformats.org/officeDocument/2006/bibliography" xmlns:msink="http://schemas.microsoft.com/ink/2010/main" xmlns:cdr14="http://schemas.microsoft.com/office/drawing/2010/chartDrawing" xmlns:c15="http://schemas.microsoft.com/office/drawing/2012/chart" xmlns:cs="http://schemas.microsoft.com/office/drawing/2012/chartStyle" xmlns:ns30="http://www.w3.org/1998/Math/MathML" xmlns:ns31="http://www.w3.org/2003/InkML" xmlns:cx="http://schemas.microsoft.com/office/drawing/2014/chartex" xmlns:c16="http://schemas.microsoft.com/office/drawing/2014/chart" xmlns:dgm1611="http://schemas.microsoft.com/office/drawing/2016/11/diagram" xmlns:c173="http://schemas.microsoft.com/office/drawing/2017/03/chart" xmlns:am3d="http://schemas.microsoft.com/office/drawing/2017/model3d" xmlns:an18="http://schemas.microsoft.com/office/drawing/2018/animation" xmlns:anam3d="http://schemas.microsoft.com/office/drawing/2018/animation/model3d" xmlns:iact="http://schemas.microsoft.com/office/powerpoint/2014/inkAction" xmlns:thm15="http://schemas.microsoft.com/office/thememl/2012/main" xmlns:wetp="http://schemas.microsoft.com/office/webextensions/taskpanes/2010/11" xmlns:we="http://schemas.microsoft.com/office/webextensions/webextension/2010/11" xmlns:comp="http://schemas.openxmlformats.org/drawingml/2006/compatibility" xmlns:lc="http://schemas.openxmlformats.org/drawingml/2006/lockedCanvas" xmlns:p159="http://schemas.microsoft.com/office/powerpoint/2015/09/main" xmlns:p16="http://schemas.microsoft.com/office/powerpoint/2015/main" xmlns:p1710="http://schemas.microsoft.com/office/powerpoint/2017/10/main" xmlns:p184="http://schemas.microsoft.com/office/powerpoint/2018/4/main" xmlns:dgm14="http://schemas.microsoft.com/office/drawing/2010/diagram" xmlns:a15="http://schemas.microsoft.com/office/drawing/2012/main" xmlns:pic14="http://schemas.microsoft.com/office/drawing/2010/picture" xmlns:c16ac="http://schemas.microsoft.com/office/drawing/2014/chart/ac" xmlns:a16="http://schemas.microsoft.com/office/drawing/2014/main" xmlns:a1611="http://schemas.microsoft.com/office/drawing/2016/11/main" xmlns:dgm1612="http://schemas.microsoft.com/office/drawing/2016/12/diagram" xmlns:a16svg="http://schemas.microsoft.com/office/drawing/2016/SVG/main" xmlns:adec="http://schemas.microsoft.com/office/drawing/2017/decorative" xmlns:a18hc="http://schemas.microsoft.com/office/drawing/2018/hyperlinkcolor" xmlns:v="urn:schemas-microsoft-com:vml">
   <p:cSld>
     <p:spTree>
       <p:nvGrpSpPr>
@@ -7776,7 +8576,7 @@
       </p:grpSpPr>
       <p:sp>
         <p:nvSpPr>
-          <p:cNvPr id="1017" name="Clone_title_1017">
+          <p:cNvPr id="1036" name="Clone_title_1036">
             <a:extLst>
               <a:ext uri="{FF2B5EF4-FFF2-40B4-BE49-F238E27FC236}">
                 <a16:creationId id="{85C320B4-1D6E-D480-A44F-13517DFF7CF5}"/>
@@ -7814,7 +8614,7 @@
       </p:sp>
       <p:sp>
         <p:nvSpPr>
-          <p:cNvPr id="1018" name="Clone_subTitle_1018">
+          <p:cNvPr id="1037" name="Clone_subTitle_1037">
             <a:extLst>
               <a:ext uri="{FF2B5EF4-FFF2-40B4-BE49-F238E27FC236}">
                 <a16:creationId id="{E8F46CAD-D4FF-4BBC-937E-CBBD034A180B}"/>
@@ -7847,6 +8647,42 @@
           <a:p>
             <a:r>
               <a:t>Sous-titre ou date de la présentation</a:t>
+            </a:r>
+          </a:p>
+        </p:txBody>
+      </p:sp>
+      <p:sp>
+        <p:nvSpPr>
+          <p:cNvPr id="1038" name="Clone_pic_1038">
+            <a:extLst>
+              <a:ext uri="{FF2B5EF4-FFF2-40B4-BE49-F238E27FC236}">
+                <a16:creationId id="{A2750E7C-D01B-4533-A0B8-2E7EF2B168DC}"/>
+              </a:ext>
+            </a:extLst>
+          </p:cNvPr>
+          <p:cNvSpPr>
+            <a:spLocks noGrp="true"/>
+          </p:cNvSpPr>
+          <p:nvPr>
+            <p:ph type="pic" sz="quarter" idx="13"/>
+          </p:nvPr>
+        </p:nvSpPr>
+        <p:spPr>
+          <a:xfrm>
+            <a:off x="758952" y="758952"/>
+            <a:ext cx="6099048" cy="5340096"/>
+          </a:xfrm>
+          <a:solidFill>
+            <a:schemeClr val="accent6"/>
+          </a:solidFill>
+        </p:spPr>
+        <p:txBody>
+          <a:bodyPr rtlCol="false"/>
+          <a:lstStyle/>
+          <a:p>
+            <a:r>
+              <a:t>[Zone PIC]
+Cliquez pour insérer</a:t>
             </a:r>
           </a:p>
         </p:txBody>

--- a/output_all_layouts_test.pptx
+++ b/output_all_layouts_test.pptx
@@ -11,19 +11,19 @@
     <p:handoutMasterId r:id="rId19"/>
   </p:handoutMasterIdLst>
   <p:sldIdLst>
-    <p:sldId id="621631229" r:id="rId25"/>
-    <p:sldId id="1486394313" r:id="rId26"/>
-    <p:sldId id="2018886973" r:id="rId27"/>
-    <p:sldId id="126258396" r:id="rId28"/>
-    <p:sldId id="1483529483" r:id="rId29"/>
-    <p:sldId id="101465862" r:id="rId30"/>
-    <p:sldId id="1634043779" r:id="rId31"/>
-    <p:sldId id="73670988" r:id="rId32"/>
-    <p:sldId id="541877913" r:id="rId33"/>
-    <p:sldId id="1013699113" r:id="rId34"/>
-    <p:sldId id="218120213" r:id="rId35"/>
-    <p:sldId id="1510239803" r:id="rId36"/>
-    <p:sldId id="30499243" r:id="rId37"/>
+    <p:sldId id="656705085" r:id="rId25"/>
+    <p:sldId id="741856291" r:id="rId26"/>
+    <p:sldId id="799847757" r:id="rId27"/>
+    <p:sldId id="364566195" r:id="rId28"/>
+    <p:sldId id="1662533129" r:id="rId29"/>
+    <p:sldId id="1581036533" r:id="rId30"/>
+    <p:sldId id="381151813" r:id="rId31"/>
+    <p:sldId id="1303578249" r:id="rId32"/>
+    <p:sldId id="473714938" r:id="rId33"/>
+    <p:sldId id="1169594766" r:id="rId34"/>
+    <p:sldId id="1996309851" r:id="rId35"/>
+    <p:sldId id="503169296" r:id="rId36"/>
+    <p:sldId id="472604707" r:id="rId37"/>
   </p:sldIdLst>
   <p:sldSz cx="12192000" cy="6858000"/>
   <p:notesSz cx="6858000" cy="9144000"/>
@@ -6236,12 +6236,6 @@
         <p:txBody>
           <a:bodyPr rtlCol="false"/>
           <a:lstStyle/>
-          <a:p>
-            <a:r>
-              <a:t>[Zone PIC]
-Cliquez pour insérer</a:t>
-            </a:r>
-          </a:p>
         </p:txBody>
       </p:sp>
       <p:sp>
@@ -6508,12 +6502,6 @@
         <p:txBody>
           <a:bodyPr rtlCol="false"/>
           <a:lstStyle/>
-          <a:p>
-            <a:r>
-              <a:t>[Zone PIC]
-Cliquez pour insérer</a:t>
-            </a:r>
-          </a:p>
         </p:txBody>
       </p:sp>
     </p:spTree>
@@ -7187,12 +7175,6 @@
         <p:txBody>
           <a:bodyPr rtlCol="false"/>
           <a:lstStyle/>
-          <a:p>
-            <a:r>
-              <a:t>[Zone PIC]
-Cliquez pour insérer</a:t>
-            </a:r>
-          </a:p>
         </p:txBody>
       </p:sp>
       <p:sp>
@@ -7357,12 +7339,6 @@
         <p:txBody>
           <a:bodyPr rtlCol="false"/>
           <a:lstStyle/>
-          <a:p>
-            <a:r>
-              <a:t>[Zone PIC]
-Cliquez pour insérer</a:t>
-            </a:r>
-          </a:p>
         </p:txBody>
       </p:sp>
       <p:sp>
@@ -7542,12 +7518,6 @@
         <p:txBody>
           <a:bodyPr rtlCol="false"/>
           <a:lstStyle/>
-          <a:p>
-            <a:r>
-              <a:t>[Zone PIC]
-Cliquez pour insérer</a:t>
-            </a:r>
-          </a:p>
         </p:txBody>
       </p:sp>
     </p:spTree>
@@ -7638,12 +7608,6 @@
         <p:txBody>
           <a:bodyPr rtlCol="false"/>
           <a:lstStyle/>
-          <a:p>
-            <a:r>
-              <a:t>[Zone PIC]
-Cliquez pour insérer</a:t>
-            </a:r>
-          </a:p>
         </p:txBody>
       </p:sp>
     </p:spTree>
@@ -8679,12 +8643,6 @@
         <p:txBody>
           <a:bodyPr rtlCol="false"/>
           <a:lstStyle/>
-          <a:p>
-            <a:r>
-              <a:t>[Zone PIC]
-Cliquez pour insérer</a:t>
-            </a:r>
-          </a:p>
         </p:txBody>
       </p:sp>
     </p:spTree>

--- a/output_all_layouts_test.pptx
+++ b/output_all_layouts_test.pptx
@@ -1,6 +1,6 @@
 
 <file path=ppt/presentation.xml><?xml version="1.0" encoding="utf-8"?>
-<p:presentation xmlns:r="http://schemas.openxmlformats.org/officeDocument/2006/relationships" xmlns:a="http://schemas.openxmlformats.org/drawingml/2006/main" xmlns:p="http://schemas.openxmlformats.org/presentationml/2006/main" xmlns:mc="http://schemas.openxmlformats.org/markup-compatibility/2006" xmlns:c="http://schemas.openxmlformats.org/drawingml/2006/chart" xmlns:cdr="http://schemas.openxmlformats.org/drawingml/2006/chartDrawing" xmlns:c14="http://schemas.microsoft.com/office/drawing/2007/8/2/chart" xmlns:dgm="http://schemas.openxmlformats.org/drawingml/2006/diagram" xmlns:pic="http://schemas.openxmlformats.org/drawingml/2006/picture" xmlns:wp="http://schemas.openxmlformats.org/drawingml/2006/wordprocessingDrawing" xmlns:wp14="http://schemas.microsoft.com/office/word/2010/wordprocessingDrawing" xmlns:xdr="http://schemas.openxmlformats.org/drawingml/2006/spreadsheetDrawing" xmlns:dsp="http://schemas.microsoft.com/office/drawing/2008/diagram" xmlns:p14="http://schemas.microsoft.com/office/powerpoint/2010/main" xmlns:a14="http://schemas.microsoft.com/office/drawing/2010/main" xmlns:p15="http://schemas.microsoft.com/office/powerpoint/2012/main" xmlns:p166="http://schemas.microsoft.com/office/powerpoint/2016/6/main" xmlns:a13cmd="http://schemas.microsoft.com/office/drawing/2013/main/command" xmlns:p13cmd="http://schemas.microsoft.com/office/powerpoint/2013/main/command" xmlns:p1510="http://schemas.microsoft.com/office/powerpoint/2015/10/main" xmlns:psez="http://schemas.microsoft.com/office/powerpoint/2016/sectionzoom" xmlns:pslz="http://schemas.microsoft.com/office/powerpoint/2016/slidezoom" xmlns:psuz="http://schemas.microsoft.com/office/powerpoint/2016/summaryzoom" xmlns:p173="http://schemas.microsoft.com/office/powerpoint/2017/3/main" xmlns:b="http://schemas.openxmlformats.org/officeDocument/2006/bibliography" xmlns:msink="http://schemas.microsoft.com/ink/2010/main" xmlns:cdr14="http://schemas.microsoft.com/office/drawing/2010/chartDrawing" xmlns:c15="http://schemas.microsoft.com/office/drawing/2012/chart" xmlns:cs="http://schemas.microsoft.com/office/drawing/2012/chartStyle" xmlns:ns30="http://www.w3.org/1998/Math/MathML" xmlns:ns31="http://www.w3.org/2003/InkML" xmlns:cx="http://schemas.microsoft.com/office/drawing/2014/chartex" xmlns:c16="http://schemas.microsoft.com/office/drawing/2014/chart" xmlns:dgm1611="http://schemas.microsoft.com/office/drawing/2016/11/diagram" xmlns:c173="http://schemas.microsoft.com/office/drawing/2017/03/chart" xmlns:am3d="http://schemas.microsoft.com/office/drawing/2017/model3d" xmlns:an18="http://schemas.microsoft.com/office/drawing/2018/animation" xmlns:anam3d="http://schemas.microsoft.com/office/drawing/2018/animation/model3d" xmlns:iact="http://schemas.microsoft.com/office/powerpoint/2014/inkAction" xmlns:thm15="http://schemas.microsoft.com/office/thememl/2012/main" xmlns:wetp="http://schemas.microsoft.com/office/webextensions/taskpanes/2010/11" xmlns:we="http://schemas.microsoft.com/office/webextensions/webextension/2010/11" xmlns:comp="http://schemas.openxmlformats.org/drawingml/2006/compatibility" xmlns:lc="http://schemas.openxmlformats.org/drawingml/2006/lockedCanvas" xmlns:p159="http://schemas.microsoft.com/office/powerpoint/2015/09/main" xmlns:p16="http://schemas.microsoft.com/office/powerpoint/2015/main" xmlns:p1710="http://schemas.microsoft.com/office/powerpoint/2017/10/main" xmlns:p184="http://schemas.microsoft.com/office/powerpoint/2018/4/main" xmlns:dgm14="http://schemas.microsoft.com/office/drawing/2010/diagram" xmlns:a15="http://schemas.microsoft.com/office/drawing/2012/main" xmlns:pic14="http://schemas.microsoft.com/office/drawing/2010/picture" xmlns:c16ac="http://schemas.microsoft.com/office/drawing/2014/chart/ac" xmlns:a16="http://schemas.microsoft.com/office/drawing/2014/main" xmlns:a1611="http://schemas.microsoft.com/office/drawing/2016/11/main" xmlns:dgm1612="http://schemas.microsoft.com/office/drawing/2016/12/diagram" xmlns:a16svg="http://schemas.microsoft.com/office/drawing/2016/SVG/main" xmlns:adec="http://schemas.microsoft.com/office/drawing/2017/decorative" xmlns:a18hc="http://schemas.microsoft.com/office/drawing/2018/hyperlinkcolor" showSpecialPlsOnTitleSld="false" saveSubsetFonts="true" autoCompressPictures="false">
+<p:presentation xmlns:a="http://schemas.openxmlformats.org/drawingml/2006/main" xmlns:r="http://schemas.openxmlformats.org/officeDocument/2006/relationships" xmlns:p="http://schemas.openxmlformats.org/presentationml/2006/main" xmlns:mc="http://schemas.openxmlformats.org/markup-compatibility/2006" xmlns:c="http://schemas.openxmlformats.org/drawingml/2006/chart" xmlns:cdr="http://schemas.openxmlformats.org/drawingml/2006/chartDrawing" xmlns:c14="http://schemas.microsoft.com/office/drawing/2007/8/2/chart" xmlns:dgm="http://schemas.openxmlformats.org/drawingml/2006/diagram" xmlns:pic="http://schemas.openxmlformats.org/drawingml/2006/picture" xmlns:wp="http://schemas.openxmlformats.org/drawingml/2006/wordprocessingDrawing" xmlns:wp14="http://schemas.microsoft.com/office/word/2010/wordprocessingDrawing" xmlns:xdr="http://schemas.openxmlformats.org/drawingml/2006/spreadsheetDrawing" xmlns:dsp="http://schemas.microsoft.com/office/drawing/2008/diagram" xmlns:p14="http://schemas.microsoft.com/office/powerpoint/2010/main" xmlns:a14="http://schemas.microsoft.com/office/drawing/2010/main" xmlns:p15="http://schemas.microsoft.com/office/powerpoint/2012/main" xmlns:p166="http://schemas.microsoft.com/office/powerpoint/2016/6/main" xmlns:a13cmd="http://schemas.microsoft.com/office/drawing/2013/main/command" xmlns:p13cmd="http://schemas.microsoft.com/office/powerpoint/2013/main/command" xmlns:p1510="http://schemas.microsoft.com/office/powerpoint/2015/10/main" xmlns:psez="http://schemas.microsoft.com/office/powerpoint/2016/sectionzoom" xmlns:pslz="http://schemas.microsoft.com/office/powerpoint/2016/slidezoom" xmlns:psuz="http://schemas.microsoft.com/office/powerpoint/2016/summaryzoom" xmlns:p173="http://schemas.microsoft.com/office/powerpoint/2017/3/main" xmlns:b="http://schemas.openxmlformats.org/officeDocument/2006/bibliography" xmlns:msink="http://schemas.microsoft.com/ink/2010/main" xmlns:cdr14="http://schemas.microsoft.com/office/drawing/2010/chartDrawing" xmlns:c15="http://schemas.microsoft.com/office/drawing/2012/chart" xmlns:cs="http://schemas.microsoft.com/office/drawing/2012/chartStyle" xmlns:ns30="http://www.w3.org/1998/Math/MathML" xmlns:ns31="http://www.w3.org/2003/InkML" xmlns:cx="http://schemas.microsoft.com/office/drawing/2014/chartex" xmlns:c16="http://schemas.microsoft.com/office/drawing/2014/chart" xmlns:dgm1611="http://schemas.microsoft.com/office/drawing/2016/11/diagram" xmlns:c173="http://schemas.microsoft.com/office/drawing/2017/03/chart" xmlns:am3d="http://schemas.microsoft.com/office/drawing/2017/model3d" xmlns:an18="http://schemas.microsoft.com/office/drawing/2018/animation" xmlns:anam3d="http://schemas.microsoft.com/office/drawing/2018/animation/model3d" xmlns:iact="http://schemas.microsoft.com/office/powerpoint/2014/inkAction" xmlns:thm15="http://schemas.microsoft.com/office/thememl/2012/main" xmlns:wetp="http://schemas.microsoft.com/office/webextensions/taskpanes/2010/11" xmlns:we="http://schemas.microsoft.com/office/webextensions/webextension/2010/11" xmlns:comp="http://schemas.openxmlformats.org/drawingml/2006/compatibility" xmlns:lc="http://schemas.openxmlformats.org/drawingml/2006/lockedCanvas" xmlns:p159="http://schemas.microsoft.com/office/powerpoint/2015/09/main" xmlns:p16="http://schemas.microsoft.com/office/powerpoint/2015/main" xmlns:p1710="http://schemas.microsoft.com/office/powerpoint/2017/10/main" xmlns:p184="http://schemas.microsoft.com/office/powerpoint/2018/4/main" xmlns:dgm14="http://schemas.microsoft.com/office/drawing/2010/diagram" xmlns:a15="http://schemas.microsoft.com/office/drawing/2012/main" xmlns:pic14="http://schemas.microsoft.com/office/drawing/2010/picture" xmlns:c16ac="http://schemas.microsoft.com/office/drawing/2014/chart/ac" xmlns:a16="http://schemas.microsoft.com/office/drawing/2014/main" xmlns:a1611="http://schemas.microsoft.com/office/drawing/2016/11/main" xmlns:dgm1612="http://schemas.microsoft.com/office/drawing/2016/12/diagram" xmlns:a16svg="http://schemas.microsoft.com/office/drawing/2016/SVG/main" xmlns:adec="http://schemas.microsoft.com/office/drawing/2017/decorative" xmlns:a18hc="http://schemas.microsoft.com/office/drawing/2018/hyperlinkcolor" showSpecialPlsOnTitleSld="false" saveSubsetFonts="true" autoCompressPictures="false">
   <p:sldMasterIdLst>
     <p:sldMasterId id="2147483671" r:id="rId4"/>
   </p:sldMasterIdLst>
@@ -11,19 +11,19 @@
     <p:handoutMasterId r:id="rId19"/>
   </p:handoutMasterIdLst>
   <p:sldIdLst>
-    <p:sldId id="656705085" r:id="rId25"/>
-    <p:sldId id="741856291" r:id="rId26"/>
-    <p:sldId id="799847757" r:id="rId27"/>
-    <p:sldId id="364566195" r:id="rId28"/>
-    <p:sldId id="1662533129" r:id="rId29"/>
-    <p:sldId id="1581036533" r:id="rId30"/>
-    <p:sldId id="381151813" r:id="rId31"/>
-    <p:sldId id="1303578249" r:id="rId32"/>
-    <p:sldId id="473714938" r:id="rId33"/>
-    <p:sldId id="1169594766" r:id="rId34"/>
-    <p:sldId id="1996309851" r:id="rId35"/>
-    <p:sldId id="503169296" r:id="rId36"/>
-    <p:sldId id="472604707" r:id="rId37"/>
+    <p:sldId id="244187261" r:id="rId25"/>
+    <p:sldId id="2109787023" r:id="rId26"/>
+    <p:sldId id="353187899" r:id="rId27"/>
+    <p:sldId id="477208535" r:id="rId28"/>
+    <p:sldId id="1599734418" r:id="rId29"/>
+    <p:sldId id="242041936" r:id="rId30"/>
+    <p:sldId id="1839054937" r:id="rId31"/>
+    <p:sldId id="1963078185" r:id="rId32"/>
+    <p:sldId id="86125689" r:id="rId33"/>
+    <p:sldId id="2060755256" r:id="rId34"/>
+    <p:sldId id="107504740" r:id="rId35"/>
+    <p:sldId id="2053197380" r:id="rId36"/>
+    <p:sldId id="1627786433" r:id="rId37"/>
   </p:sldIdLst>
   <p:sldSz cx="12192000" cy="6858000"/>
   <p:notesSz cx="6858000" cy="9144000"/>
@@ -6154,7 +6154,7 @@
 </file>
 
 <file path=ppt/slides/slide1.xml><?xml version="1.0" encoding="utf-8"?>
-<p:sld xmlns:r="http://schemas.openxmlformats.org/officeDocument/2006/relationships" xmlns:a="http://schemas.openxmlformats.org/drawingml/2006/main" xmlns:p="http://schemas.openxmlformats.org/presentationml/2006/main" xmlns:mc="http://schemas.openxmlformats.org/markup-compatibility/2006" xmlns:c="http://schemas.openxmlformats.org/drawingml/2006/chart" xmlns:cdr="http://schemas.openxmlformats.org/drawingml/2006/chartDrawing" xmlns:c14="http://schemas.microsoft.com/office/drawing/2007/8/2/chart" xmlns:dgm="http://schemas.openxmlformats.org/drawingml/2006/diagram" xmlns:pic="http://schemas.openxmlformats.org/drawingml/2006/picture" xmlns:wp="http://schemas.openxmlformats.org/drawingml/2006/wordprocessingDrawing" xmlns:wp14="http://schemas.microsoft.com/office/word/2010/wordprocessingDrawing" xmlns:xdr="http://schemas.openxmlformats.org/drawingml/2006/spreadsheetDrawing" xmlns:dsp="http://schemas.microsoft.com/office/drawing/2008/diagram" xmlns:p14="http://schemas.microsoft.com/office/powerpoint/2010/main" xmlns:a14="http://schemas.microsoft.com/office/drawing/2010/main" xmlns:p15="http://schemas.microsoft.com/office/powerpoint/2012/main" xmlns:p166="http://schemas.microsoft.com/office/powerpoint/2016/6/main" xmlns:a13cmd="http://schemas.microsoft.com/office/drawing/2013/main/command" xmlns:p13cmd="http://schemas.microsoft.com/office/powerpoint/2013/main/command" xmlns:p1510="http://schemas.microsoft.com/office/powerpoint/2015/10/main" xmlns:psez="http://schemas.microsoft.com/office/powerpoint/2016/sectionzoom" xmlns:pslz="http://schemas.microsoft.com/office/powerpoint/2016/slidezoom" xmlns:psuz="http://schemas.microsoft.com/office/powerpoint/2016/summaryzoom" xmlns:p173="http://schemas.microsoft.com/office/powerpoint/2017/3/main" xmlns:b="http://schemas.openxmlformats.org/officeDocument/2006/bibliography" xmlns:msink="http://schemas.microsoft.com/ink/2010/main" xmlns:cdr14="http://schemas.microsoft.com/office/drawing/2010/chartDrawing" xmlns:c15="http://schemas.microsoft.com/office/drawing/2012/chart" xmlns:cs="http://schemas.microsoft.com/office/drawing/2012/chartStyle" xmlns:ns30="http://www.w3.org/1998/Math/MathML" xmlns:ns31="http://www.w3.org/2003/InkML" xmlns:cx="http://schemas.microsoft.com/office/drawing/2014/chartex" xmlns:c16="http://schemas.microsoft.com/office/drawing/2014/chart" xmlns:dgm1611="http://schemas.microsoft.com/office/drawing/2016/11/diagram" xmlns:c173="http://schemas.microsoft.com/office/drawing/2017/03/chart" xmlns:am3d="http://schemas.microsoft.com/office/drawing/2017/model3d" xmlns:an18="http://schemas.microsoft.com/office/drawing/2018/animation" xmlns:anam3d="http://schemas.microsoft.com/office/drawing/2018/animation/model3d" xmlns:iact="http://schemas.microsoft.com/office/powerpoint/2014/inkAction" xmlns:thm15="http://schemas.microsoft.com/office/thememl/2012/main" xmlns:wetp="http://schemas.microsoft.com/office/webextensions/taskpanes/2010/11" xmlns:we="http://schemas.microsoft.com/office/webextensions/webextension/2010/11" xmlns:comp="http://schemas.openxmlformats.org/drawingml/2006/compatibility" xmlns:lc="http://schemas.openxmlformats.org/drawingml/2006/lockedCanvas" xmlns:p159="http://schemas.microsoft.com/office/powerpoint/2015/09/main" xmlns:p16="http://schemas.microsoft.com/office/powerpoint/2015/main" xmlns:p1710="http://schemas.microsoft.com/office/powerpoint/2017/10/main" xmlns:p184="http://schemas.microsoft.com/office/powerpoint/2018/4/main" xmlns:dgm14="http://schemas.microsoft.com/office/drawing/2010/diagram" xmlns:a15="http://schemas.microsoft.com/office/drawing/2012/main" xmlns:pic14="http://schemas.microsoft.com/office/drawing/2010/picture" xmlns:c16ac="http://schemas.microsoft.com/office/drawing/2014/chart/ac" xmlns:a16="http://schemas.microsoft.com/office/drawing/2014/main" xmlns:a1611="http://schemas.microsoft.com/office/drawing/2016/11/main" xmlns:dgm1612="http://schemas.microsoft.com/office/drawing/2016/12/diagram" xmlns:a16svg="http://schemas.microsoft.com/office/drawing/2016/SVG/main" xmlns:adec="http://schemas.microsoft.com/office/drawing/2017/decorative" xmlns:a18hc="http://schemas.microsoft.com/office/drawing/2018/hyperlinkcolor" xmlns:v="urn:schemas-microsoft-com:vml">
+<p:sld xmlns:a="http://schemas.openxmlformats.org/drawingml/2006/main" xmlns:r="http://schemas.openxmlformats.org/officeDocument/2006/relationships" xmlns:p="http://schemas.openxmlformats.org/presentationml/2006/main" xmlns:mc="http://schemas.openxmlformats.org/markup-compatibility/2006" xmlns:c="http://schemas.openxmlformats.org/drawingml/2006/chart" xmlns:cdr="http://schemas.openxmlformats.org/drawingml/2006/chartDrawing" xmlns:c14="http://schemas.microsoft.com/office/drawing/2007/8/2/chart" xmlns:dgm="http://schemas.openxmlformats.org/drawingml/2006/diagram" xmlns:pic="http://schemas.openxmlformats.org/drawingml/2006/picture" xmlns:wp="http://schemas.openxmlformats.org/drawingml/2006/wordprocessingDrawing" xmlns:wp14="http://schemas.microsoft.com/office/word/2010/wordprocessingDrawing" xmlns:xdr="http://schemas.openxmlformats.org/drawingml/2006/spreadsheetDrawing" xmlns:dsp="http://schemas.microsoft.com/office/drawing/2008/diagram" xmlns:p14="http://schemas.microsoft.com/office/powerpoint/2010/main" xmlns:a14="http://schemas.microsoft.com/office/drawing/2010/main" xmlns:p15="http://schemas.microsoft.com/office/powerpoint/2012/main" xmlns:p166="http://schemas.microsoft.com/office/powerpoint/2016/6/main" xmlns:a13cmd="http://schemas.microsoft.com/office/drawing/2013/main/command" xmlns:p13cmd="http://schemas.microsoft.com/office/powerpoint/2013/main/command" xmlns:p1510="http://schemas.microsoft.com/office/powerpoint/2015/10/main" xmlns:psez="http://schemas.microsoft.com/office/powerpoint/2016/sectionzoom" xmlns:pslz="http://schemas.microsoft.com/office/powerpoint/2016/slidezoom" xmlns:psuz="http://schemas.microsoft.com/office/powerpoint/2016/summaryzoom" xmlns:p173="http://schemas.microsoft.com/office/powerpoint/2017/3/main" xmlns:b="http://schemas.openxmlformats.org/officeDocument/2006/bibliography" xmlns:msink="http://schemas.microsoft.com/ink/2010/main" xmlns:cdr14="http://schemas.microsoft.com/office/drawing/2010/chartDrawing" xmlns:c15="http://schemas.microsoft.com/office/drawing/2012/chart" xmlns:cs="http://schemas.microsoft.com/office/drawing/2012/chartStyle" xmlns:ns30="http://www.w3.org/1998/Math/MathML" xmlns:ns31="http://www.w3.org/2003/InkML" xmlns:cx="http://schemas.microsoft.com/office/drawing/2014/chartex" xmlns:c16="http://schemas.microsoft.com/office/drawing/2014/chart" xmlns:dgm1611="http://schemas.microsoft.com/office/drawing/2016/11/diagram" xmlns:c173="http://schemas.microsoft.com/office/drawing/2017/03/chart" xmlns:am3d="http://schemas.microsoft.com/office/drawing/2017/model3d" xmlns:an18="http://schemas.microsoft.com/office/drawing/2018/animation" xmlns:anam3d="http://schemas.microsoft.com/office/drawing/2018/animation/model3d" xmlns:iact="http://schemas.microsoft.com/office/powerpoint/2014/inkAction" xmlns:thm15="http://schemas.microsoft.com/office/thememl/2012/main" xmlns:wetp="http://schemas.microsoft.com/office/webextensions/taskpanes/2010/11" xmlns:we="http://schemas.microsoft.com/office/webextensions/webextension/2010/11" xmlns:comp="http://schemas.openxmlformats.org/drawingml/2006/compatibility" xmlns:lc="http://schemas.openxmlformats.org/drawingml/2006/lockedCanvas" xmlns:p159="http://schemas.microsoft.com/office/powerpoint/2015/09/main" xmlns:p16="http://schemas.microsoft.com/office/powerpoint/2015/main" xmlns:p1710="http://schemas.microsoft.com/office/powerpoint/2017/10/main" xmlns:p184="http://schemas.microsoft.com/office/powerpoint/2018/4/main" xmlns:dgm14="http://schemas.microsoft.com/office/drawing/2010/diagram" xmlns:a15="http://schemas.microsoft.com/office/drawing/2012/main" xmlns:pic14="http://schemas.microsoft.com/office/drawing/2010/picture" xmlns:c16ac="http://schemas.microsoft.com/office/drawing/2014/chart/ac" xmlns:a16="http://schemas.microsoft.com/office/drawing/2014/main" xmlns:a1611="http://schemas.microsoft.com/office/drawing/2016/11/main" xmlns:dgm1612="http://schemas.microsoft.com/office/drawing/2016/12/diagram" xmlns:a16svg="http://schemas.microsoft.com/office/drawing/2016/SVG/main" xmlns:adec="http://schemas.microsoft.com/office/drawing/2017/decorative" xmlns:a18hc="http://schemas.microsoft.com/office/drawing/2018/hyperlinkcolor" xmlns:v="urn:schemas-microsoft-com:vml">
   <p:cSld>
     <p:spTree>
       <p:nvGrpSpPr>
@@ -6381,7 +6381,7 @@
 </file>
 
 <file path=ppt/slides/slide10.xml><?xml version="1.0" encoding="utf-8"?>
-<p:sld xmlns:r="http://schemas.openxmlformats.org/officeDocument/2006/relationships" xmlns:a="http://schemas.openxmlformats.org/drawingml/2006/main" xmlns:p="http://schemas.openxmlformats.org/presentationml/2006/main" xmlns:mc="http://schemas.openxmlformats.org/markup-compatibility/2006" xmlns:c="http://schemas.openxmlformats.org/drawingml/2006/chart" xmlns:cdr="http://schemas.openxmlformats.org/drawingml/2006/chartDrawing" xmlns:c14="http://schemas.microsoft.com/office/drawing/2007/8/2/chart" xmlns:dgm="http://schemas.openxmlformats.org/drawingml/2006/diagram" xmlns:pic="http://schemas.openxmlformats.org/drawingml/2006/picture" xmlns:wp="http://schemas.openxmlformats.org/drawingml/2006/wordprocessingDrawing" xmlns:wp14="http://schemas.microsoft.com/office/word/2010/wordprocessingDrawing" xmlns:xdr="http://schemas.openxmlformats.org/drawingml/2006/spreadsheetDrawing" xmlns:dsp="http://schemas.microsoft.com/office/drawing/2008/diagram" xmlns:p14="http://schemas.microsoft.com/office/powerpoint/2010/main" xmlns:a14="http://schemas.microsoft.com/office/drawing/2010/main" xmlns:p15="http://schemas.microsoft.com/office/powerpoint/2012/main" xmlns:p166="http://schemas.microsoft.com/office/powerpoint/2016/6/main" xmlns:a13cmd="http://schemas.microsoft.com/office/drawing/2013/main/command" xmlns:p13cmd="http://schemas.microsoft.com/office/powerpoint/2013/main/command" xmlns:p1510="http://schemas.microsoft.com/office/powerpoint/2015/10/main" xmlns:psez="http://schemas.microsoft.com/office/powerpoint/2016/sectionzoom" xmlns:pslz="http://schemas.microsoft.com/office/powerpoint/2016/slidezoom" xmlns:psuz="http://schemas.microsoft.com/office/powerpoint/2016/summaryzoom" xmlns:p173="http://schemas.microsoft.com/office/powerpoint/2017/3/main" xmlns:b="http://schemas.openxmlformats.org/officeDocument/2006/bibliography" xmlns:msink="http://schemas.microsoft.com/ink/2010/main" xmlns:cdr14="http://schemas.microsoft.com/office/drawing/2010/chartDrawing" xmlns:c15="http://schemas.microsoft.com/office/drawing/2012/chart" xmlns:cs="http://schemas.microsoft.com/office/drawing/2012/chartStyle" xmlns:ns30="http://www.w3.org/1998/Math/MathML" xmlns:ns31="http://www.w3.org/2003/InkML" xmlns:cx="http://schemas.microsoft.com/office/drawing/2014/chartex" xmlns:c16="http://schemas.microsoft.com/office/drawing/2014/chart" xmlns:dgm1611="http://schemas.microsoft.com/office/drawing/2016/11/diagram" xmlns:c173="http://schemas.microsoft.com/office/drawing/2017/03/chart" xmlns:am3d="http://schemas.microsoft.com/office/drawing/2017/model3d" xmlns:an18="http://schemas.microsoft.com/office/drawing/2018/animation" xmlns:anam3d="http://schemas.microsoft.com/office/drawing/2018/animation/model3d" xmlns:iact="http://schemas.microsoft.com/office/powerpoint/2014/inkAction" xmlns:thm15="http://schemas.microsoft.com/office/thememl/2012/main" xmlns:wetp="http://schemas.microsoft.com/office/webextensions/taskpanes/2010/11" xmlns:we="http://schemas.microsoft.com/office/webextensions/webextension/2010/11" xmlns:comp="http://schemas.openxmlformats.org/drawingml/2006/compatibility" xmlns:lc="http://schemas.openxmlformats.org/drawingml/2006/lockedCanvas" xmlns:p159="http://schemas.microsoft.com/office/powerpoint/2015/09/main" xmlns:p16="http://schemas.microsoft.com/office/powerpoint/2015/main" xmlns:p1710="http://schemas.microsoft.com/office/powerpoint/2017/10/main" xmlns:p184="http://schemas.microsoft.com/office/powerpoint/2018/4/main" xmlns:dgm14="http://schemas.microsoft.com/office/drawing/2010/diagram" xmlns:a15="http://schemas.microsoft.com/office/drawing/2012/main" xmlns:pic14="http://schemas.microsoft.com/office/drawing/2010/picture" xmlns:c16ac="http://schemas.microsoft.com/office/drawing/2014/chart/ac" xmlns:a16="http://schemas.microsoft.com/office/drawing/2014/main" xmlns:a1611="http://schemas.microsoft.com/office/drawing/2016/11/main" xmlns:dgm1612="http://schemas.microsoft.com/office/drawing/2016/12/diagram" xmlns:a16svg="http://schemas.microsoft.com/office/drawing/2016/SVG/main" xmlns:adec="http://schemas.microsoft.com/office/drawing/2017/decorative" xmlns:a18hc="http://schemas.microsoft.com/office/drawing/2018/hyperlinkcolor" xmlns:v="urn:schemas-microsoft-com:vml">
+<p:sld xmlns:a="http://schemas.openxmlformats.org/drawingml/2006/main" xmlns:r="http://schemas.openxmlformats.org/officeDocument/2006/relationships" xmlns:p="http://schemas.openxmlformats.org/presentationml/2006/main" xmlns:mc="http://schemas.openxmlformats.org/markup-compatibility/2006" xmlns:c="http://schemas.openxmlformats.org/drawingml/2006/chart" xmlns:cdr="http://schemas.openxmlformats.org/drawingml/2006/chartDrawing" xmlns:c14="http://schemas.microsoft.com/office/drawing/2007/8/2/chart" xmlns:dgm="http://schemas.openxmlformats.org/drawingml/2006/diagram" xmlns:pic="http://schemas.openxmlformats.org/drawingml/2006/picture" xmlns:wp="http://schemas.openxmlformats.org/drawingml/2006/wordprocessingDrawing" xmlns:wp14="http://schemas.microsoft.com/office/word/2010/wordprocessingDrawing" xmlns:xdr="http://schemas.openxmlformats.org/drawingml/2006/spreadsheetDrawing" xmlns:dsp="http://schemas.microsoft.com/office/drawing/2008/diagram" xmlns:p14="http://schemas.microsoft.com/office/powerpoint/2010/main" xmlns:a14="http://schemas.microsoft.com/office/drawing/2010/main" xmlns:p15="http://schemas.microsoft.com/office/powerpoint/2012/main" xmlns:p166="http://schemas.microsoft.com/office/powerpoint/2016/6/main" xmlns:a13cmd="http://schemas.microsoft.com/office/drawing/2013/main/command" xmlns:p13cmd="http://schemas.microsoft.com/office/powerpoint/2013/main/command" xmlns:p1510="http://schemas.microsoft.com/office/powerpoint/2015/10/main" xmlns:psez="http://schemas.microsoft.com/office/powerpoint/2016/sectionzoom" xmlns:pslz="http://schemas.microsoft.com/office/powerpoint/2016/slidezoom" xmlns:psuz="http://schemas.microsoft.com/office/powerpoint/2016/summaryzoom" xmlns:p173="http://schemas.microsoft.com/office/powerpoint/2017/3/main" xmlns:b="http://schemas.openxmlformats.org/officeDocument/2006/bibliography" xmlns:msink="http://schemas.microsoft.com/ink/2010/main" xmlns:cdr14="http://schemas.microsoft.com/office/drawing/2010/chartDrawing" xmlns:c15="http://schemas.microsoft.com/office/drawing/2012/chart" xmlns:cs="http://schemas.microsoft.com/office/drawing/2012/chartStyle" xmlns:ns30="http://www.w3.org/1998/Math/MathML" xmlns:ns31="http://www.w3.org/2003/InkML" xmlns:cx="http://schemas.microsoft.com/office/drawing/2014/chartex" xmlns:c16="http://schemas.microsoft.com/office/drawing/2014/chart" xmlns:dgm1611="http://schemas.microsoft.com/office/drawing/2016/11/diagram" xmlns:c173="http://schemas.microsoft.com/office/drawing/2017/03/chart" xmlns:am3d="http://schemas.microsoft.com/office/drawing/2017/model3d" xmlns:an18="http://schemas.microsoft.com/office/drawing/2018/animation" xmlns:anam3d="http://schemas.microsoft.com/office/drawing/2018/animation/model3d" xmlns:iact="http://schemas.microsoft.com/office/powerpoint/2014/inkAction" xmlns:thm15="http://schemas.microsoft.com/office/thememl/2012/main" xmlns:wetp="http://schemas.microsoft.com/office/webextensions/taskpanes/2010/11" xmlns:we="http://schemas.microsoft.com/office/webextensions/webextension/2010/11" xmlns:comp="http://schemas.openxmlformats.org/drawingml/2006/compatibility" xmlns:lc="http://schemas.openxmlformats.org/drawingml/2006/lockedCanvas" xmlns:p159="http://schemas.microsoft.com/office/powerpoint/2015/09/main" xmlns:p16="http://schemas.microsoft.com/office/powerpoint/2015/main" xmlns:p1710="http://schemas.microsoft.com/office/powerpoint/2017/10/main" xmlns:p184="http://schemas.microsoft.com/office/powerpoint/2018/4/main" xmlns:dgm14="http://schemas.microsoft.com/office/drawing/2010/diagram" xmlns:a15="http://schemas.microsoft.com/office/drawing/2012/main" xmlns:pic14="http://schemas.microsoft.com/office/drawing/2010/picture" xmlns:c16ac="http://schemas.microsoft.com/office/drawing/2014/chart/ac" xmlns:a16="http://schemas.microsoft.com/office/drawing/2014/main" xmlns:a1611="http://schemas.microsoft.com/office/drawing/2016/11/main" xmlns:dgm1612="http://schemas.microsoft.com/office/drawing/2016/12/diagram" xmlns:a16svg="http://schemas.microsoft.com/office/drawing/2016/SVG/main" xmlns:adec="http://schemas.microsoft.com/office/drawing/2017/decorative" xmlns:a18hc="http://schemas.microsoft.com/office/drawing/2018/hyperlinkcolor" xmlns:v="urn:schemas-microsoft-com:vml">
   <p:cSld>
     <p:spTree>
       <p:nvGrpSpPr>
@@ -6510,7 +6510,7 @@
 </file>
 
 <file path=ppt/slides/slide11.xml><?xml version="1.0" encoding="utf-8"?>
-<p:sld xmlns:r="http://schemas.openxmlformats.org/officeDocument/2006/relationships" xmlns:a="http://schemas.openxmlformats.org/drawingml/2006/main" xmlns:p="http://schemas.openxmlformats.org/presentationml/2006/main" xmlns:mc="http://schemas.openxmlformats.org/markup-compatibility/2006" xmlns:c="http://schemas.openxmlformats.org/drawingml/2006/chart" xmlns:cdr="http://schemas.openxmlformats.org/drawingml/2006/chartDrawing" xmlns:c14="http://schemas.microsoft.com/office/drawing/2007/8/2/chart" xmlns:dgm="http://schemas.openxmlformats.org/drawingml/2006/diagram" xmlns:pic="http://schemas.openxmlformats.org/drawingml/2006/picture" xmlns:wp="http://schemas.openxmlformats.org/drawingml/2006/wordprocessingDrawing" xmlns:wp14="http://schemas.microsoft.com/office/word/2010/wordprocessingDrawing" xmlns:xdr="http://schemas.openxmlformats.org/drawingml/2006/spreadsheetDrawing" xmlns:dsp="http://schemas.microsoft.com/office/drawing/2008/diagram" xmlns:p14="http://schemas.microsoft.com/office/powerpoint/2010/main" xmlns:a14="http://schemas.microsoft.com/office/drawing/2010/main" xmlns:p15="http://schemas.microsoft.com/office/powerpoint/2012/main" xmlns:p166="http://schemas.microsoft.com/office/powerpoint/2016/6/main" xmlns:a13cmd="http://schemas.microsoft.com/office/drawing/2013/main/command" xmlns:p13cmd="http://schemas.microsoft.com/office/powerpoint/2013/main/command" xmlns:p1510="http://schemas.microsoft.com/office/powerpoint/2015/10/main" xmlns:psez="http://schemas.microsoft.com/office/powerpoint/2016/sectionzoom" xmlns:pslz="http://schemas.microsoft.com/office/powerpoint/2016/slidezoom" xmlns:psuz="http://schemas.microsoft.com/office/powerpoint/2016/summaryzoom" xmlns:p173="http://schemas.microsoft.com/office/powerpoint/2017/3/main" xmlns:b="http://schemas.openxmlformats.org/officeDocument/2006/bibliography" xmlns:msink="http://schemas.microsoft.com/ink/2010/main" xmlns:cdr14="http://schemas.microsoft.com/office/drawing/2010/chartDrawing" xmlns:c15="http://schemas.microsoft.com/office/drawing/2012/chart" xmlns:cs="http://schemas.microsoft.com/office/drawing/2012/chartStyle" xmlns:ns30="http://www.w3.org/1998/Math/MathML" xmlns:ns31="http://www.w3.org/2003/InkML" xmlns:cx="http://schemas.microsoft.com/office/drawing/2014/chartex" xmlns:c16="http://schemas.microsoft.com/office/drawing/2014/chart" xmlns:dgm1611="http://schemas.microsoft.com/office/drawing/2016/11/diagram" xmlns:c173="http://schemas.microsoft.com/office/drawing/2017/03/chart" xmlns:am3d="http://schemas.microsoft.com/office/drawing/2017/model3d" xmlns:an18="http://schemas.microsoft.com/office/drawing/2018/animation" xmlns:anam3d="http://schemas.microsoft.com/office/drawing/2018/animation/model3d" xmlns:iact="http://schemas.microsoft.com/office/powerpoint/2014/inkAction" xmlns:thm15="http://schemas.microsoft.com/office/thememl/2012/main" xmlns:wetp="http://schemas.microsoft.com/office/webextensions/taskpanes/2010/11" xmlns:we="http://schemas.microsoft.com/office/webextensions/webextension/2010/11" xmlns:comp="http://schemas.openxmlformats.org/drawingml/2006/compatibility" xmlns:lc="http://schemas.openxmlformats.org/drawingml/2006/lockedCanvas" xmlns:p159="http://schemas.microsoft.com/office/powerpoint/2015/09/main" xmlns:p16="http://schemas.microsoft.com/office/powerpoint/2015/main" xmlns:p1710="http://schemas.microsoft.com/office/powerpoint/2017/10/main" xmlns:p184="http://schemas.microsoft.com/office/powerpoint/2018/4/main" xmlns:dgm14="http://schemas.microsoft.com/office/drawing/2010/diagram" xmlns:a15="http://schemas.microsoft.com/office/drawing/2012/main" xmlns:pic14="http://schemas.microsoft.com/office/drawing/2010/picture" xmlns:c16ac="http://schemas.microsoft.com/office/drawing/2014/chart/ac" xmlns:a16="http://schemas.microsoft.com/office/drawing/2014/main" xmlns:a1611="http://schemas.microsoft.com/office/drawing/2016/11/main" xmlns:dgm1612="http://schemas.microsoft.com/office/drawing/2016/12/diagram" xmlns:a16svg="http://schemas.microsoft.com/office/drawing/2016/SVG/main" xmlns:adec="http://schemas.microsoft.com/office/drawing/2017/decorative" xmlns:a18hc="http://schemas.microsoft.com/office/drawing/2018/hyperlinkcolor" xmlns:v="urn:schemas-microsoft-com:vml">
+<p:sld xmlns:a="http://schemas.openxmlformats.org/drawingml/2006/main" xmlns:r="http://schemas.openxmlformats.org/officeDocument/2006/relationships" xmlns:p="http://schemas.openxmlformats.org/presentationml/2006/main" xmlns:mc="http://schemas.openxmlformats.org/markup-compatibility/2006" xmlns:c="http://schemas.openxmlformats.org/drawingml/2006/chart" xmlns:cdr="http://schemas.openxmlformats.org/drawingml/2006/chartDrawing" xmlns:c14="http://schemas.microsoft.com/office/drawing/2007/8/2/chart" xmlns:dgm="http://schemas.openxmlformats.org/drawingml/2006/diagram" xmlns:pic="http://schemas.openxmlformats.org/drawingml/2006/picture" xmlns:wp="http://schemas.openxmlformats.org/drawingml/2006/wordprocessingDrawing" xmlns:wp14="http://schemas.microsoft.com/office/word/2010/wordprocessingDrawing" xmlns:xdr="http://schemas.openxmlformats.org/drawingml/2006/spreadsheetDrawing" xmlns:dsp="http://schemas.microsoft.com/office/drawing/2008/diagram" xmlns:p14="http://schemas.microsoft.com/office/powerpoint/2010/main" xmlns:a14="http://schemas.microsoft.com/office/drawing/2010/main" xmlns:p15="http://schemas.microsoft.com/office/powerpoint/2012/main" xmlns:p166="http://schemas.microsoft.com/office/powerpoint/2016/6/main" xmlns:a13cmd="http://schemas.microsoft.com/office/drawing/2013/main/command" xmlns:p13cmd="http://schemas.microsoft.com/office/powerpoint/2013/main/command" xmlns:p1510="http://schemas.microsoft.com/office/powerpoint/2015/10/main" xmlns:psez="http://schemas.microsoft.com/office/powerpoint/2016/sectionzoom" xmlns:pslz="http://schemas.microsoft.com/office/powerpoint/2016/slidezoom" xmlns:psuz="http://schemas.microsoft.com/office/powerpoint/2016/summaryzoom" xmlns:p173="http://schemas.microsoft.com/office/powerpoint/2017/3/main" xmlns:b="http://schemas.openxmlformats.org/officeDocument/2006/bibliography" xmlns:msink="http://schemas.microsoft.com/ink/2010/main" xmlns:cdr14="http://schemas.microsoft.com/office/drawing/2010/chartDrawing" xmlns:c15="http://schemas.microsoft.com/office/drawing/2012/chart" xmlns:cs="http://schemas.microsoft.com/office/drawing/2012/chartStyle" xmlns:ns30="http://www.w3.org/1998/Math/MathML" xmlns:ns31="http://www.w3.org/2003/InkML" xmlns:cx="http://schemas.microsoft.com/office/drawing/2014/chartex" xmlns:c16="http://schemas.microsoft.com/office/drawing/2014/chart" xmlns:dgm1611="http://schemas.microsoft.com/office/drawing/2016/11/diagram" xmlns:c173="http://schemas.microsoft.com/office/drawing/2017/03/chart" xmlns:am3d="http://schemas.microsoft.com/office/drawing/2017/model3d" xmlns:an18="http://schemas.microsoft.com/office/drawing/2018/animation" xmlns:anam3d="http://schemas.microsoft.com/office/drawing/2018/animation/model3d" xmlns:iact="http://schemas.microsoft.com/office/powerpoint/2014/inkAction" xmlns:thm15="http://schemas.microsoft.com/office/thememl/2012/main" xmlns:wetp="http://schemas.microsoft.com/office/webextensions/taskpanes/2010/11" xmlns:we="http://schemas.microsoft.com/office/webextensions/webextension/2010/11" xmlns:comp="http://schemas.openxmlformats.org/drawingml/2006/compatibility" xmlns:lc="http://schemas.openxmlformats.org/drawingml/2006/lockedCanvas" xmlns:p159="http://schemas.microsoft.com/office/powerpoint/2015/09/main" xmlns:p16="http://schemas.microsoft.com/office/powerpoint/2015/main" xmlns:p1710="http://schemas.microsoft.com/office/powerpoint/2017/10/main" xmlns:p184="http://schemas.microsoft.com/office/powerpoint/2018/4/main" xmlns:dgm14="http://schemas.microsoft.com/office/drawing/2010/diagram" xmlns:a15="http://schemas.microsoft.com/office/drawing/2012/main" xmlns:pic14="http://schemas.microsoft.com/office/drawing/2010/picture" xmlns:c16ac="http://schemas.microsoft.com/office/drawing/2014/chart/ac" xmlns:a16="http://schemas.microsoft.com/office/drawing/2014/main" xmlns:a1611="http://schemas.microsoft.com/office/drawing/2016/11/main" xmlns:dgm1612="http://schemas.microsoft.com/office/drawing/2016/12/diagram" xmlns:a16svg="http://schemas.microsoft.com/office/drawing/2016/SVG/main" xmlns:adec="http://schemas.microsoft.com/office/drawing/2017/decorative" xmlns:a18hc="http://schemas.microsoft.com/office/drawing/2018/hyperlinkcolor" xmlns:v="urn:schemas-microsoft-com:vml">
   <p:cSld>
     <p:spTree>
       <p:nvGrpSpPr>
@@ -6770,7 +6770,7 @@
 </file>
 
 <file path=ppt/slides/slide12.xml><?xml version="1.0" encoding="utf-8"?>
-<p:sld xmlns:r="http://schemas.openxmlformats.org/officeDocument/2006/relationships" xmlns:a="http://schemas.openxmlformats.org/drawingml/2006/main" xmlns:p="http://schemas.openxmlformats.org/presentationml/2006/main" xmlns:mc="http://schemas.openxmlformats.org/markup-compatibility/2006" xmlns:c="http://schemas.openxmlformats.org/drawingml/2006/chart" xmlns:cdr="http://schemas.openxmlformats.org/drawingml/2006/chartDrawing" xmlns:c14="http://schemas.microsoft.com/office/drawing/2007/8/2/chart" xmlns:dgm="http://schemas.openxmlformats.org/drawingml/2006/diagram" xmlns:pic="http://schemas.openxmlformats.org/drawingml/2006/picture" xmlns:wp="http://schemas.openxmlformats.org/drawingml/2006/wordprocessingDrawing" xmlns:wp14="http://schemas.microsoft.com/office/word/2010/wordprocessingDrawing" xmlns:xdr="http://schemas.openxmlformats.org/drawingml/2006/spreadsheetDrawing" xmlns:dsp="http://schemas.microsoft.com/office/drawing/2008/diagram" xmlns:p14="http://schemas.microsoft.com/office/powerpoint/2010/main" xmlns:a14="http://schemas.microsoft.com/office/drawing/2010/main" xmlns:p15="http://schemas.microsoft.com/office/powerpoint/2012/main" xmlns:p166="http://schemas.microsoft.com/office/powerpoint/2016/6/main" xmlns:a13cmd="http://schemas.microsoft.com/office/drawing/2013/main/command" xmlns:p13cmd="http://schemas.microsoft.com/office/powerpoint/2013/main/command" xmlns:p1510="http://schemas.microsoft.com/office/powerpoint/2015/10/main" xmlns:psez="http://schemas.microsoft.com/office/powerpoint/2016/sectionzoom" xmlns:pslz="http://schemas.microsoft.com/office/powerpoint/2016/slidezoom" xmlns:psuz="http://schemas.microsoft.com/office/powerpoint/2016/summaryzoom" xmlns:p173="http://schemas.microsoft.com/office/powerpoint/2017/3/main" xmlns:b="http://schemas.openxmlformats.org/officeDocument/2006/bibliography" xmlns:msink="http://schemas.microsoft.com/ink/2010/main" xmlns:cdr14="http://schemas.microsoft.com/office/drawing/2010/chartDrawing" xmlns:c15="http://schemas.microsoft.com/office/drawing/2012/chart" xmlns:cs="http://schemas.microsoft.com/office/drawing/2012/chartStyle" xmlns:ns30="http://www.w3.org/1998/Math/MathML" xmlns:ns31="http://www.w3.org/2003/InkML" xmlns:cx="http://schemas.microsoft.com/office/drawing/2014/chartex" xmlns:c16="http://schemas.microsoft.com/office/drawing/2014/chart" xmlns:dgm1611="http://schemas.microsoft.com/office/drawing/2016/11/diagram" xmlns:c173="http://schemas.microsoft.com/office/drawing/2017/03/chart" xmlns:am3d="http://schemas.microsoft.com/office/drawing/2017/model3d" xmlns:an18="http://schemas.microsoft.com/office/drawing/2018/animation" xmlns:anam3d="http://schemas.microsoft.com/office/drawing/2018/animation/model3d" xmlns:iact="http://schemas.microsoft.com/office/powerpoint/2014/inkAction" xmlns:thm15="http://schemas.microsoft.com/office/thememl/2012/main" xmlns:wetp="http://schemas.microsoft.com/office/webextensions/taskpanes/2010/11" xmlns:we="http://schemas.microsoft.com/office/webextensions/webextension/2010/11" xmlns:comp="http://schemas.openxmlformats.org/drawingml/2006/compatibility" xmlns:lc="http://schemas.openxmlformats.org/drawingml/2006/lockedCanvas" xmlns:p159="http://schemas.microsoft.com/office/powerpoint/2015/09/main" xmlns:p16="http://schemas.microsoft.com/office/powerpoint/2015/main" xmlns:p1710="http://schemas.microsoft.com/office/powerpoint/2017/10/main" xmlns:p184="http://schemas.microsoft.com/office/powerpoint/2018/4/main" xmlns:dgm14="http://schemas.microsoft.com/office/drawing/2010/diagram" xmlns:a15="http://schemas.microsoft.com/office/drawing/2012/main" xmlns:pic14="http://schemas.microsoft.com/office/drawing/2010/picture" xmlns:c16ac="http://schemas.microsoft.com/office/drawing/2014/chart/ac" xmlns:a16="http://schemas.microsoft.com/office/drawing/2014/main" xmlns:a1611="http://schemas.microsoft.com/office/drawing/2016/11/main" xmlns:dgm1612="http://schemas.microsoft.com/office/drawing/2016/12/diagram" xmlns:a16svg="http://schemas.microsoft.com/office/drawing/2016/SVG/main" xmlns:adec="http://schemas.microsoft.com/office/drawing/2017/decorative" xmlns:a18hc="http://schemas.microsoft.com/office/drawing/2018/hyperlinkcolor" xmlns:v="urn:schemas-microsoft-com:vml">
+<p:sld xmlns:a="http://schemas.openxmlformats.org/drawingml/2006/main" xmlns:r="http://schemas.openxmlformats.org/officeDocument/2006/relationships" xmlns:p="http://schemas.openxmlformats.org/presentationml/2006/main" xmlns:mc="http://schemas.openxmlformats.org/markup-compatibility/2006" xmlns:c="http://schemas.openxmlformats.org/drawingml/2006/chart" xmlns:cdr="http://schemas.openxmlformats.org/drawingml/2006/chartDrawing" xmlns:c14="http://schemas.microsoft.com/office/drawing/2007/8/2/chart" xmlns:dgm="http://schemas.openxmlformats.org/drawingml/2006/diagram" xmlns:pic="http://schemas.openxmlformats.org/drawingml/2006/picture" xmlns:wp="http://schemas.openxmlformats.org/drawingml/2006/wordprocessingDrawing" xmlns:wp14="http://schemas.microsoft.com/office/word/2010/wordprocessingDrawing" xmlns:xdr="http://schemas.openxmlformats.org/drawingml/2006/spreadsheetDrawing" xmlns:dsp="http://schemas.microsoft.com/office/drawing/2008/diagram" xmlns:p14="http://schemas.microsoft.com/office/powerpoint/2010/main" xmlns:a14="http://schemas.microsoft.com/office/drawing/2010/main" xmlns:p15="http://schemas.microsoft.com/office/powerpoint/2012/main" xmlns:p166="http://schemas.microsoft.com/office/powerpoint/2016/6/main" xmlns:a13cmd="http://schemas.microsoft.com/office/drawing/2013/main/command" xmlns:p13cmd="http://schemas.microsoft.com/office/powerpoint/2013/main/command" xmlns:p1510="http://schemas.microsoft.com/office/powerpoint/2015/10/main" xmlns:psez="http://schemas.microsoft.com/office/powerpoint/2016/sectionzoom" xmlns:pslz="http://schemas.microsoft.com/office/powerpoint/2016/slidezoom" xmlns:psuz="http://schemas.microsoft.com/office/powerpoint/2016/summaryzoom" xmlns:p173="http://schemas.microsoft.com/office/powerpoint/2017/3/main" xmlns:b="http://schemas.openxmlformats.org/officeDocument/2006/bibliography" xmlns:msink="http://schemas.microsoft.com/ink/2010/main" xmlns:cdr14="http://schemas.microsoft.com/office/drawing/2010/chartDrawing" xmlns:c15="http://schemas.microsoft.com/office/drawing/2012/chart" xmlns:cs="http://schemas.microsoft.com/office/drawing/2012/chartStyle" xmlns:ns30="http://www.w3.org/1998/Math/MathML" xmlns:ns31="http://www.w3.org/2003/InkML" xmlns:cx="http://schemas.microsoft.com/office/drawing/2014/chartex" xmlns:c16="http://schemas.microsoft.com/office/drawing/2014/chart" xmlns:dgm1611="http://schemas.microsoft.com/office/drawing/2016/11/diagram" xmlns:c173="http://schemas.microsoft.com/office/drawing/2017/03/chart" xmlns:am3d="http://schemas.microsoft.com/office/drawing/2017/model3d" xmlns:an18="http://schemas.microsoft.com/office/drawing/2018/animation" xmlns:anam3d="http://schemas.microsoft.com/office/drawing/2018/animation/model3d" xmlns:iact="http://schemas.microsoft.com/office/powerpoint/2014/inkAction" xmlns:thm15="http://schemas.microsoft.com/office/thememl/2012/main" xmlns:wetp="http://schemas.microsoft.com/office/webextensions/taskpanes/2010/11" xmlns:we="http://schemas.microsoft.com/office/webextensions/webextension/2010/11" xmlns:comp="http://schemas.openxmlformats.org/drawingml/2006/compatibility" xmlns:lc="http://schemas.openxmlformats.org/drawingml/2006/lockedCanvas" xmlns:p159="http://schemas.microsoft.com/office/powerpoint/2015/09/main" xmlns:p16="http://schemas.microsoft.com/office/powerpoint/2015/main" xmlns:p1710="http://schemas.microsoft.com/office/powerpoint/2017/10/main" xmlns:p184="http://schemas.microsoft.com/office/powerpoint/2018/4/main" xmlns:dgm14="http://schemas.microsoft.com/office/drawing/2010/diagram" xmlns:a15="http://schemas.microsoft.com/office/drawing/2012/main" xmlns:pic14="http://schemas.microsoft.com/office/drawing/2010/picture" xmlns:c16ac="http://schemas.microsoft.com/office/drawing/2014/chart/ac" xmlns:a16="http://schemas.microsoft.com/office/drawing/2014/main" xmlns:a1611="http://schemas.microsoft.com/office/drawing/2016/11/main" xmlns:dgm1612="http://schemas.microsoft.com/office/drawing/2016/12/diagram" xmlns:a16svg="http://schemas.microsoft.com/office/drawing/2016/SVG/main" xmlns:adec="http://schemas.microsoft.com/office/drawing/2017/decorative" xmlns:a18hc="http://schemas.microsoft.com/office/drawing/2018/hyperlinkcolor" xmlns:v="urn:schemas-microsoft-com:vml">
   <p:cSld>
     <p:spTree>
       <p:nvGrpSpPr>
@@ -7030,7 +7030,7 @@
 </file>
 
 <file path=ppt/slides/slide13.xml><?xml version="1.0" encoding="utf-8"?>
-<p:sld xmlns:r="http://schemas.openxmlformats.org/officeDocument/2006/relationships" xmlns:a="http://schemas.openxmlformats.org/drawingml/2006/main" xmlns:p="http://schemas.openxmlformats.org/presentationml/2006/main" xmlns:mc="http://schemas.openxmlformats.org/markup-compatibility/2006" xmlns:c="http://schemas.openxmlformats.org/drawingml/2006/chart" xmlns:cdr="http://schemas.openxmlformats.org/drawingml/2006/chartDrawing" xmlns:c14="http://schemas.microsoft.com/office/drawing/2007/8/2/chart" xmlns:dgm="http://schemas.openxmlformats.org/drawingml/2006/diagram" xmlns:pic="http://schemas.openxmlformats.org/drawingml/2006/picture" xmlns:wp="http://schemas.openxmlformats.org/drawingml/2006/wordprocessingDrawing" xmlns:wp14="http://schemas.microsoft.com/office/word/2010/wordprocessingDrawing" xmlns:xdr="http://schemas.openxmlformats.org/drawingml/2006/spreadsheetDrawing" xmlns:dsp="http://schemas.microsoft.com/office/drawing/2008/diagram" xmlns:p14="http://schemas.microsoft.com/office/powerpoint/2010/main" xmlns:a14="http://schemas.microsoft.com/office/drawing/2010/main" xmlns:p15="http://schemas.microsoft.com/office/powerpoint/2012/main" xmlns:p166="http://schemas.microsoft.com/office/powerpoint/2016/6/main" xmlns:a13cmd="http://schemas.microsoft.com/office/drawing/2013/main/command" xmlns:p13cmd="http://schemas.microsoft.com/office/powerpoint/2013/main/command" xmlns:p1510="http://schemas.microsoft.com/office/powerpoint/2015/10/main" xmlns:psez="http://schemas.microsoft.com/office/powerpoint/2016/sectionzoom" xmlns:pslz="http://schemas.microsoft.com/office/powerpoint/2016/slidezoom" xmlns:psuz="http://schemas.microsoft.com/office/powerpoint/2016/summaryzoom" xmlns:p173="http://schemas.microsoft.com/office/powerpoint/2017/3/main" xmlns:b="http://schemas.openxmlformats.org/officeDocument/2006/bibliography" xmlns:msink="http://schemas.microsoft.com/ink/2010/main" xmlns:cdr14="http://schemas.microsoft.com/office/drawing/2010/chartDrawing" xmlns:c15="http://schemas.microsoft.com/office/drawing/2012/chart" xmlns:cs="http://schemas.microsoft.com/office/drawing/2012/chartStyle" xmlns:ns30="http://www.w3.org/1998/Math/MathML" xmlns:ns31="http://www.w3.org/2003/InkML" xmlns:cx="http://schemas.microsoft.com/office/drawing/2014/chartex" xmlns:c16="http://schemas.microsoft.com/office/drawing/2014/chart" xmlns:dgm1611="http://schemas.microsoft.com/office/drawing/2016/11/diagram" xmlns:c173="http://schemas.microsoft.com/office/drawing/2017/03/chart" xmlns:am3d="http://schemas.microsoft.com/office/drawing/2017/model3d" xmlns:an18="http://schemas.microsoft.com/office/drawing/2018/animation" xmlns:anam3d="http://schemas.microsoft.com/office/drawing/2018/animation/model3d" xmlns:iact="http://schemas.microsoft.com/office/powerpoint/2014/inkAction" xmlns:thm15="http://schemas.microsoft.com/office/thememl/2012/main" xmlns:wetp="http://schemas.microsoft.com/office/webextensions/taskpanes/2010/11" xmlns:we="http://schemas.microsoft.com/office/webextensions/webextension/2010/11" xmlns:comp="http://schemas.openxmlformats.org/drawingml/2006/compatibility" xmlns:lc="http://schemas.openxmlformats.org/drawingml/2006/lockedCanvas" xmlns:p159="http://schemas.microsoft.com/office/powerpoint/2015/09/main" xmlns:p16="http://schemas.microsoft.com/office/powerpoint/2015/main" xmlns:p1710="http://schemas.microsoft.com/office/powerpoint/2017/10/main" xmlns:p184="http://schemas.microsoft.com/office/powerpoint/2018/4/main" xmlns:dgm14="http://schemas.microsoft.com/office/drawing/2010/diagram" xmlns:a15="http://schemas.microsoft.com/office/drawing/2012/main" xmlns:pic14="http://schemas.microsoft.com/office/drawing/2010/picture" xmlns:c16ac="http://schemas.microsoft.com/office/drawing/2014/chart/ac" xmlns:a16="http://schemas.microsoft.com/office/drawing/2014/main" xmlns:a1611="http://schemas.microsoft.com/office/drawing/2016/11/main" xmlns:dgm1612="http://schemas.microsoft.com/office/drawing/2016/12/diagram" xmlns:a16svg="http://schemas.microsoft.com/office/drawing/2016/SVG/main" xmlns:adec="http://schemas.microsoft.com/office/drawing/2017/decorative" xmlns:a18hc="http://schemas.microsoft.com/office/drawing/2018/hyperlinkcolor" xmlns:v="urn:schemas-microsoft-com:vml">
+<p:sld xmlns:a="http://schemas.openxmlformats.org/drawingml/2006/main" xmlns:r="http://schemas.openxmlformats.org/officeDocument/2006/relationships" xmlns:p="http://schemas.openxmlformats.org/presentationml/2006/main" xmlns:mc="http://schemas.openxmlformats.org/markup-compatibility/2006" xmlns:c="http://schemas.openxmlformats.org/drawingml/2006/chart" xmlns:cdr="http://schemas.openxmlformats.org/drawingml/2006/chartDrawing" xmlns:c14="http://schemas.microsoft.com/office/drawing/2007/8/2/chart" xmlns:dgm="http://schemas.openxmlformats.org/drawingml/2006/diagram" xmlns:pic="http://schemas.openxmlformats.org/drawingml/2006/picture" xmlns:wp="http://schemas.openxmlformats.org/drawingml/2006/wordprocessingDrawing" xmlns:wp14="http://schemas.microsoft.com/office/word/2010/wordprocessingDrawing" xmlns:xdr="http://schemas.openxmlformats.org/drawingml/2006/spreadsheetDrawing" xmlns:dsp="http://schemas.microsoft.com/office/drawing/2008/diagram" xmlns:p14="http://schemas.microsoft.com/office/powerpoint/2010/main" xmlns:a14="http://schemas.microsoft.com/office/drawing/2010/main" xmlns:p15="http://schemas.microsoft.com/office/powerpoint/2012/main" xmlns:p166="http://schemas.microsoft.com/office/powerpoint/2016/6/main" xmlns:a13cmd="http://schemas.microsoft.com/office/drawing/2013/main/command" xmlns:p13cmd="http://schemas.microsoft.com/office/powerpoint/2013/main/command" xmlns:p1510="http://schemas.microsoft.com/office/powerpoint/2015/10/main" xmlns:psez="http://schemas.microsoft.com/office/powerpoint/2016/sectionzoom" xmlns:pslz="http://schemas.microsoft.com/office/powerpoint/2016/slidezoom" xmlns:psuz="http://schemas.microsoft.com/office/powerpoint/2016/summaryzoom" xmlns:p173="http://schemas.microsoft.com/office/powerpoint/2017/3/main" xmlns:b="http://schemas.openxmlformats.org/officeDocument/2006/bibliography" xmlns:msink="http://schemas.microsoft.com/ink/2010/main" xmlns:cdr14="http://schemas.microsoft.com/office/drawing/2010/chartDrawing" xmlns:c15="http://schemas.microsoft.com/office/drawing/2012/chart" xmlns:cs="http://schemas.microsoft.com/office/drawing/2012/chartStyle" xmlns:ns30="http://www.w3.org/1998/Math/MathML" xmlns:ns31="http://www.w3.org/2003/InkML" xmlns:cx="http://schemas.microsoft.com/office/drawing/2014/chartex" xmlns:c16="http://schemas.microsoft.com/office/drawing/2014/chart" xmlns:dgm1611="http://schemas.microsoft.com/office/drawing/2016/11/diagram" xmlns:c173="http://schemas.microsoft.com/office/drawing/2017/03/chart" xmlns:am3d="http://schemas.microsoft.com/office/drawing/2017/model3d" xmlns:an18="http://schemas.microsoft.com/office/drawing/2018/animation" xmlns:anam3d="http://schemas.microsoft.com/office/drawing/2018/animation/model3d" xmlns:iact="http://schemas.microsoft.com/office/powerpoint/2014/inkAction" xmlns:thm15="http://schemas.microsoft.com/office/thememl/2012/main" xmlns:wetp="http://schemas.microsoft.com/office/webextensions/taskpanes/2010/11" xmlns:we="http://schemas.microsoft.com/office/webextensions/webextension/2010/11" xmlns:comp="http://schemas.openxmlformats.org/drawingml/2006/compatibility" xmlns:lc="http://schemas.openxmlformats.org/drawingml/2006/lockedCanvas" xmlns:p159="http://schemas.microsoft.com/office/powerpoint/2015/09/main" xmlns:p16="http://schemas.microsoft.com/office/powerpoint/2015/main" xmlns:p1710="http://schemas.microsoft.com/office/powerpoint/2017/10/main" xmlns:p184="http://schemas.microsoft.com/office/powerpoint/2018/4/main" xmlns:dgm14="http://schemas.microsoft.com/office/drawing/2010/diagram" xmlns:a15="http://schemas.microsoft.com/office/drawing/2012/main" xmlns:pic14="http://schemas.microsoft.com/office/drawing/2010/picture" xmlns:c16ac="http://schemas.microsoft.com/office/drawing/2014/chart/ac" xmlns:a16="http://schemas.microsoft.com/office/drawing/2014/main" xmlns:a1611="http://schemas.microsoft.com/office/drawing/2016/11/main" xmlns:dgm1612="http://schemas.microsoft.com/office/drawing/2016/12/diagram" xmlns:a16svg="http://schemas.microsoft.com/office/drawing/2016/SVG/main" xmlns:adec="http://schemas.microsoft.com/office/drawing/2017/decorative" xmlns:a18hc="http://schemas.microsoft.com/office/drawing/2018/hyperlinkcolor" xmlns:v="urn:schemas-microsoft-com:vml">
   <p:cSld>
     <p:spTree>
       <p:nvGrpSpPr>
@@ -7257,7 +7257,7 @@
 </file>
 
 <file path=ppt/slides/slide2.xml><?xml version="1.0" encoding="utf-8"?>
-<p:sld xmlns:r="http://schemas.openxmlformats.org/officeDocument/2006/relationships" xmlns:a="http://schemas.openxmlformats.org/drawingml/2006/main" xmlns:p="http://schemas.openxmlformats.org/presentationml/2006/main" xmlns:mc="http://schemas.openxmlformats.org/markup-compatibility/2006" xmlns:c="http://schemas.openxmlformats.org/drawingml/2006/chart" xmlns:cdr="http://schemas.openxmlformats.org/drawingml/2006/chartDrawing" xmlns:c14="http://schemas.microsoft.com/office/drawing/2007/8/2/chart" xmlns:dgm="http://schemas.openxmlformats.org/drawingml/2006/diagram" xmlns:pic="http://schemas.openxmlformats.org/drawingml/2006/picture" xmlns:wp="http://schemas.openxmlformats.org/drawingml/2006/wordprocessingDrawing" xmlns:wp14="http://schemas.microsoft.com/office/word/2010/wordprocessingDrawing" xmlns:xdr="http://schemas.openxmlformats.org/drawingml/2006/spreadsheetDrawing" xmlns:dsp="http://schemas.microsoft.com/office/drawing/2008/diagram" xmlns:p14="http://schemas.microsoft.com/office/powerpoint/2010/main" xmlns:a14="http://schemas.microsoft.com/office/drawing/2010/main" xmlns:p15="http://schemas.microsoft.com/office/powerpoint/2012/main" xmlns:p166="http://schemas.microsoft.com/office/powerpoint/2016/6/main" xmlns:a13cmd="http://schemas.microsoft.com/office/drawing/2013/main/command" xmlns:p13cmd="http://schemas.microsoft.com/office/powerpoint/2013/main/command" xmlns:p1510="http://schemas.microsoft.com/office/powerpoint/2015/10/main" xmlns:psez="http://schemas.microsoft.com/office/powerpoint/2016/sectionzoom" xmlns:pslz="http://schemas.microsoft.com/office/powerpoint/2016/slidezoom" xmlns:psuz="http://schemas.microsoft.com/office/powerpoint/2016/summaryzoom" xmlns:p173="http://schemas.microsoft.com/office/powerpoint/2017/3/main" xmlns:b="http://schemas.openxmlformats.org/officeDocument/2006/bibliography" xmlns:msink="http://schemas.microsoft.com/ink/2010/main" xmlns:cdr14="http://schemas.microsoft.com/office/drawing/2010/chartDrawing" xmlns:c15="http://schemas.microsoft.com/office/drawing/2012/chart" xmlns:cs="http://schemas.microsoft.com/office/drawing/2012/chartStyle" xmlns:ns30="http://www.w3.org/1998/Math/MathML" xmlns:ns31="http://www.w3.org/2003/InkML" xmlns:cx="http://schemas.microsoft.com/office/drawing/2014/chartex" xmlns:c16="http://schemas.microsoft.com/office/drawing/2014/chart" xmlns:dgm1611="http://schemas.microsoft.com/office/drawing/2016/11/diagram" xmlns:c173="http://schemas.microsoft.com/office/drawing/2017/03/chart" xmlns:am3d="http://schemas.microsoft.com/office/drawing/2017/model3d" xmlns:an18="http://schemas.microsoft.com/office/drawing/2018/animation" xmlns:anam3d="http://schemas.microsoft.com/office/drawing/2018/animation/model3d" xmlns:iact="http://schemas.microsoft.com/office/powerpoint/2014/inkAction" xmlns:thm15="http://schemas.microsoft.com/office/thememl/2012/main" xmlns:wetp="http://schemas.microsoft.com/office/webextensions/taskpanes/2010/11" xmlns:we="http://schemas.microsoft.com/office/webextensions/webextension/2010/11" xmlns:comp="http://schemas.openxmlformats.org/drawingml/2006/compatibility" xmlns:lc="http://schemas.openxmlformats.org/drawingml/2006/lockedCanvas" xmlns:p159="http://schemas.microsoft.com/office/powerpoint/2015/09/main" xmlns:p16="http://schemas.microsoft.com/office/powerpoint/2015/main" xmlns:p1710="http://schemas.microsoft.com/office/powerpoint/2017/10/main" xmlns:p184="http://schemas.microsoft.com/office/powerpoint/2018/4/main" xmlns:dgm14="http://schemas.microsoft.com/office/drawing/2010/diagram" xmlns:a15="http://schemas.microsoft.com/office/drawing/2012/main" xmlns:pic14="http://schemas.microsoft.com/office/drawing/2010/picture" xmlns:c16ac="http://schemas.microsoft.com/office/drawing/2014/chart/ac" xmlns:a16="http://schemas.microsoft.com/office/drawing/2014/main" xmlns:a1611="http://schemas.microsoft.com/office/drawing/2016/11/main" xmlns:dgm1612="http://schemas.microsoft.com/office/drawing/2016/12/diagram" xmlns:a16svg="http://schemas.microsoft.com/office/drawing/2016/SVG/main" xmlns:adec="http://schemas.microsoft.com/office/drawing/2017/decorative" xmlns:a18hc="http://schemas.microsoft.com/office/drawing/2018/hyperlinkcolor" xmlns:v="urn:schemas-microsoft-com:vml">
+<p:sld xmlns:a="http://schemas.openxmlformats.org/drawingml/2006/main" xmlns:r="http://schemas.openxmlformats.org/officeDocument/2006/relationships" xmlns:p="http://schemas.openxmlformats.org/presentationml/2006/main" xmlns:mc="http://schemas.openxmlformats.org/markup-compatibility/2006" xmlns:c="http://schemas.openxmlformats.org/drawingml/2006/chart" xmlns:cdr="http://schemas.openxmlformats.org/drawingml/2006/chartDrawing" xmlns:c14="http://schemas.microsoft.com/office/drawing/2007/8/2/chart" xmlns:dgm="http://schemas.openxmlformats.org/drawingml/2006/diagram" xmlns:pic="http://schemas.openxmlformats.org/drawingml/2006/picture" xmlns:wp="http://schemas.openxmlformats.org/drawingml/2006/wordprocessingDrawing" xmlns:wp14="http://schemas.microsoft.com/office/word/2010/wordprocessingDrawing" xmlns:xdr="http://schemas.openxmlformats.org/drawingml/2006/spreadsheetDrawing" xmlns:dsp="http://schemas.microsoft.com/office/drawing/2008/diagram" xmlns:p14="http://schemas.microsoft.com/office/powerpoint/2010/main" xmlns:a14="http://schemas.microsoft.com/office/drawing/2010/main" xmlns:p15="http://schemas.microsoft.com/office/powerpoint/2012/main" xmlns:p166="http://schemas.microsoft.com/office/powerpoint/2016/6/main" xmlns:a13cmd="http://schemas.microsoft.com/office/drawing/2013/main/command" xmlns:p13cmd="http://schemas.microsoft.com/office/powerpoint/2013/main/command" xmlns:p1510="http://schemas.microsoft.com/office/powerpoint/2015/10/main" xmlns:psez="http://schemas.microsoft.com/office/powerpoint/2016/sectionzoom" xmlns:pslz="http://schemas.microsoft.com/office/powerpoint/2016/slidezoom" xmlns:psuz="http://schemas.microsoft.com/office/powerpoint/2016/summaryzoom" xmlns:p173="http://schemas.microsoft.com/office/powerpoint/2017/3/main" xmlns:b="http://schemas.openxmlformats.org/officeDocument/2006/bibliography" xmlns:msink="http://schemas.microsoft.com/ink/2010/main" xmlns:cdr14="http://schemas.microsoft.com/office/drawing/2010/chartDrawing" xmlns:c15="http://schemas.microsoft.com/office/drawing/2012/chart" xmlns:cs="http://schemas.microsoft.com/office/drawing/2012/chartStyle" xmlns:ns30="http://www.w3.org/1998/Math/MathML" xmlns:ns31="http://www.w3.org/2003/InkML" xmlns:cx="http://schemas.microsoft.com/office/drawing/2014/chartex" xmlns:c16="http://schemas.microsoft.com/office/drawing/2014/chart" xmlns:dgm1611="http://schemas.microsoft.com/office/drawing/2016/11/diagram" xmlns:c173="http://schemas.microsoft.com/office/drawing/2017/03/chart" xmlns:am3d="http://schemas.microsoft.com/office/drawing/2017/model3d" xmlns:an18="http://schemas.microsoft.com/office/drawing/2018/animation" xmlns:anam3d="http://schemas.microsoft.com/office/drawing/2018/animation/model3d" xmlns:iact="http://schemas.microsoft.com/office/powerpoint/2014/inkAction" xmlns:thm15="http://schemas.microsoft.com/office/thememl/2012/main" xmlns:wetp="http://schemas.microsoft.com/office/webextensions/taskpanes/2010/11" xmlns:we="http://schemas.microsoft.com/office/webextensions/webextension/2010/11" xmlns:comp="http://schemas.openxmlformats.org/drawingml/2006/compatibility" xmlns:lc="http://schemas.openxmlformats.org/drawingml/2006/lockedCanvas" xmlns:p159="http://schemas.microsoft.com/office/powerpoint/2015/09/main" xmlns:p16="http://schemas.microsoft.com/office/powerpoint/2015/main" xmlns:p1710="http://schemas.microsoft.com/office/powerpoint/2017/10/main" xmlns:p184="http://schemas.microsoft.com/office/powerpoint/2018/4/main" xmlns:dgm14="http://schemas.microsoft.com/office/drawing/2010/diagram" xmlns:a15="http://schemas.microsoft.com/office/drawing/2012/main" xmlns:pic14="http://schemas.microsoft.com/office/drawing/2010/picture" xmlns:c16ac="http://schemas.microsoft.com/office/drawing/2014/chart/ac" xmlns:a16="http://schemas.microsoft.com/office/drawing/2014/main" xmlns:a1611="http://schemas.microsoft.com/office/drawing/2016/11/main" xmlns:dgm1612="http://schemas.microsoft.com/office/drawing/2016/12/diagram" xmlns:a16svg="http://schemas.microsoft.com/office/drawing/2016/SVG/main" xmlns:adec="http://schemas.microsoft.com/office/drawing/2017/decorative" xmlns:a18hc="http://schemas.microsoft.com/office/drawing/2018/hyperlinkcolor" xmlns:v="urn:schemas-microsoft-com:vml">
   <p:cSld>
     <p:spTree>
       <p:nvGrpSpPr>
@@ -7397,7 +7397,7 @@
 </file>
 
 <file path=ppt/slides/slide3.xml><?xml version="1.0" encoding="utf-8"?>
-<p:sld xmlns:r="http://schemas.openxmlformats.org/officeDocument/2006/relationships" xmlns:a="http://schemas.openxmlformats.org/drawingml/2006/main" xmlns:p="http://schemas.openxmlformats.org/presentationml/2006/main" xmlns:mc="http://schemas.openxmlformats.org/markup-compatibility/2006" xmlns:c="http://schemas.openxmlformats.org/drawingml/2006/chart" xmlns:cdr="http://schemas.openxmlformats.org/drawingml/2006/chartDrawing" xmlns:c14="http://schemas.microsoft.com/office/drawing/2007/8/2/chart" xmlns:dgm="http://schemas.openxmlformats.org/drawingml/2006/diagram" xmlns:pic="http://schemas.openxmlformats.org/drawingml/2006/picture" xmlns:wp="http://schemas.openxmlformats.org/drawingml/2006/wordprocessingDrawing" xmlns:wp14="http://schemas.microsoft.com/office/word/2010/wordprocessingDrawing" xmlns:xdr="http://schemas.openxmlformats.org/drawingml/2006/spreadsheetDrawing" xmlns:dsp="http://schemas.microsoft.com/office/drawing/2008/diagram" xmlns:p14="http://schemas.microsoft.com/office/powerpoint/2010/main" xmlns:a14="http://schemas.microsoft.com/office/drawing/2010/main" xmlns:p15="http://schemas.microsoft.com/office/powerpoint/2012/main" xmlns:p166="http://schemas.microsoft.com/office/powerpoint/2016/6/main" xmlns:a13cmd="http://schemas.microsoft.com/office/drawing/2013/main/command" xmlns:p13cmd="http://schemas.microsoft.com/office/powerpoint/2013/main/command" xmlns:p1510="http://schemas.microsoft.com/office/powerpoint/2015/10/main" xmlns:psez="http://schemas.microsoft.com/office/powerpoint/2016/sectionzoom" xmlns:pslz="http://schemas.microsoft.com/office/powerpoint/2016/slidezoom" xmlns:psuz="http://schemas.microsoft.com/office/powerpoint/2016/summaryzoom" xmlns:p173="http://schemas.microsoft.com/office/powerpoint/2017/3/main" xmlns:b="http://schemas.openxmlformats.org/officeDocument/2006/bibliography" xmlns:msink="http://schemas.microsoft.com/ink/2010/main" xmlns:cdr14="http://schemas.microsoft.com/office/drawing/2010/chartDrawing" xmlns:c15="http://schemas.microsoft.com/office/drawing/2012/chart" xmlns:cs="http://schemas.microsoft.com/office/drawing/2012/chartStyle" xmlns:ns30="http://www.w3.org/1998/Math/MathML" xmlns:ns31="http://www.w3.org/2003/InkML" xmlns:cx="http://schemas.microsoft.com/office/drawing/2014/chartex" xmlns:c16="http://schemas.microsoft.com/office/drawing/2014/chart" xmlns:dgm1611="http://schemas.microsoft.com/office/drawing/2016/11/diagram" xmlns:c173="http://schemas.microsoft.com/office/drawing/2017/03/chart" xmlns:am3d="http://schemas.microsoft.com/office/drawing/2017/model3d" xmlns:an18="http://schemas.microsoft.com/office/drawing/2018/animation" xmlns:anam3d="http://schemas.microsoft.com/office/drawing/2018/animation/model3d" xmlns:iact="http://schemas.microsoft.com/office/powerpoint/2014/inkAction" xmlns:thm15="http://schemas.microsoft.com/office/thememl/2012/main" xmlns:wetp="http://schemas.microsoft.com/office/webextensions/taskpanes/2010/11" xmlns:we="http://schemas.microsoft.com/office/webextensions/webextension/2010/11" xmlns:comp="http://schemas.openxmlformats.org/drawingml/2006/compatibility" xmlns:lc="http://schemas.openxmlformats.org/drawingml/2006/lockedCanvas" xmlns:p159="http://schemas.microsoft.com/office/powerpoint/2015/09/main" xmlns:p16="http://schemas.microsoft.com/office/powerpoint/2015/main" xmlns:p1710="http://schemas.microsoft.com/office/powerpoint/2017/10/main" xmlns:p184="http://schemas.microsoft.com/office/powerpoint/2018/4/main" xmlns:dgm14="http://schemas.microsoft.com/office/drawing/2010/diagram" xmlns:a15="http://schemas.microsoft.com/office/drawing/2012/main" xmlns:pic14="http://schemas.microsoft.com/office/drawing/2010/picture" xmlns:c16ac="http://schemas.microsoft.com/office/drawing/2014/chart/ac" xmlns:a16="http://schemas.microsoft.com/office/drawing/2014/main" xmlns:a1611="http://schemas.microsoft.com/office/drawing/2016/11/main" xmlns:dgm1612="http://schemas.microsoft.com/office/drawing/2016/12/diagram" xmlns:a16svg="http://schemas.microsoft.com/office/drawing/2016/SVG/main" xmlns:adec="http://schemas.microsoft.com/office/drawing/2017/decorative" xmlns:a18hc="http://schemas.microsoft.com/office/drawing/2018/hyperlinkcolor" xmlns:v="urn:schemas-microsoft-com:vml">
+<p:sld xmlns:a="http://schemas.openxmlformats.org/drawingml/2006/main" xmlns:r="http://schemas.openxmlformats.org/officeDocument/2006/relationships" xmlns:p="http://schemas.openxmlformats.org/presentationml/2006/main" xmlns:mc="http://schemas.openxmlformats.org/markup-compatibility/2006" xmlns:c="http://schemas.openxmlformats.org/drawingml/2006/chart" xmlns:cdr="http://schemas.openxmlformats.org/drawingml/2006/chartDrawing" xmlns:c14="http://schemas.microsoft.com/office/drawing/2007/8/2/chart" xmlns:dgm="http://schemas.openxmlformats.org/drawingml/2006/diagram" xmlns:pic="http://schemas.openxmlformats.org/drawingml/2006/picture" xmlns:wp="http://schemas.openxmlformats.org/drawingml/2006/wordprocessingDrawing" xmlns:wp14="http://schemas.microsoft.com/office/word/2010/wordprocessingDrawing" xmlns:xdr="http://schemas.openxmlformats.org/drawingml/2006/spreadsheetDrawing" xmlns:dsp="http://schemas.microsoft.com/office/drawing/2008/diagram" xmlns:p14="http://schemas.microsoft.com/office/powerpoint/2010/main" xmlns:a14="http://schemas.microsoft.com/office/drawing/2010/main" xmlns:p15="http://schemas.microsoft.com/office/powerpoint/2012/main" xmlns:p166="http://schemas.microsoft.com/office/powerpoint/2016/6/main" xmlns:a13cmd="http://schemas.microsoft.com/office/drawing/2013/main/command" xmlns:p13cmd="http://schemas.microsoft.com/office/powerpoint/2013/main/command" xmlns:p1510="http://schemas.microsoft.com/office/powerpoint/2015/10/main" xmlns:psez="http://schemas.microsoft.com/office/powerpoint/2016/sectionzoom" xmlns:pslz="http://schemas.microsoft.com/office/powerpoint/2016/slidezoom" xmlns:psuz="http://schemas.microsoft.com/office/powerpoint/2016/summaryzoom" xmlns:p173="http://schemas.microsoft.com/office/powerpoint/2017/3/main" xmlns:b="http://schemas.openxmlformats.org/officeDocument/2006/bibliography" xmlns:msink="http://schemas.microsoft.com/ink/2010/main" xmlns:cdr14="http://schemas.microsoft.com/office/drawing/2010/chartDrawing" xmlns:c15="http://schemas.microsoft.com/office/drawing/2012/chart" xmlns:cs="http://schemas.microsoft.com/office/drawing/2012/chartStyle" xmlns:ns30="http://www.w3.org/1998/Math/MathML" xmlns:ns31="http://www.w3.org/2003/InkML" xmlns:cx="http://schemas.microsoft.com/office/drawing/2014/chartex" xmlns:c16="http://schemas.microsoft.com/office/drawing/2014/chart" xmlns:dgm1611="http://schemas.microsoft.com/office/drawing/2016/11/diagram" xmlns:c173="http://schemas.microsoft.com/office/drawing/2017/03/chart" xmlns:am3d="http://schemas.microsoft.com/office/drawing/2017/model3d" xmlns:an18="http://schemas.microsoft.com/office/drawing/2018/animation" xmlns:anam3d="http://schemas.microsoft.com/office/drawing/2018/animation/model3d" xmlns:iact="http://schemas.microsoft.com/office/powerpoint/2014/inkAction" xmlns:thm15="http://schemas.microsoft.com/office/thememl/2012/main" xmlns:wetp="http://schemas.microsoft.com/office/webextensions/taskpanes/2010/11" xmlns:we="http://schemas.microsoft.com/office/webextensions/webextension/2010/11" xmlns:comp="http://schemas.openxmlformats.org/drawingml/2006/compatibility" xmlns:lc="http://schemas.openxmlformats.org/drawingml/2006/lockedCanvas" xmlns:p159="http://schemas.microsoft.com/office/powerpoint/2015/09/main" xmlns:p16="http://schemas.microsoft.com/office/powerpoint/2015/main" xmlns:p1710="http://schemas.microsoft.com/office/powerpoint/2017/10/main" xmlns:p184="http://schemas.microsoft.com/office/powerpoint/2018/4/main" xmlns:dgm14="http://schemas.microsoft.com/office/drawing/2010/diagram" xmlns:a15="http://schemas.microsoft.com/office/drawing/2012/main" xmlns:pic14="http://schemas.microsoft.com/office/drawing/2010/picture" xmlns:c16ac="http://schemas.microsoft.com/office/drawing/2014/chart/ac" xmlns:a16="http://schemas.microsoft.com/office/drawing/2014/main" xmlns:a1611="http://schemas.microsoft.com/office/drawing/2016/11/main" xmlns:dgm1612="http://schemas.microsoft.com/office/drawing/2016/12/diagram" xmlns:a16svg="http://schemas.microsoft.com/office/drawing/2016/SVG/main" xmlns:adec="http://schemas.microsoft.com/office/drawing/2017/decorative" xmlns:a18hc="http://schemas.microsoft.com/office/drawing/2018/hyperlinkcolor" xmlns:v="urn:schemas-microsoft-com:vml">
   <p:cSld>
     <p:spTree>
       <p:nvGrpSpPr>
@@ -7526,7 +7526,7 @@
 </file>
 
 <file path=ppt/slides/slide4.xml><?xml version="1.0" encoding="utf-8"?>
-<p:sld xmlns:r="http://schemas.openxmlformats.org/officeDocument/2006/relationships" xmlns:a="http://schemas.openxmlformats.org/drawingml/2006/main" xmlns:p="http://schemas.openxmlformats.org/presentationml/2006/main" xmlns:mc="http://schemas.openxmlformats.org/markup-compatibility/2006" xmlns:c="http://schemas.openxmlformats.org/drawingml/2006/chart" xmlns:cdr="http://schemas.openxmlformats.org/drawingml/2006/chartDrawing" xmlns:c14="http://schemas.microsoft.com/office/drawing/2007/8/2/chart" xmlns:dgm="http://schemas.openxmlformats.org/drawingml/2006/diagram" xmlns:pic="http://schemas.openxmlformats.org/drawingml/2006/picture" xmlns:wp="http://schemas.openxmlformats.org/drawingml/2006/wordprocessingDrawing" xmlns:wp14="http://schemas.microsoft.com/office/word/2010/wordprocessingDrawing" xmlns:xdr="http://schemas.openxmlformats.org/drawingml/2006/spreadsheetDrawing" xmlns:dsp="http://schemas.microsoft.com/office/drawing/2008/diagram" xmlns:p14="http://schemas.microsoft.com/office/powerpoint/2010/main" xmlns:a14="http://schemas.microsoft.com/office/drawing/2010/main" xmlns:p15="http://schemas.microsoft.com/office/powerpoint/2012/main" xmlns:p166="http://schemas.microsoft.com/office/powerpoint/2016/6/main" xmlns:a13cmd="http://schemas.microsoft.com/office/drawing/2013/main/command" xmlns:p13cmd="http://schemas.microsoft.com/office/powerpoint/2013/main/command" xmlns:p1510="http://schemas.microsoft.com/office/powerpoint/2015/10/main" xmlns:psez="http://schemas.microsoft.com/office/powerpoint/2016/sectionzoom" xmlns:pslz="http://schemas.microsoft.com/office/powerpoint/2016/slidezoom" xmlns:psuz="http://schemas.microsoft.com/office/powerpoint/2016/summaryzoom" xmlns:p173="http://schemas.microsoft.com/office/powerpoint/2017/3/main" xmlns:b="http://schemas.openxmlformats.org/officeDocument/2006/bibliography" xmlns:msink="http://schemas.microsoft.com/ink/2010/main" xmlns:cdr14="http://schemas.microsoft.com/office/drawing/2010/chartDrawing" xmlns:c15="http://schemas.microsoft.com/office/drawing/2012/chart" xmlns:cs="http://schemas.microsoft.com/office/drawing/2012/chartStyle" xmlns:ns30="http://www.w3.org/1998/Math/MathML" xmlns:ns31="http://www.w3.org/2003/InkML" xmlns:cx="http://schemas.microsoft.com/office/drawing/2014/chartex" xmlns:c16="http://schemas.microsoft.com/office/drawing/2014/chart" xmlns:dgm1611="http://schemas.microsoft.com/office/drawing/2016/11/diagram" xmlns:c173="http://schemas.microsoft.com/office/drawing/2017/03/chart" xmlns:am3d="http://schemas.microsoft.com/office/drawing/2017/model3d" xmlns:an18="http://schemas.microsoft.com/office/drawing/2018/animation" xmlns:anam3d="http://schemas.microsoft.com/office/drawing/2018/animation/model3d" xmlns:iact="http://schemas.microsoft.com/office/powerpoint/2014/inkAction" xmlns:thm15="http://schemas.microsoft.com/office/thememl/2012/main" xmlns:wetp="http://schemas.microsoft.com/office/webextensions/taskpanes/2010/11" xmlns:we="http://schemas.microsoft.com/office/webextensions/webextension/2010/11" xmlns:comp="http://schemas.openxmlformats.org/drawingml/2006/compatibility" xmlns:lc="http://schemas.openxmlformats.org/drawingml/2006/lockedCanvas" xmlns:p159="http://schemas.microsoft.com/office/powerpoint/2015/09/main" xmlns:p16="http://schemas.microsoft.com/office/powerpoint/2015/main" xmlns:p1710="http://schemas.microsoft.com/office/powerpoint/2017/10/main" xmlns:p184="http://schemas.microsoft.com/office/powerpoint/2018/4/main" xmlns:dgm14="http://schemas.microsoft.com/office/drawing/2010/diagram" xmlns:a15="http://schemas.microsoft.com/office/drawing/2012/main" xmlns:pic14="http://schemas.microsoft.com/office/drawing/2010/picture" xmlns:c16ac="http://schemas.microsoft.com/office/drawing/2014/chart/ac" xmlns:a16="http://schemas.microsoft.com/office/drawing/2014/main" xmlns:a1611="http://schemas.microsoft.com/office/drawing/2016/11/main" xmlns:dgm1612="http://schemas.microsoft.com/office/drawing/2016/12/diagram" xmlns:a16svg="http://schemas.microsoft.com/office/drawing/2016/SVG/main" xmlns:adec="http://schemas.microsoft.com/office/drawing/2017/decorative" xmlns:a18hc="http://schemas.microsoft.com/office/drawing/2018/hyperlinkcolor" xmlns:v="urn:schemas-microsoft-com:vml">
+<p:sld xmlns:a="http://schemas.openxmlformats.org/drawingml/2006/main" xmlns:r="http://schemas.openxmlformats.org/officeDocument/2006/relationships" xmlns:p="http://schemas.openxmlformats.org/presentationml/2006/main" xmlns:mc="http://schemas.openxmlformats.org/markup-compatibility/2006" xmlns:c="http://schemas.openxmlformats.org/drawingml/2006/chart" xmlns:cdr="http://schemas.openxmlformats.org/drawingml/2006/chartDrawing" xmlns:c14="http://schemas.microsoft.com/office/drawing/2007/8/2/chart" xmlns:dgm="http://schemas.openxmlformats.org/drawingml/2006/diagram" xmlns:pic="http://schemas.openxmlformats.org/drawingml/2006/picture" xmlns:wp="http://schemas.openxmlformats.org/drawingml/2006/wordprocessingDrawing" xmlns:wp14="http://schemas.microsoft.com/office/word/2010/wordprocessingDrawing" xmlns:xdr="http://schemas.openxmlformats.org/drawingml/2006/spreadsheetDrawing" xmlns:dsp="http://schemas.microsoft.com/office/drawing/2008/diagram" xmlns:p14="http://schemas.microsoft.com/office/powerpoint/2010/main" xmlns:a14="http://schemas.microsoft.com/office/drawing/2010/main" xmlns:p15="http://schemas.microsoft.com/office/powerpoint/2012/main" xmlns:p166="http://schemas.microsoft.com/office/powerpoint/2016/6/main" xmlns:a13cmd="http://schemas.microsoft.com/office/drawing/2013/main/command" xmlns:p13cmd="http://schemas.microsoft.com/office/powerpoint/2013/main/command" xmlns:p1510="http://schemas.microsoft.com/office/powerpoint/2015/10/main" xmlns:psez="http://schemas.microsoft.com/office/powerpoint/2016/sectionzoom" xmlns:pslz="http://schemas.microsoft.com/office/powerpoint/2016/slidezoom" xmlns:psuz="http://schemas.microsoft.com/office/powerpoint/2016/summaryzoom" xmlns:p173="http://schemas.microsoft.com/office/powerpoint/2017/3/main" xmlns:b="http://schemas.openxmlformats.org/officeDocument/2006/bibliography" xmlns:msink="http://schemas.microsoft.com/ink/2010/main" xmlns:cdr14="http://schemas.microsoft.com/office/drawing/2010/chartDrawing" xmlns:c15="http://schemas.microsoft.com/office/drawing/2012/chart" xmlns:cs="http://schemas.microsoft.com/office/drawing/2012/chartStyle" xmlns:ns30="http://www.w3.org/1998/Math/MathML" xmlns:ns31="http://www.w3.org/2003/InkML" xmlns:cx="http://schemas.microsoft.com/office/drawing/2014/chartex" xmlns:c16="http://schemas.microsoft.com/office/drawing/2014/chart" xmlns:dgm1611="http://schemas.microsoft.com/office/drawing/2016/11/diagram" xmlns:c173="http://schemas.microsoft.com/office/drawing/2017/03/chart" xmlns:am3d="http://schemas.microsoft.com/office/drawing/2017/model3d" xmlns:an18="http://schemas.microsoft.com/office/drawing/2018/animation" xmlns:anam3d="http://schemas.microsoft.com/office/drawing/2018/animation/model3d" xmlns:iact="http://schemas.microsoft.com/office/powerpoint/2014/inkAction" xmlns:thm15="http://schemas.microsoft.com/office/thememl/2012/main" xmlns:wetp="http://schemas.microsoft.com/office/webextensions/taskpanes/2010/11" xmlns:we="http://schemas.microsoft.com/office/webextensions/webextension/2010/11" xmlns:comp="http://schemas.openxmlformats.org/drawingml/2006/compatibility" xmlns:lc="http://schemas.openxmlformats.org/drawingml/2006/lockedCanvas" xmlns:p159="http://schemas.microsoft.com/office/powerpoint/2015/09/main" xmlns:p16="http://schemas.microsoft.com/office/powerpoint/2015/main" xmlns:p1710="http://schemas.microsoft.com/office/powerpoint/2017/10/main" xmlns:p184="http://schemas.microsoft.com/office/powerpoint/2018/4/main" xmlns:dgm14="http://schemas.microsoft.com/office/drawing/2010/diagram" xmlns:a15="http://schemas.microsoft.com/office/drawing/2012/main" xmlns:pic14="http://schemas.microsoft.com/office/drawing/2010/picture" xmlns:c16ac="http://schemas.microsoft.com/office/drawing/2014/chart/ac" xmlns:a16="http://schemas.microsoft.com/office/drawing/2014/main" xmlns:a1611="http://schemas.microsoft.com/office/drawing/2016/11/main" xmlns:dgm1612="http://schemas.microsoft.com/office/drawing/2016/12/diagram" xmlns:a16svg="http://schemas.microsoft.com/office/drawing/2016/SVG/main" xmlns:adec="http://schemas.microsoft.com/office/drawing/2017/decorative" xmlns:a18hc="http://schemas.microsoft.com/office/drawing/2018/hyperlinkcolor" xmlns:v="urn:schemas-microsoft-com:vml">
   <p:cSld>
     <p:spTree>
       <p:nvGrpSpPr>
@@ -7616,7 +7616,7 @@
 </file>
 
 <file path=ppt/slides/slide5.xml><?xml version="1.0" encoding="utf-8"?>
-<p:sld xmlns:r="http://schemas.openxmlformats.org/officeDocument/2006/relationships" xmlns:a="http://schemas.openxmlformats.org/drawingml/2006/main" xmlns:p="http://schemas.openxmlformats.org/presentationml/2006/main" xmlns:mc="http://schemas.openxmlformats.org/markup-compatibility/2006" xmlns:c="http://schemas.openxmlformats.org/drawingml/2006/chart" xmlns:cdr="http://schemas.openxmlformats.org/drawingml/2006/chartDrawing" xmlns:c14="http://schemas.microsoft.com/office/drawing/2007/8/2/chart" xmlns:dgm="http://schemas.openxmlformats.org/drawingml/2006/diagram" xmlns:pic="http://schemas.openxmlformats.org/drawingml/2006/picture" xmlns:wp="http://schemas.openxmlformats.org/drawingml/2006/wordprocessingDrawing" xmlns:wp14="http://schemas.microsoft.com/office/word/2010/wordprocessingDrawing" xmlns:xdr="http://schemas.openxmlformats.org/drawingml/2006/spreadsheetDrawing" xmlns:dsp="http://schemas.microsoft.com/office/drawing/2008/diagram" xmlns:p14="http://schemas.microsoft.com/office/powerpoint/2010/main" xmlns:a14="http://schemas.microsoft.com/office/drawing/2010/main" xmlns:p15="http://schemas.microsoft.com/office/powerpoint/2012/main" xmlns:p166="http://schemas.microsoft.com/office/powerpoint/2016/6/main" xmlns:a13cmd="http://schemas.microsoft.com/office/drawing/2013/main/command" xmlns:p13cmd="http://schemas.microsoft.com/office/powerpoint/2013/main/command" xmlns:p1510="http://schemas.microsoft.com/office/powerpoint/2015/10/main" xmlns:psez="http://schemas.microsoft.com/office/powerpoint/2016/sectionzoom" xmlns:pslz="http://schemas.microsoft.com/office/powerpoint/2016/slidezoom" xmlns:psuz="http://schemas.microsoft.com/office/powerpoint/2016/summaryzoom" xmlns:p173="http://schemas.microsoft.com/office/powerpoint/2017/3/main" xmlns:b="http://schemas.openxmlformats.org/officeDocument/2006/bibliography" xmlns:msink="http://schemas.microsoft.com/ink/2010/main" xmlns:cdr14="http://schemas.microsoft.com/office/drawing/2010/chartDrawing" xmlns:c15="http://schemas.microsoft.com/office/drawing/2012/chart" xmlns:cs="http://schemas.microsoft.com/office/drawing/2012/chartStyle" xmlns:ns30="http://www.w3.org/1998/Math/MathML" xmlns:ns31="http://www.w3.org/2003/InkML" xmlns:cx="http://schemas.microsoft.com/office/drawing/2014/chartex" xmlns:c16="http://schemas.microsoft.com/office/drawing/2014/chart" xmlns:dgm1611="http://schemas.microsoft.com/office/drawing/2016/11/diagram" xmlns:c173="http://schemas.microsoft.com/office/drawing/2017/03/chart" xmlns:am3d="http://schemas.microsoft.com/office/drawing/2017/model3d" xmlns:an18="http://schemas.microsoft.com/office/drawing/2018/animation" xmlns:anam3d="http://schemas.microsoft.com/office/drawing/2018/animation/model3d" xmlns:iact="http://schemas.microsoft.com/office/powerpoint/2014/inkAction" xmlns:thm15="http://schemas.microsoft.com/office/thememl/2012/main" xmlns:wetp="http://schemas.microsoft.com/office/webextensions/taskpanes/2010/11" xmlns:we="http://schemas.microsoft.com/office/webextensions/webextension/2010/11" xmlns:comp="http://schemas.openxmlformats.org/drawingml/2006/compatibility" xmlns:lc="http://schemas.openxmlformats.org/drawingml/2006/lockedCanvas" xmlns:p159="http://schemas.microsoft.com/office/powerpoint/2015/09/main" xmlns:p16="http://schemas.microsoft.com/office/powerpoint/2015/main" xmlns:p1710="http://schemas.microsoft.com/office/powerpoint/2017/10/main" xmlns:p184="http://schemas.microsoft.com/office/powerpoint/2018/4/main" xmlns:dgm14="http://schemas.microsoft.com/office/drawing/2010/diagram" xmlns:a15="http://schemas.microsoft.com/office/drawing/2012/main" xmlns:pic14="http://schemas.microsoft.com/office/drawing/2010/picture" xmlns:c16ac="http://schemas.microsoft.com/office/drawing/2014/chart/ac" xmlns:a16="http://schemas.microsoft.com/office/drawing/2014/main" xmlns:a1611="http://schemas.microsoft.com/office/drawing/2016/11/main" xmlns:dgm1612="http://schemas.microsoft.com/office/drawing/2016/12/diagram" xmlns:a16svg="http://schemas.microsoft.com/office/drawing/2016/SVG/main" xmlns:adec="http://schemas.microsoft.com/office/drawing/2017/decorative" xmlns:a18hc="http://schemas.microsoft.com/office/drawing/2018/hyperlinkcolor" xmlns:v="urn:schemas-microsoft-com:vml">
+<p:sld xmlns:a="http://schemas.openxmlformats.org/drawingml/2006/main" xmlns:r="http://schemas.openxmlformats.org/officeDocument/2006/relationships" xmlns:p="http://schemas.openxmlformats.org/presentationml/2006/main" xmlns:mc="http://schemas.openxmlformats.org/markup-compatibility/2006" xmlns:c="http://schemas.openxmlformats.org/drawingml/2006/chart" xmlns:cdr="http://schemas.openxmlformats.org/drawingml/2006/chartDrawing" xmlns:c14="http://schemas.microsoft.com/office/drawing/2007/8/2/chart" xmlns:dgm="http://schemas.openxmlformats.org/drawingml/2006/diagram" xmlns:pic="http://schemas.openxmlformats.org/drawingml/2006/picture" xmlns:wp="http://schemas.openxmlformats.org/drawingml/2006/wordprocessingDrawing" xmlns:wp14="http://schemas.microsoft.com/office/word/2010/wordprocessingDrawing" xmlns:xdr="http://schemas.openxmlformats.org/drawingml/2006/spreadsheetDrawing" xmlns:dsp="http://schemas.microsoft.com/office/drawing/2008/diagram" xmlns:p14="http://schemas.microsoft.com/office/powerpoint/2010/main" xmlns:a14="http://schemas.microsoft.com/office/drawing/2010/main" xmlns:p15="http://schemas.microsoft.com/office/powerpoint/2012/main" xmlns:p166="http://schemas.microsoft.com/office/powerpoint/2016/6/main" xmlns:a13cmd="http://schemas.microsoft.com/office/drawing/2013/main/command" xmlns:p13cmd="http://schemas.microsoft.com/office/powerpoint/2013/main/command" xmlns:p1510="http://schemas.microsoft.com/office/powerpoint/2015/10/main" xmlns:psez="http://schemas.microsoft.com/office/powerpoint/2016/sectionzoom" xmlns:pslz="http://schemas.microsoft.com/office/powerpoint/2016/slidezoom" xmlns:psuz="http://schemas.microsoft.com/office/powerpoint/2016/summaryzoom" xmlns:p173="http://schemas.microsoft.com/office/powerpoint/2017/3/main" xmlns:b="http://schemas.openxmlformats.org/officeDocument/2006/bibliography" xmlns:msink="http://schemas.microsoft.com/ink/2010/main" xmlns:cdr14="http://schemas.microsoft.com/office/drawing/2010/chartDrawing" xmlns:c15="http://schemas.microsoft.com/office/drawing/2012/chart" xmlns:cs="http://schemas.microsoft.com/office/drawing/2012/chartStyle" xmlns:ns30="http://www.w3.org/1998/Math/MathML" xmlns:ns31="http://www.w3.org/2003/InkML" xmlns:cx="http://schemas.microsoft.com/office/drawing/2014/chartex" xmlns:c16="http://schemas.microsoft.com/office/drawing/2014/chart" xmlns:dgm1611="http://schemas.microsoft.com/office/drawing/2016/11/diagram" xmlns:c173="http://schemas.microsoft.com/office/drawing/2017/03/chart" xmlns:am3d="http://schemas.microsoft.com/office/drawing/2017/model3d" xmlns:an18="http://schemas.microsoft.com/office/drawing/2018/animation" xmlns:anam3d="http://schemas.microsoft.com/office/drawing/2018/animation/model3d" xmlns:iact="http://schemas.microsoft.com/office/powerpoint/2014/inkAction" xmlns:thm15="http://schemas.microsoft.com/office/thememl/2012/main" xmlns:wetp="http://schemas.microsoft.com/office/webextensions/taskpanes/2010/11" xmlns:we="http://schemas.microsoft.com/office/webextensions/webextension/2010/11" xmlns:comp="http://schemas.openxmlformats.org/drawingml/2006/compatibility" xmlns:lc="http://schemas.openxmlformats.org/drawingml/2006/lockedCanvas" xmlns:p159="http://schemas.microsoft.com/office/powerpoint/2015/09/main" xmlns:p16="http://schemas.microsoft.com/office/powerpoint/2015/main" xmlns:p1710="http://schemas.microsoft.com/office/powerpoint/2017/10/main" xmlns:p184="http://schemas.microsoft.com/office/powerpoint/2018/4/main" xmlns:dgm14="http://schemas.microsoft.com/office/drawing/2010/diagram" xmlns:a15="http://schemas.microsoft.com/office/drawing/2012/main" xmlns:pic14="http://schemas.microsoft.com/office/drawing/2010/picture" xmlns:c16ac="http://schemas.microsoft.com/office/drawing/2014/chart/ac" xmlns:a16="http://schemas.microsoft.com/office/drawing/2014/main" xmlns:a1611="http://schemas.microsoft.com/office/drawing/2016/11/main" xmlns:dgm1612="http://schemas.microsoft.com/office/drawing/2016/12/diagram" xmlns:a16svg="http://schemas.microsoft.com/office/drawing/2016/SVG/main" xmlns:adec="http://schemas.microsoft.com/office/drawing/2017/decorative" xmlns:a18hc="http://schemas.microsoft.com/office/drawing/2018/hyperlinkcolor" xmlns:v="urn:schemas-microsoft-com:vml">
   <p:cSld>
     <p:spTree>
       <p:nvGrpSpPr>
@@ -7877,7 +7877,7 @@
 </file>
 
 <file path=ppt/slides/slide6.xml><?xml version="1.0" encoding="utf-8"?>
-<p:sld xmlns:r="http://schemas.openxmlformats.org/officeDocument/2006/relationships" xmlns:a="http://schemas.openxmlformats.org/drawingml/2006/main" xmlns:p="http://schemas.openxmlformats.org/presentationml/2006/main" xmlns:mc="http://schemas.openxmlformats.org/markup-compatibility/2006" xmlns:c="http://schemas.openxmlformats.org/drawingml/2006/chart" xmlns:cdr="http://schemas.openxmlformats.org/drawingml/2006/chartDrawing" xmlns:c14="http://schemas.microsoft.com/office/drawing/2007/8/2/chart" xmlns:dgm="http://schemas.openxmlformats.org/drawingml/2006/diagram" xmlns:pic="http://schemas.openxmlformats.org/drawingml/2006/picture" xmlns:wp="http://schemas.openxmlformats.org/drawingml/2006/wordprocessingDrawing" xmlns:wp14="http://schemas.microsoft.com/office/word/2010/wordprocessingDrawing" xmlns:xdr="http://schemas.openxmlformats.org/drawingml/2006/spreadsheetDrawing" xmlns:dsp="http://schemas.microsoft.com/office/drawing/2008/diagram" xmlns:p14="http://schemas.microsoft.com/office/powerpoint/2010/main" xmlns:a14="http://schemas.microsoft.com/office/drawing/2010/main" xmlns:p15="http://schemas.microsoft.com/office/powerpoint/2012/main" xmlns:p166="http://schemas.microsoft.com/office/powerpoint/2016/6/main" xmlns:a13cmd="http://schemas.microsoft.com/office/drawing/2013/main/command" xmlns:p13cmd="http://schemas.microsoft.com/office/powerpoint/2013/main/command" xmlns:p1510="http://schemas.microsoft.com/office/powerpoint/2015/10/main" xmlns:psez="http://schemas.microsoft.com/office/powerpoint/2016/sectionzoom" xmlns:pslz="http://schemas.microsoft.com/office/powerpoint/2016/slidezoom" xmlns:psuz="http://schemas.microsoft.com/office/powerpoint/2016/summaryzoom" xmlns:p173="http://schemas.microsoft.com/office/powerpoint/2017/3/main" xmlns:b="http://schemas.openxmlformats.org/officeDocument/2006/bibliography" xmlns:msink="http://schemas.microsoft.com/ink/2010/main" xmlns:cdr14="http://schemas.microsoft.com/office/drawing/2010/chartDrawing" xmlns:c15="http://schemas.microsoft.com/office/drawing/2012/chart" xmlns:cs="http://schemas.microsoft.com/office/drawing/2012/chartStyle" xmlns:ns30="http://www.w3.org/1998/Math/MathML" xmlns:ns31="http://www.w3.org/2003/InkML" xmlns:cx="http://schemas.microsoft.com/office/drawing/2014/chartex" xmlns:c16="http://schemas.microsoft.com/office/drawing/2014/chart" xmlns:dgm1611="http://schemas.microsoft.com/office/drawing/2016/11/diagram" xmlns:c173="http://schemas.microsoft.com/office/drawing/2017/03/chart" xmlns:am3d="http://schemas.microsoft.com/office/drawing/2017/model3d" xmlns:an18="http://schemas.microsoft.com/office/drawing/2018/animation" xmlns:anam3d="http://schemas.microsoft.com/office/drawing/2018/animation/model3d" xmlns:iact="http://schemas.microsoft.com/office/powerpoint/2014/inkAction" xmlns:thm15="http://schemas.microsoft.com/office/thememl/2012/main" xmlns:wetp="http://schemas.microsoft.com/office/webextensions/taskpanes/2010/11" xmlns:we="http://schemas.microsoft.com/office/webextensions/webextension/2010/11" xmlns:comp="http://schemas.openxmlformats.org/drawingml/2006/compatibility" xmlns:lc="http://schemas.openxmlformats.org/drawingml/2006/lockedCanvas" xmlns:p159="http://schemas.microsoft.com/office/powerpoint/2015/09/main" xmlns:p16="http://schemas.microsoft.com/office/powerpoint/2015/main" xmlns:p1710="http://schemas.microsoft.com/office/powerpoint/2017/10/main" xmlns:p184="http://schemas.microsoft.com/office/powerpoint/2018/4/main" xmlns:dgm14="http://schemas.microsoft.com/office/drawing/2010/diagram" xmlns:a15="http://schemas.microsoft.com/office/drawing/2012/main" xmlns:pic14="http://schemas.microsoft.com/office/drawing/2010/picture" xmlns:c16ac="http://schemas.microsoft.com/office/drawing/2014/chart/ac" xmlns:a16="http://schemas.microsoft.com/office/drawing/2014/main" xmlns:a1611="http://schemas.microsoft.com/office/drawing/2016/11/main" xmlns:dgm1612="http://schemas.microsoft.com/office/drawing/2016/12/diagram" xmlns:a16svg="http://schemas.microsoft.com/office/drawing/2016/SVG/main" xmlns:adec="http://schemas.microsoft.com/office/drawing/2017/decorative" xmlns:a18hc="http://schemas.microsoft.com/office/drawing/2018/hyperlinkcolor" xmlns:v="urn:schemas-microsoft-com:vml">
+<p:sld xmlns:a="http://schemas.openxmlformats.org/drawingml/2006/main" xmlns:r="http://schemas.openxmlformats.org/officeDocument/2006/relationships" xmlns:p="http://schemas.openxmlformats.org/presentationml/2006/main" xmlns:mc="http://schemas.openxmlformats.org/markup-compatibility/2006" xmlns:c="http://schemas.openxmlformats.org/drawingml/2006/chart" xmlns:cdr="http://schemas.openxmlformats.org/drawingml/2006/chartDrawing" xmlns:c14="http://schemas.microsoft.com/office/drawing/2007/8/2/chart" xmlns:dgm="http://schemas.openxmlformats.org/drawingml/2006/diagram" xmlns:pic="http://schemas.openxmlformats.org/drawingml/2006/picture" xmlns:wp="http://schemas.openxmlformats.org/drawingml/2006/wordprocessingDrawing" xmlns:wp14="http://schemas.microsoft.com/office/word/2010/wordprocessingDrawing" xmlns:xdr="http://schemas.openxmlformats.org/drawingml/2006/spreadsheetDrawing" xmlns:dsp="http://schemas.microsoft.com/office/drawing/2008/diagram" xmlns:p14="http://schemas.microsoft.com/office/powerpoint/2010/main" xmlns:a14="http://schemas.microsoft.com/office/drawing/2010/main" xmlns:p15="http://schemas.microsoft.com/office/powerpoint/2012/main" xmlns:p166="http://schemas.microsoft.com/office/powerpoint/2016/6/main" xmlns:a13cmd="http://schemas.microsoft.com/office/drawing/2013/main/command" xmlns:p13cmd="http://schemas.microsoft.com/office/powerpoint/2013/main/command" xmlns:p1510="http://schemas.microsoft.com/office/powerpoint/2015/10/main" xmlns:psez="http://schemas.microsoft.com/office/powerpoint/2016/sectionzoom" xmlns:pslz="http://schemas.microsoft.com/office/powerpoint/2016/slidezoom" xmlns:psuz="http://schemas.microsoft.com/office/powerpoint/2016/summaryzoom" xmlns:p173="http://schemas.microsoft.com/office/powerpoint/2017/3/main" xmlns:b="http://schemas.openxmlformats.org/officeDocument/2006/bibliography" xmlns:msink="http://schemas.microsoft.com/ink/2010/main" xmlns:cdr14="http://schemas.microsoft.com/office/drawing/2010/chartDrawing" xmlns:c15="http://schemas.microsoft.com/office/drawing/2012/chart" xmlns:cs="http://schemas.microsoft.com/office/drawing/2012/chartStyle" xmlns:ns30="http://www.w3.org/1998/Math/MathML" xmlns:ns31="http://www.w3.org/2003/InkML" xmlns:cx="http://schemas.microsoft.com/office/drawing/2014/chartex" xmlns:c16="http://schemas.microsoft.com/office/drawing/2014/chart" xmlns:dgm1611="http://schemas.microsoft.com/office/drawing/2016/11/diagram" xmlns:c173="http://schemas.microsoft.com/office/drawing/2017/03/chart" xmlns:am3d="http://schemas.microsoft.com/office/drawing/2017/model3d" xmlns:an18="http://schemas.microsoft.com/office/drawing/2018/animation" xmlns:anam3d="http://schemas.microsoft.com/office/drawing/2018/animation/model3d" xmlns:iact="http://schemas.microsoft.com/office/powerpoint/2014/inkAction" xmlns:thm15="http://schemas.microsoft.com/office/thememl/2012/main" xmlns:wetp="http://schemas.microsoft.com/office/webextensions/taskpanes/2010/11" xmlns:we="http://schemas.microsoft.com/office/webextensions/webextension/2010/11" xmlns:comp="http://schemas.openxmlformats.org/drawingml/2006/compatibility" xmlns:lc="http://schemas.openxmlformats.org/drawingml/2006/lockedCanvas" xmlns:p159="http://schemas.microsoft.com/office/powerpoint/2015/09/main" xmlns:p16="http://schemas.microsoft.com/office/powerpoint/2015/main" xmlns:p1710="http://schemas.microsoft.com/office/powerpoint/2017/10/main" xmlns:p184="http://schemas.microsoft.com/office/powerpoint/2018/4/main" xmlns:dgm14="http://schemas.microsoft.com/office/drawing/2010/diagram" xmlns:a15="http://schemas.microsoft.com/office/drawing/2012/main" xmlns:pic14="http://schemas.microsoft.com/office/drawing/2010/picture" xmlns:c16ac="http://schemas.microsoft.com/office/drawing/2014/chart/ac" xmlns:a16="http://schemas.microsoft.com/office/drawing/2014/main" xmlns:a1611="http://schemas.microsoft.com/office/drawing/2016/11/main" xmlns:dgm1612="http://schemas.microsoft.com/office/drawing/2016/12/diagram" xmlns:a16svg="http://schemas.microsoft.com/office/drawing/2016/SVG/main" xmlns:adec="http://schemas.microsoft.com/office/drawing/2017/decorative" xmlns:a18hc="http://schemas.microsoft.com/office/drawing/2018/hyperlinkcolor" xmlns:v="urn:schemas-microsoft-com:vml">
   <p:cSld>
     <p:spTree>
       <p:nvGrpSpPr>
@@ -8048,7 +8048,7 @@
 </file>
 
 <file path=ppt/slides/slide7.xml><?xml version="1.0" encoding="utf-8"?>
-<p:sld xmlns:r="http://schemas.openxmlformats.org/officeDocument/2006/relationships" xmlns:a="http://schemas.openxmlformats.org/drawingml/2006/main" xmlns:p="http://schemas.openxmlformats.org/presentationml/2006/main" xmlns:mc="http://schemas.openxmlformats.org/markup-compatibility/2006" xmlns:c="http://schemas.openxmlformats.org/drawingml/2006/chart" xmlns:cdr="http://schemas.openxmlformats.org/drawingml/2006/chartDrawing" xmlns:c14="http://schemas.microsoft.com/office/drawing/2007/8/2/chart" xmlns:dgm="http://schemas.openxmlformats.org/drawingml/2006/diagram" xmlns:pic="http://schemas.openxmlformats.org/drawingml/2006/picture" xmlns:wp="http://schemas.openxmlformats.org/drawingml/2006/wordprocessingDrawing" xmlns:wp14="http://schemas.microsoft.com/office/word/2010/wordprocessingDrawing" xmlns:xdr="http://schemas.openxmlformats.org/drawingml/2006/spreadsheetDrawing" xmlns:dsp="http://schemas.microsoft.com/office/drawing/2008/diagram" xmlns:p14="http://schemas.microsoft.com/office/powerpoint/2010/main" xmlns:a14="http://schemas.microsoft.com/office/drawing/2010/main" xmlns:p15="http://schemas.microsoft.com/office/powerpoint/2012/main" xmlns:p166="http://schemas.microsoft.com/office/powerpoint/2016/6/main" xmlns:a13cmd="http://schemas.microsoft.com/office/drawing/2013/main/command" xmlns:p13cmd="http://schemas.microsoft.com/office/powerpoint/2013/main/command" xmlns:p1510="http://schemas.microsoft.com/office/powerpoint/2015/10/main" xmlns:psez="http://schemas.microsoft.com/office/powerpoint/2016/sectionzoom" xmlns:pslz="http://schemas.microsoft.com/office/powerpoint/2016/slidezoom" xmlns:psuz="http://schemas.microsoft.com/office/powerpoint/2016/summaryzoom" xmlns:p173="http://schemas.microsoft.com/office/powerpoint/2017/3/main" xmlns:b="http://schemas.openxmlformats.org/officeDocument/2006/bibliography" xmlns:msink="http://schemas.microsoft.com/ink/2010/main" xmlns:cdr14="http://schemas.microsoft.com/office/drawing/2010/chartDrawing" xmlns:c15="http://schemas.microsoft.com/office/drawing/2012/chart" xmlns:cs="http://schemas.microsoft.com/office/drawing/2012/chartStyle" xmlns:ns30="http://www.w3.org/1998/Math/MathML" xmlns:ns31="http://www.w3.org/2003/InkML" xmlns:cx="http://schemas.microsoft.com/office/drawing/2014/chartex" xmlns:c16="http://schemas.microsoft.com/office/drawing/2014/chart" xmlns:dgm1611="http://schemas.microsoft.com/office/drawing/2016/11/diagram" xmlns:c173="http://schemas.microsoft.com/office/drawing/2017/03/chart" xmlns:am3d="http://schemas.microsoft.com/office/drawing/2017/model3d" xmlns:an18="http://schemas.microsoft.com/office/drawing/2018/animation" xmlns:anam3d="http://schemas.microsoft.com/office/drawing/2018/animation/model3d" xmlns:iact="http://schemas.microsoft.com/office/powerpoint/2014/inkAction" xmlns:thm15="http://schemas.microsoft.com/office/thememl/2012/main" xmlns:wetp="http://schemas.microsoft.com/office/webextensions/taskpanes/2010/11" xmlns:we="http://schemas.microsoft.com/office/webextensions/webextension/2010/11" xmlns:comp="http://schemas.openxmlformats.org/drawingml/2006/compatibility" xmlns:lc="http://schemas.openxmlformats.org/drawingml/2006/lockedCanvas" xmlns:p159="http://schemas.microsoft.com/office/powerpoint/2015/09/main" xmlns:p16="http://schemas.microsoft.com/office/powerpoint/2015/main" xmlns:p1710="http://schemas.microsoft.com/office/powerpoint/2017/10/main" xmlns:p184="http://schemas.microsoft.com/office/powerpoint/2018/4/main" xmlns:dgm14="http://schemas.microsoft.com/office/drawing/2010/diagram" xmlns:a15="http://schemas.microsoft.com/office/drawing/2012/main" xmlns:pic14="http://schemas.microsoft.com/office/drawing/2010/picture" xmlns:c16ac="http://schemas.microsoft.com/office/drawing/2014/chart/ac" xmlns:a16="http://schemas.microsoft.com/office/drawing/2014/main" xmlns:a1611="http://schemas.microsoft.com/office/drawing/2016/11/main" xmlns:dgm1612="http://schemas.microsoft.com/office/drawing/2016/12/diagram" xmlns:a16svg="http://schemas.microsoft.com/office/drawing/2016/SVG/main" xmlns:adec="http://schemas.microsoft.com/office/drawing/2017/decorative" xmlns:a18hc="http://schemas.microsoft.com/office/drawing/2018/hyperlinkcolor" xmlns:v="urn:schemas-microsoft-com:vml">
+<p:sld xmlns:a="http://schemas.openxmlformats.org/drawingml/2006/main" xmlns:r="http://schemas.openxmlformats.org/officeDocument/2006/relationships" xmlns:p="http://schemas.openxmlformats.org/presentationml/2006/main" xmlns:mc="http://schemas.openxmlformats.org/markup-compatibility/2006" xmlns:c="http://schemas.openxmlformats.org/drawingml/2006/chart" xmlns:cdr="http://schemas.openxmlformats.org/drawingml/2006/chartDrawing" xmlns:c14="http://schemas.microsoft.com/office/drawing/2007/8/2/chart" xmlns:dgm="http://schemas.openxmlformats.org/drawingml/2006/diagram" xmlns:pic="http://schemas.openxmlformats.org/drawingml/2006/picture" xmlns:wp="http://schemas.openxmlformats.org/drawingml/2006/wordprocessingDrawing" xmlns:wp14="http://schemas.microsoft.com/office/word/2010/wordprocessingDrawing" xmlns:xdr="http://schemas.openxmlformats.org/drawingml/2006/spreadsheetDrawing" xmlns:dsp="http://schemas.microsoft.com/office/drawing/2008/diagram" xmlns:p14="http://schemas.microsoft.com/office/powerpoint/2010/main" xmlns:a14="http://schemas.microsoft.com/office/drawing/2010/main" xmlns:p15="http://schemas.microsoft.com/office/powerpoint/2012/main" xmlns:p166="http://schemas.microsoft.com/office/powerpoint/2016/6/main" xmlns:a13cmd="http://schemas.microsoft.com/office/drawing/2013/main/command" xmlns:p13cmd="http://schemas.microsoft.com/office/powerpoint/2013/main/command" xmlns:p1510="http://schemas.microsoft.com/office/powerpoint/2015/10/main" xmlns:psez="http://schemas.microsoft.com/office/powerpoint/2016/sectionzoom" xmlns:pslz="http://schemas.microsoft.com/office/powerpoint/2016/slidezoom" xmlns:psuz="http://schemas.microsoft.com/office/powerpoint/2016/summaryzoom" xmlns:p173="http://schemas.microsoft.com/office/powerpoint/2017/3/main" xmlns:b="http://schemas.openxmlformats.org/officeDocument/2006/bibliography" xmlns:msink="http://schemas.microsoft.com/ink/2010/main" xmlns:cdr14="http://schemas.microsoft.com/office/drawing/2010/chartDrawing" xmlns:c15="http://schemas.microsoft.com/office/drawing/2012/chart" xmlns:cs="http://schemas.microsoft.com/office/drawing/2012/chartStyle" xmlns:ns30="http://www.w3.org/1998/Math/MathML" xmlns:ns31="http://www.w3.org/2003/InkML" xmlns:cx="http://schemas.microsoft.com/office/drawing/2014/chartex" xmlns:c16="http://schemas.microsoft.com/office/drawing/2014/chart" xmlns:dgm1611="http://schemas.microsoft.com/office/drawing/2016/11/diagram" xmlns:c173="http://schemas.microsoft.com/office/drawing/2017/03/chart" xmlns:am3d="http://schemas.microsoft.com/office/drawing/2017/model3d" xmlns:an18="http://schemas.microsoft.com/office/drawing/2018/animation" xmlns:anam3d="http://schemas.microsoft.com/office/drawing/2018/animation/model3d" xmlns:iact="http://schemas.microsoft.com/office/powerpoint/2014/inkAction" xmlns:thm15="http://schemas.microsoft.com/office/thememl/2012/main" xmlns:wetp="http://schemas.microsoft.com/office/webextensions/taskpanes/2010/11" xmlns:we="http://schemas.microsoft.com/office/webextensions/webextension/2010/11" xmlns:comp="http://schemas.openxmlformats.org/drawingml/2006/compatibility" xmlns:lc="http://schemas.openxmlformats.org/drawingml/2006/lockedCanvas" xmlns:p159="http://schemas.microsoft.com/office/powerpoint/2015/09/main" xmlns:p16="http://schemas.microsoft.com/office/powerpoint/2015/main" xmlns:p1710="http://schemas.microsoft.com/office/powerpoint/2017/10/main" xmlns:p184="http://schemas.microsoft.com/office/powerpoint/2018/4/main" xmlns:dgm14="http://schemas.microsoft.com/office/drawing/2010/diagram" xmlns:a15="http://schemas.microsoft.com/office/drawing/2012/main" xmlns:pic14="http://schemas.microsoft.com/office/drawing/2010/picture" xmlns:c16ac="http://schemas.microsoft.com/office/drawing/2014/chart/ac" xmlns:a16="http://schemas.microsoft.com/office/drawing/2014/main" xmlns:a1611="http://schemas.microsoft.com/office/drawing/2016/11/main" xmlns:dgm1612="http://schemas.microsoft.com/office/drawing/2016/12/diagram" xmlns:a16svg="http://schemas.microsoft.com/office/drawing/2016/SVG/main" xmlns:adec="http://schemas.microsoft.com/office/drawing/2017/decorative" xmlns:a18hc="http://schemas.microsoft.com/office/drawing/2018/hyperlinkcolor" xmlns:v="urn:schemas-microsoft-com:vml">
   <p:cSld>
     <p:spTree>
       <p:nvGrpSpPr>
@@ -8253,7 +8253,7 @@
 </file>
 
 <file path=ppt/slides/slide8.xml><?xml version="1.0" encoding="utf-8"?>
-<p:sld xmlns:r="http://schemas.openxmlformats.org/officeDocument/2006/relationships" xmlns:a="http://schemas.openxmlformats.org/drawingml/2006/main" xmlns:p="http://schemas.openxmlformats.org/presentationml/2006/main" xmlns:mc="http://schemas.openxmlformats.org/markup-compatibility/2006" xmlns:c="http://schemas.openxmlformats.org/drawingml/2006/chart" xmlns:cdr="http://schemas.openxmlformats.org/drawingml/2006/chartDrawing" xmlns:c14="http://schemas.microsoft.com/office/drawing/2007/8/2/chart" xmlns:dgm="http://schemas.openxmlformats.org/drawingml/2006/diagram" xmlns:pic="http://schemas.openxmlformats.org/drawingml/2006/picture" xmlns:wp="http://schemas.openxmlformats.org/drawingml/2006/wordprocessingDrawing" xmlns:wp14="http://schemas.microsoft.com/office/word/2010/wordprocessingDrawing" xmlns:xdr="http://schemas.openxmlformats.org/drawingml/2006/spreadsheetDrawing" xmlns:dsp="http://schemas.microsoft.com/office/drawing/2008/diagram" xmlns:p14="http://schemas.microsoft.com/office/powerpoint/2010/main" xmlns:a14="http://schemas.microsoft.com/office/drawing/2010/main" xmlns:p15="http://schemas.microsoft.com/office/powerpoint/2012/main" xmlns:p166="http://schemas.microsoft.com/office/powerpoint/2016/6/main" xmlns:a13cmd="http://schemas.microsoft.com/office/drawing/2013/main/command" xmlns:p13cmd="http://schemas.microsoft.com/office/powerpoint/2013/main/command" xmlns:p1510="http://schemas.microsoft.com/office/powerpoint/2015/10/main" xmlns:psez="http://schemas.microsoft.com/office/powerpoint/2016/sectionzoom" xmlns:pslz="http://schemas.microsoft.com/office/powerpoint/2016/slidezoom" xmlns:psuz="http://schemas.microsoft.com/office/powerpoint/2016/summaryzoom" xmlns:p173="http://schemas.microsoft.com/office/powerpoint/2017/3/main" xmlns:b="http://schemas.openxmlformats.org/officeDocument/2006/bibliography" xmlns:msink="http://schemas.microsoft.com/ink/2010/main" xmlns:cdr14="http://schemas.microsoft.com/office/drawing/2010/chartDrawing" xmlns:c15="http://schemas.microsoft.com/office/drawing/2012/chart" xmlns:cs="http://schemas.microsoft.com/office/drawing/2012/chartStyle" xmlns:ns30="http://www.w3.org/1998/Math/MathML" xmlns:ns31="http://www.w3.org/2003/InkML" xmlns:cx="http://schemas.microsoft.com/office/drawing/2014/chartex" xmlns:c16="http://schemas.microsoft.com/office/drawing/2014/chart" xmlns:dgm1611="http://schemas.microsoft.com/office/drawing/2016/11/diagram" xmlns:c173="http://schemas.microsoft.com/office/drawing/2017/03/chart" xmlns:am3d="http://schemas.microsoft.com/office/drawing/2017/model3d" xmlns:an18="http://schemas.microsoft.com/office/drawing/2018/animation" xmlns:anam3d="http://schemas.microsoft.com/office/drawing/2018/animation/model3d" xmlns:iact="http://schemas.microsoft.com/office/powerpoint/2014/inkAction" xmlns:thm15="http://schemas.microsoft.com/office/thememl/2012/main" xmlns:wetp="http://schemas.microsoft.com/office/webextensions/taskpanes/2010/11" xmlns:we="http://schemas.microsoft.com/office/webextensions/webextension/2010/11" xmlns:comp="http://schemas.openxmlformats.org/drawingml/2006/compatibility" xmlns:lc="http://schemas.openxmlformats.org/drawingml/2006/lockedCanvas" xmlns:p159="http://schemas.microsoft.com/office/powerpoint/2015/09/main" xmlns:p16="http://schemas.microsoft.com/office/powerpoint/2015/main" xmlns:p1710="http://schemas.microsoft.com/office/powerpoint/2017/10/main" xmlns:p184="http://schemas.microsoft.com/office/powerpoint/2018/4/main" xmlns:dgm14="http://schemas.microsoft.com/office/drawing/2010/diagram" xmlns:a15="http://schemas.microsoft.com/office/drawing/2012/main" xmlns:pic14="http://schemas.microsoft.com/office/drawing/2010/picture" xmlns:c16ac="http://schemas.microsoft.com/office/drawing/2014/chart/ac" xmlns:a16="http://schemas.microsoft.com/office/drawing/2014/main" xmlns:a1611="http://schemas.microsoft.com/office/drawing/2016/11/main" xmlns:dgm1612="http://schemas.microsoft.com/office/drawing/2016/12/diagram" xmlns:a16svg="http://schemas.microsoft.com/office/drawing/2016/SVG/main" xmlns:adec="http://schemas.microsoft.com/office/drawing/2017/decorative" xmlns:a18hc="http://schemas.microsoft.com/office/drawing/2018/hyperlinkcolor" xmlns:v="urn:schemas-microsoft-com:vml">
+<p:sld xmlns:a="http://schemas.openxmlformats.org/drawingml/2006/main" xmlns:r="http://schemas.openxmlformats.org/officeDocument/2006/relationships" xmlns:p="http://schemas.openxmlformats.org/presentationml/2006/main" xmlns:mc="http://schemas.openxmlformats.org/markup-compatibility/2006" xmlns:c="http://schemas.openxmlformats.org/drawingml/2006/chart" xmlns:cdr="http://schemas.openxmlformats.org/drawingml/2006/chartDrawing" xmlns:c14="http://schemas.microsoft.com/office/drawing/2007/8/2/chart" xmlns:dgm="http://schemas.openxmlformats.org/drawingml/2006/diagram" xmlns:pic="http://schemas.openxmlformats.org/drawingml/2006/picture" xmlns:wp="http://schemas.openxmlformats.org/drawingml/2006/wordprocessingDrawing" xmlns:wp14="http://schemas.microsoft.com/office/word/2010/wordprocessingDrawing" xmlns:xdr="http://schemas.openxmlformats.org/drawingml/2006/spreadsheetDrawing" xmlns:dsp="http://schemas.microsoft.com/office/drawing/2008/diagram" xmlns:p14="http://schemas.microsoft.com/office/powerpoint/2010/main" xmlns:a14="http://schemas.microsoft.com/office/drawing/2010/main" xmlns:p15="http://schemas.microsoft.com/office/powerpoint/2012/main" xmlns:p166="http://schemas.microsoft.com/office/powerpoint/2016/6/main" xmlns:a13cmd="http://schemas.microsoft.com/office/drawing/2013/main/command" xmlns:p13cmd="http://schemas.microsoft.com/office/powerpoint/2013/main/command" xmlns:p1510="http://schemas.microsoft.com/office/powerpoint/2015/10/main" xmlns:psez="http://schemas.microsoft.com/office/powerpoint/2016/sectionzoom" xmlns:pslz="http://schemas.microsoft.com/office/powerpoint/2016/slidezoom" xmlns:psuz="http://schemas.microsoft.com/office/powerpoint/2016/summaryzoom" xmlns:p173="http://schemas.microsoft.com/office/powerpoint/2017/3/main" xmlns:b="http://schemas.openxmlformats.org/officeDocument/2006/bibliography" xmlns:msink="http://schemas.microsoft.com/ink/2010/main" xmlns:cdr14="http://schemas.microsoft.com/office/drawing/2010/chartDrawing" xmlns:c15="http://schemas.microsoft.com/office/drawing/2012/chart" xmlns:cs="http://schemas.microsoft.com/office/drawing/2012/chartStyle" xmlns:ns30="http://www.w3.org/1998/Math/MathML" xmlns:ns31="http://www.w3.org/2003/InkML" xmlns:cx="http://schemas.microsoft.com/office/drawing/2014/chartex" xmlns:c16="http://schemas.microsoft.com/office/drawing/2014/chart" xmlns:dgm1611="http://schemas.microsoft.com/office/drawing/2016/11/diagram" xmlns:c173="http://schemas.microsoft.com/office/drawing/2017/03/chart" xmlns:am3d="http://schemas.microsoft.com/office/drawing/2017/model3d" xmlns:an18="http://schemas.microsoft.com/office/drawing/2018/animation" xmlns:anam3d="http://schemas.microsoft.com/office/drawing/2018/animation/model3d" xmlns:iact="http://schemas.microsoft.com/office/powerpoint/2014/inkAction" xmlns:thm15="http://schemas.microsoft.com/office/thememl/2012/main" xmlns:wetp="http://schemas.microsoft.com/office/webextensions/taskpanes/2010/11" xmlns:we="http://schemas.microsoft.com/office/webextensions/webextension/2010/11" xmlns:comp="http://schemas.openxmlformats.org/drawingml/2006/compatibility" xmlns:lc="http://schemas.openxmlformats.org/drawingml/2006/lockedCanvas" xmlns:p159="http://schemas.microsoft.com/office/powerpoint/2015/09/main" xmlns:p16="http://schemas.microsoft.com/office/powerpoint/2015/main" xmlns:p1710="http://schemas.microsoft.com/office/powerpoint/2017/10/main" xmlns:p184="http://schemas.microsoft.com/office/powerpoint/2018/4/main" xmlns:dgm14="http://schemas.microsoft.com/office/drawing/2010/diagram" xmlns:a15="http://schemas.microsoft.com/office/drawing/2012/main" xmlns:pic14="http://schemas.microsoft.com/office/drawing/2010/picture" xmlns:c16ac="http://schemas.microsoft.com/office/drawing/2014/chart/ac" xmlns:a16="http://schemas.microsoft.com/office/drawing/2014/main" xmlns:a1611="http://schemas.microsoft.com/office/drawing/2016/11/main" xmlns:dgm1612="http://schemas.microsoft.com/office/drawing/2016/12/diagram" xmlns:a16svg="http://schemas.microsoft.com/office/drawing/2016/SVG/main" xmlns:adec="http://schemas.microsoft.com/office/drawing/2017/decorative" xmlns:a18hc="http://schemas.microsoft.com/office/drawing/2018/hyperlinkcolor" xmlns:v="urn:schemas-microsoft-com:vml">
   <p:cSld>
     <p:spTree>
       <p:nvGrpSpPr>
@@ -8522,7 +8522,7 @@
 </file>
 
 <file path=ppt/slides/slide9.xml><?xml version="1.0" encoding="utf-8"?>
-<p:sld xmlns:r="http://schemas.openxmlformats.org/officeDocument/2006/relationships" xmlns:a="http://schemas.openxmlformats.org/drawingml/2006/main" xmlns:p="http://schemas.openxmlformats.org/presentationml/2006/main" xmlns:mc="http://schemas.openxmlformats.org/markup-compatibility/2006" xmlns:c="http://schemas.openxmlformats.org/drawingml/2006/chart" xmlns:cdr="http://schemas.openxmlformats.org/drawingml/2006/chartDrawing" xmlns:c14="http://schemas.microsoft.com/office/drawing/2007/8/2/chart" xmlns:dgm="http://schemas.openxmlformats.org/drawingml/2006/diagram" xmlns:pic="http://schemas.openxmlformats.org/drawingml/2006/picture" xmlns:wp="http://schemas.openxmlformats.org/drawingml/2006/wordprocessingDrawing" xmlns:wp14="http://schemas.microsoft.com/office/word/2010/wordprocessingDrawing" xmlns:xdr="http://schemas.openxmlformats.org/drawingml/2006/spreadsheetDrawing" xmlns:dsp="http://schemas.microsoft.com/office/drawing/2008/diagram" xmlns:p14="http://schemas.microsoft.com/office/powerpoint/2010/main" xmlns:a14="http://schemas.microsoft.com/office/drawing/2010/main" xmlns:p15="http://schemas.microsoft.com/office/powerpoint/2012/main" xmlns:p166="http://schemas.microsoft.com/office/powerpoint/2016/6/main" xmlns:a13cmd="http://schemas.microsoft.com/office/drawing/2013/main/command" xmlns:p13cmd="http://schemas.microsoft.com/office/powerpoint/2013/main/command" xmlns:p1510="http://schemas.microsoft.com/office/powerpoint/2015/10/main" xmlns:psez="http://schemas.microsoft.com/office/powerpoint/2016/sectionzoom" xmlns:pslz="http://schemas.microsoft.com/office/powerpoint/2016/slidezoom" xmlns:psuz="http://schemas.microsoft.com/office/powerpoint/2016/summaryzoom" xmlns:p173="http://schemas.microsoft.com/office/powerpoint/2017/3/main" xmlns:b="http://schemas.openxmlformats.org/officeDocument/2006/bibliography" xmlns:msink="http://schemas.microsoft.com/ink/2010/main" xmlns:cdr14="http://schemas.microsoft.com/office/drawing/2010/chartDrawing" xmlns:c15="http://schemas.microsoft.com/office/drawing/2012/chart" xmlns:cs="http://schemas.microsoft.com/office/drawing/2012/chartStyle" xmlns:ns30="http://www.w3.org/1998/Math/MathML" xmlns:ns31="http://www.w3.org/2003/InkML" xmlns:cx="http://schemas.microsoft.com/office/drawing/2014/chartex" xmlns:c16="http://schemas.microsoft.com/office/drawing/2014/chart" xmlns:dgm1611="http://schemas.microsoft.com/office/drawing/2016/11/diagram" xmlns:c173="http://schemas.microsoft.com/office/drawing/2017/03/chart" xmlns:am3d="http://schemas.microsoft.com/office/drawing/2017/model3d" xmlns:an18="http://schemas.microsoft.com/office/drawing/2018/animation" xmlns:anam3d="http://schemas.microsoft.com/office/drawing/2018/animation/model3d" xmlns:iact="http://schemas.microsoft.com/office/powerpoint/2014/inkAction" xmlns:thm15="http://schemas.microsoft.com/office/thememl/2012/main" xmlns:wetp="http://schemas.microsoft.com/office/webextensions/taskpanes/2010/11" xmlns:we="http://schemas.microsoft.com/office/webextensions/webextension/2010/11" xmlns:comp="http://schemas.openxmlformats.org/drawingml/2006/compatibility" xmlns:lc="http://schemas.openxmlformats.org/drawingml/2006/lockedCanvas" xmlns:p159="http://schemas.microsoft.com/office/powerpoint/2015/09/main" xmlns:p16="http://schemas.microsoft.com/office/powerpoint/2015/main" xmlns:p1710="http://schemas.microsoft.com/office/powerpoint/2017/10/main" xmlns:p184="http://schemas.microsoft.com/office/powerpoint/2018/4/main" xmlns:dgm14="http://schemas.microsoft.com/office/drawing/2010/diagram" xmlns:a15="http://schemas.microsoft.com/office/drawing/2012/main" xmlns:pic14="http://schemas.microsoft.com/office/drawing/2010/picture" xmlns:c16ac="http://schemas.microsoft.com/office/drawing/2014/chart/ac" xmlns:a16="http://schemas.microsoft.com/office/drawing/2014/main" xmlns:a1611="http://schemas.microsoft.com/office/drawing/2016/11/main" xmlns:dgm1612="http://schemas.microsoft.com/office/drawing/2016/12/diagram" xmlns:a16svg="http://schemas.microsoft.com/office/drawing/2016/SVG/main" xmlns:adec="http://schemas.microsoft.com/office/drawing/2017/decorative" xmlns:a18hc="http://schemas.microsoft.com/office/drawing/2018/hyperlinkcolor" xmlns:v="urn:schemas-microsoft-com:vml">
+<p:sld xmlns:a="http://schemas.openxmlformats.org/drawingml/2006/main" xmlns:r="http://schemas.openxmlformats.org/officeDocument/2006/relationships" xmlns:p="http://schemas.openxmlformats.org/presentationml/2006/main" xmlns:mc="http://schemas.openxmlformats.org/markup-compatibility/2006" xmlns:c="http://schemas.openxmlformats.org/drawingml/2006/chart" xmlns:cdr="http://schemas.openxmlformats.org/drawingml/2006/chartDrawing" xmlns:c14="http://schemas.microsoft.com/office/drawing/2007/8/2/chart" xmlns:dgm="http://schemas.openxmlformats.org/drawingml/2006/diagram" xmlns:pic="http://schemas.openxmlformats.org/drawingml/2006/picture" xmlns:wp="http://schemas.openxmlformats.org/drawingml/2006/wordprocessingDrawing" xmlns:wp14="http://schemas.microsoft.com/office/word/2010/wordprocessingDrawing" xmlns:xdr="http://schemas.openxmlformats.org/drawingml/2006/spreadsheetDrawing" xmlns:dsp="http://schemas.microsoft.com/office/drawing/2008/diagram" xmlns:p14="http://schemas.microsoft.com/office/powerpoint/2010/main" xmlns:a14="http://schemas.microsoft.com/office/drawing/2010/main" xmlns:p15="http://schemas.microsoft.com/office/powerpoint/2012/main" xmlns:p166="http://schemas.microsoft.com/office/powerpoint/2016/6/main" xmlns:a13cmd="http://schemas.microsoft.com/office/drawing/2013/main/command" xmlns:p13cmd="http://schemas.microsoft.com/office/powerpoint/2013/main/command" xmlns:p1510="http://schemas.microsoft.com/office/powerpoint/2015/10/main" xmlns:psez="http://schemas.microsoft.com/office/powerpoint/2016/sectionzoom" xmlns:pslz="http://schemas.microsoft.com/office/powerpoint/2016/slidezoom" xmlns:psuz="http://schemas.microsoft.com/office/powerpoint/2016/summaryzoom" xmlns:p173="http://schemas.microsoft.com/office/powerpoint/2017/3/main" xmlns:b="http://schemas.openxmlformats.org/officeDocument/2006/bibliography" xmlns:msink="http://schemas.microsoft.com/ink/2010/main" xmlns:cdr14="http://schemas.microsoft.com/office/drawing/2010/chartDrawing" xmlns:c15="http://schemas.microsoft.com/office/drawing/2012/chart" xmlns:cs="http://schemas.microsoft.com/office/drawing/2012/chartStyle" xmlns:ns30="http://www.w3.org/1998/Math/MathML" xmlns:ns31="http://www.w3.org/2003/InkML" xmlns:cx="http://schemas.microsoft.com/office/drawing/2014/chartex" xmlns:c16="http://schemas.microsoft.com/office/drawing/2014/chart" xmlns:dgm1611="http://schemas.microsoft.com/office/drawing/2016/11/diagram" xmlns:c173="http://schemas.microsoft.com/office/drawing/2017/03/chart" xmlns:am3d="http://schemas.microsoft.com/office/drawing/2017/model3d" xmlns:an18="http://schemas.microsoft.com/office/drawing/2018/animation" xmlns:anam3d="http://schemas.microsoft.com/office/drawing/2018/animation/model3d" xmlns:iact="http://schemas.microsoft.com/office/powerpoint/2014/inkAction" xmlns:thm15="http://schemas.microsoft.com/office/thememl/2012/main" xmlns:wetp="http://schemas.microsoft.com/office/webextensions/taskpanes/2010/11" xmlns:we="http://schemas.microsoft.com/office/webextensions/webextension/2010/11" xmlns:comp="http://schemas.openxmlformats.org/drawingml/2006/compatibility" xmlns:lc="http://schemas.openxmlformats.org/drawingml/2006/lockedCanvas" xmlns:p159="http://schemas.microsoft.com/office/powerpoint/2015/09/main" xmlns:p16="http://schemas.microsoft.com/office/powerpoint/2015/main" xmlns:p1710="http://schemas.microsoft.com/office/powerpoint/2017/10/main" xmlns:p184="http://schemas.microsoft.com/office/powerpoint/2018/4/main" xmlns:dgm14="http://schemas.microsoft.com/office/drawing/2010/diagram" xmlns:a15="http://schemas.microsoft.com/office/drawing/2012/main" xmlns:pic14="http://schemas.microsoft.com/office/drawing/2010/picture" xmlns:c16ac="http://schemas.microsoft.com/office/drawing/2014/chart/ac" xmlns:a16="http://schemas.microsoft.com/office/drawing/2014/main" xmlns:a1611="http://schemas.microsoft.com/office/drawing/2016/11/main" xmlns:dgm1612="http://schemas.microsoft.com/office/drawing/2016/12/diagram" xmlns:a16svg="http://schemas.microsoft.com/office/drawing/2016/SVG/main" xmlns:adec="http://schemas.microsoft.com/office/drawing/2017/decorative" xmlns:a18hc="http://schemas.microsoft.com/office/drawing/2018/hyperlinkcolor" xmlns:v="urn:schemas-microsoft-com:vml">
   <p:cSld>
     <p:spTree>
       <p:nvGrpSpPr>
